--- a/ML/ML_DL Algorithms.pptx
+++ b/ML/ML_DL Algorithms.pptx
@@ -5,10 +5,10 @@
     <p:sldMasterId id="2147483660" r:id="rId1"/>
   </p:sldMasterIdLst>
   <p:notesMasterIdLst>
-    <p:notesMasterId r:id="rId17"/>
+    <p:notesMasterId r:id="rId22"/>
   </p:notesMasterIdLst>
   <p:handoutMasterIdLst>
-    <p:handoutMasterId r:id="rId18"/>
+    <p:handoutMasterId r:id="rId23"/>
   </p:handoutMasterIdLst>
   <p:sldIdLst>
     <p:sldId id="256" r:id="rId2"/>
@@ -23,9 +23,14 @@
     <p:sldId id="1148" r:id="rId11"/>
     <p:sldId id="1139" r:id="rId12"/>
     <p:sldId id="1146" r:id="rId13"/>
-    <p:sldId id="1150" r:id="rId14"/>
-    <p:sldId id="1151" r:id="rId15"/>
-    <p:sldId id="1152" r:id="rId16"/>
+    <p:sldId id="1156" r:id="rId14"/>
+    <p:sldId id="1150" r:id="rId15"/>
+    <p:sldId id="1151" r:id="rId16"/>
+    <p:sldId id="1152" r:id="rId17"/>
+    <p:sldId id="1153" r:id="rId18"/>
+    <p:sldId id="1155" r:id="rId19"/>
+    <p:sldId id="1154" r:id="rId20"/>
+    <p:sldId id="1157" r:id="rId21"/>
   </p:sldIdLst>
   <p:sldSz cx="12192000" cy="6858000"/>
   <p:notesSz cx="6858000" cy="9144000"/>
@@ -145,9 +150,14 @@
             <p14:sldId id="1148"/>
             <p14:sldId id="1139"/>
             <p14:sldId id="1146"/>
+            <p14:sldId id="1156"/>
             <p14:sldId id="1150"/>
             <p14:sldId id="1151"/>
             <p14:sldId id="1152"/>
+            <p14:sldId id="1153"/>
+            <p14:sldId id="1155"/>
+            <p14:sldId id="1154"/>
+            <p14:sldId id="1157"/>
           </p14:sldIdLst>
         </p14:section>
         <p14:section name="자세한 정보" id="{2CC34DB2-6590-42C0-AD4B-A04C6060184E}">
@@ -6639,6 +6649,1168 @@
         <p:cNvPr id="1" name="">
           <a:extLst>
             <a:ext uri="{FF2B5EF4-FFF2-40B4-BE49-F238E27FC236}">
+              <a16:creationId xmlns:a16="http://schemas.microsoft.com/office/drawing/2014/main" id="{A9394193-4D93-6262-1D42-12BE57AA1B07}"/>
+            </a:ext>
+          </a:extLst>
+        </p:cNvPr>
+        <p:cNvGrpSpPr/>
+        <p:nvPr/>
+      </p:nvGrpSpPr>
+      <p:grpSpPr>
+        <a:xfrm>
+          <a:off x="0" y="0"/>
+          <a:ext cx="0" cy="0"/>
+          <a:chOff x="0" y="0"/>
+          <a:chExt cx="0" cy="0"/>
+        </a:xfrm>
+      </p:grpSpPr>
+      <p:sp>
+        <p:nvSpPr>
+          <p:cNvPr id="4" name="슬라이드 번호 개체 틀 3">
+            <a:extLst>
+              <a:ext uri="{FF2B5EF4-FFF2-40B4-BE49-F238E27FC236}">
+                <a16:creationId xmlns:a16="http://schemas.microsoft.com/office/drawing/2014/main" id="{61A9A4A4-7DD1-4DEA-2822-79A587CE5DEB}"/>
+              </a:ext>
+            </a:extLst>
+          </p:cNvPr>
+          <p:cNvSpPr>
+            <a:spLocks noGrp="1"/>
+          </p:cNvSpPr>
+          <p:nvPr>
+            <p:ph type="sldNum" sz="quarter" idx="12"/>
+          </p:nvPr>
+        </p:nvSpPr>
+        <p:spPr>
+          <a:xfrm>
+            <a:off x="10514011" y="6036261"/>
+            <a:ext cx="753545" cy="365125"/>
+          </a:xfrm>
+        </p:spPr>
+        <p:txBody>
+          <a:bodyPr/>
+          <a:lstStyle/>
+          <a:p>
+            <a:fld id="{D57F1E4F-1CFF-5643-939E-217C01CDF565}" type="slidenum">
+              <a:rPr lang="en-US" smtClean="0"/>
+              <a:pPr/>
+              <a:t>13</a:t>
+            </a:fld>
+            <a:endParaRPr lang="en-US" dirty="0"/>
+          </a:p>
+        </p:txBody>
+      </p:sp>
+      <p:sp>
+        <p:nvSpPr>
+          <p:cNvPr id="3" name="제목 1">
+            <a:extLst>
+              <a:ext uri="{FF2B5EF4-FFF2-40B4-BE49-F238E27FC236}">
+                <a16:creationId xmlns:a16="http://schemas.microsoft.com/office/drawing/2014/main" id="{3923365F-B2E5-D2A0-3F8A-80CFE12EE0E0}"/>
+              </a:ext>
+            </a:extLst>
+          </p:cNvPr>
+          <p:cNvSpPr txBox="1">
+            <a:spLocks/>
+          </p:cNvSpPr>
+          <p:nvPr/>
+        </p:nvSpPr>
+        <p:spPr>
+          <a:xfrm>
+            <a:off x="475645" y="481983"/>
+            <a:ext cx="10353762" cy="766439"/>
+          </a:xfrm>
+          <a:prstGeom prst="rect">
+            <a:avLst/>
+          </a:prstGeom>
+        </p:spPr>
+        <p:txBody>
+          <a:bodyPr vert="horz" lIns="91440" tIns="45720" rIns="91440" bIns="45720" rtlCol="0" anchor="ctr">
+            <a:normAutofit/>
+          </a:bodyPr>
+          <a:lstStyle>
+            <a:lvl1pPr algn="ctr" defTabSz="914400" rtl="0" eaLnBrk="1" latinLnBrk="1" hangingPunct="1">
+              <a:lnSpc>
+                <a:spcPct val="90000"/>
+              </a:lnSpc>
+              <a:spcBef>
+                <a:spcPct val="0"/>
+              </a:spcBef>
+              <a:buNone/>
+              <a:defRPr sz="3200" kern="1200" cap="all" baseline="0">
+                <a:solidFill>
+                  <a:schemeClr val="tx1"/>
+                </a:solidFill>
+                <a:effectLst/>
+                <a:latin typeface="Batang" panose="02030600000101010101" pitchFamily="18" charset="-127"/>
+                <a:ea typeface="Batang" panose="02030600000101010101" pitchFamily="18" charset="-127"/>
+                <a:cs typeface="+mj-cs"/>
+              </a:defRPr>
+            </a:lvl1pPr>
+          </a:lstStyle>
+          <a:p>
+            <a:pPr algn="l">
+              <a:lnSpc>
+                <a:spcPct val="150000"/>
+              </a:lnSpc>
+            </a:pPr>
+            <a:r>
+              <a:rPr lang="en-US" altLang="ko-KR" sz="2800" b="1" cap="none" dirty="0">
+                <a:latin typeface="D2Coding" panose="020B0609020101020101" pitchFamily="49" charset="-127"/>
+                <a:ea typeface="D2Coding" panose="020B0609020101020101" pitchFamily="49" charset="-127"/>
+              </a:rPr>
+              <a:t>Data, algorithms and Model</a:t>
+            </a:r>
+            <a:endParaRPr lang="en-US" altLang="ko-KR" sz="2800" cap="none" dirty="0">
+              <a:latin typeface="D2Coding" panose="020B0609020101020101" pitchFamily="49" charset="-127"/>
+              <a:ea typeface="D2Coding" panose="020B0609020101020101" pitchFamily="49" charset="-127"/>
+            </a:endParaRPr>
+          </a:p>
+        </p:txBody>
+      </p:sp>
+      <p:sp>
+        <p:nvSpPr>
+          <p:cNvPr id="8" name="TextBox 7">
+            <a:extLst>
+              <a:ext uri="{FF2B5EF4-FFF2-40B4-BE49-F238E27FC236}">
+                <a16:creationId xmlns:a16="http://schemas.microsoft.com/office/drawing/2014/main" id="{6E31D397-2036-9061-E025-D6C7AE48B64A}"/>
+              </a:ext>
+            </a:extLst>
+          </p:cNvPr>
+          <p:cNvSpPr txBox="1"/>
+          <p:nvPr/>
+        </p:nvSpPr>
+        <p:spPr>
+          <a:xfrm>
+            <a:off x="619760" y="1311322"/>
+            <a:ext cx="10952480" cy="465320"/>
+          </a:xfrm>
+          <a:prstGeom prst="rect">
+            <a:avLst/>
+          </a:prstGeom>
+          <a:noFill/>
+        </p:spPr>
+        <p:txBody>
+          <a:bodyPr wrap="square" rtlCol="0">
+            <a:spAutoFit/>
+          </a:bodyPr>
+          <a:lstStyle/>
+          <a:p>
+            <a:pPr>
+              <a:lnSpc>
+                <a:spcPct val="150000"/>
+              </a:lnSpc>
+            </a:pPr>
+            <a:r>
+              <a:rPr lang="ko-KR" altLang="en-US" dirty="0">
+                <a:latin typeface="D2Coding" panose="020B0609020101020101" pitchFamily="49" charset="-127"/>
+                <a:ea typeface="D2Coding" panose="020B0609020101020101" pitchFamily="49" charset="-127"/>
+              </a:rPr>
+              <a:t>지도학습</a:t>
+            </a:r>
+            <a:r>
+              <a:rPr lang="en-US" altLang="ko-KR" dirty="0">
+                <a:latin typeface="D2Coding" panose="020B0609020101020101" pitchFamily="49" charset="-127"/>
+                <a:ea typeface="D2Coding" panose="020B0609020101020101" pitchFamily="49" charset="-127"/>
+              </a:rPr>
+              <a:t>, </a:t>
+            </a:r>
+            <a:r>
+              <a:rPr lang="ko-KR" altLang="en-US" dirty="0">
+                <a:latin typeface="D2Coding" panose="020B0609020101020101" pitchFamily="49" charset="-127"/>
+                <a:ea typeface="D2Coding" panose="020B0609020101020101" pitchFamily="49" charset="-127"/>
+              </a:rPr>
+              <a:t>비지도학습</a:t>
+            </a:r>
+            <a:r>
+              <a:rPr lang="en-US" altLang="ko-KR" dirty="0">
+                <a:latin typeface="D2Coding" panose="020B0609020101020101" pitchFamily="49" charset="-127"/>
+                <a:ea typeface="D2Coding" panose="020B0609020101020101" pitchFamily="49" charset="-127"/>
+              </a:rPr>
+              <a:t>, </a:t>
+            </a:r>
+            <a:r>
+              <a:rPr lang="ko-KR" altLang="en-US" dirty="0">
+                <a:latin typeface="D2Coding" panose="020B0609020101020101" pitchFamily="49" charset="-127"/>
+                <a:ea typeface="D2Coding" panose="020B0609020101020101" pitchFamily="49" charset="-127"/>
+              </a:rPr>
+              <a:t>차원축소 모델</a:t>
+            </a:r>
+          </a:p>
+        </p:txBody>
+      </p:sp>
+      <p:sp>
+        <p:nvSpPr>
+          <p:cNvPr id="19" name="TextBox 18">
+            <a:extLst>
+              <a:ext uri="{FF2B5EF4-FFF2-40B4-BE49-F238E27FC236}">
+                <a16:creationId xmlns:a16="http://schemas.microsoft.com/office/drawing/2014/main" id="{B385F77C-3177-F463-D9A2-5342ACC192E2}"/>
+              </a:ext>
+            </a:extLst>
+          </p:cNvPr>
+          <p:cNvSpPr txBox="1"/>
+          <p:nvPr/>
+        </p:nvSpPr>
+        <p:spPr>
+          <a:xfrm>
+            <a:off x="1333044" y="2316004"/>
+            <a:ext cx="2839239" cy="369332"/>
+          </a:xfrm>
+          <a:prstGeom prst="rect">
+            <a:avLst/>
+          </a:prstGeom>
+          <a:noFill/>
+        </p:spPr>
+        <p:txBody>
+          <a:bodyPr wrap="none" rtlCol="0">
+            <a:spAutoFit/>
+          </a:bodyPr>
+          <a:lstStyle/>
+          <a:p>
+            <a:r>
+              <a:rPr lang="en-US" altLang="ko-KR" dirty="0">
+                <a:latin typeface="D2Coding" panose="020B0609020101020101" pitchFamily="49" charset="-127"/>
+                <a:ea typeface="D2Coding" panose="020B0609020101020101" pitchFamily="49" charset="-127"/>
+              </a:rPr>
+              <a:t>Model = Algorithm(Data)</a:t>
+            </a:r>
+          </a:p>
+        </p:txBody>
+      </p:sp>
+      <mc:AlternateContent xmlns:mc="http://schemas.openxmlformats.org/markup-compatibility/2006">
+        <mc:Choice xmlns:a14="http://schemas.microsoft.com/office/drawing/2010/main" Requires="a14">
+          <p:sp>
+            <p:nvSpPr>
+              <p:cNvPr id="16" name="TextBox 15">
+                <a:extLst>
+                  <a:ext uri="{FF2B5EF4-FFF2-40B4-BE49-F238E27FC236}">
+                    <a16:creationId xmlns:a16="http://schemas.microsoft.com/office/drawing/2014/main" id="{4276CE35-3968-B1AC-C622-83D2EED489F7}"/>
+                  </a:ext>
+                </a:extLst>
+              </p:cNvPr>
+              <p:cNvSpPr txBox="1"/>
+              <p:nvPr/>
+            </p:nvSpPr>
+            <p:spPr>
+              <a:xfrm>
+                <a:off x="3031246" y="3028890"/>
+                <a:ext cx="2621280" cy="400110"/>
+              </a:xfrm>
+              <a:prstGeom prst="rect">
+                <a:avLst/>
+              </a:prstGeom>
+              <a:noFill/>
+            </p:spPr>
+            <p:txBody>
+              <a:bodyPr wrap="square">
+                <a:spAutoFit/>
+              </a:bodyPr>
+              <a:lstStyle/>
+              <a:p>
+                <a:pPr/>
+                <a14:m>
+                  <m:oMathPara xmlns:m="http://schemas.openxmlformats.org/officeDocument/2006/math">
+                    <m:oMathParaPr>
+                      <m:jc m:val="left"/>
+                    </m:oMathParaPr>
+                    <m:oMath xmlns:m="http://schemas.openxmlformats.org/officeDocument/2006/math">
+                      <m:r>
+                        <a:rPr lang="ko-KR" altLang="en-US" sz="2000" i="1" dirty="0" smtClean="0">
+                          <a:latin typeface="Cambria Math" panose="02040503050406030204" pitchFamily="18" charset="0"/>
+                        </a:rPr>
+                        <m:t>𝑦</m:t>
+                      </m:r>
+                      <m:r>
+                        <a:rPr lang="ko-KR" altLang="en-US" sz="2000" i="0" dirty="0">
+                          <a:latin typeface="Cambria Math" panose="02040503050406030204" pitchFamily="18" charset="0"/>
+                        </a:rPr>
+                        <m:t>=</m:t>
+                      </m:r>
+                      <m:r>
+                        <a:rPr lang="ko-KR" altLang="en-US" sz="2000" i="1" dirty="0">
+                          <a:latin typeface="Cambria Math" panose="02040503050406030204" pitchFamily="18" charset="0"/>
+                        </a:rPr>
+                        <m:t>𝑓</m:t>
+                      </m:r>
+                      <m:d>
+                        <m:dPr>
+                          <m:ctrlPr>
+                            <a:rPr lang="ko-KR" altLang="en-US" sz="2000" i="1" dirty="0">
+                              <a:latin typeface="Cambria Math" panose="02040503050406030204" pitchFamily="18" charset="0"/>
+                            </a:rPr>
+                          </m:ctrlPr>
+                        </m:dPr>
+                        <m:e>
+                          <m:r>
+                            <a:rPr lang="ko-KR" altLang="en-US" sz="2000" i="1" dirty="0">
+                              <a:latin typeface="Cambria Math" panose="02040503050406030204" pitchFamily="18" charset="0"/>
+                            </a:rPr>
+                            <m:t>𝑥</m:t>
+                          </m:r>
+                        </m:e>
+                      </m:d>
+                    </m:oMath>
+                  </m:oMathPara>
+                </a14:m>
+                <a:endParaRPr lang="ko-KR" altLang="en-US" sz="2000" dirty="0"/>
+              </a:p>
+            </p:txBody>
+          </p:sp>
+        </mc:Choice>
+        <mc:Fallback>
+          <p:sp>
+            <p:nvSpPr>
+              <p:cNvPr id="16" name="TextBox 15">
+                <a:extLst>
+                  <a:ext uri="{FF2B5EF4-FFF2-40B4-BE49-F238E27FC236}">
+                    <a16:creationId xmlns:a16="http://schemas.microsoft.com/office/drawing/2014/main" id="{4276CE35-3968-B1AC-C622-83D2EED489F7}"/>
+                  </a:ext>
+                </a:extLst>
+              </p:cNvPr>
+              <p:cNvSpPr txBox="1">
+                <a:spLocks noRot="1" noChangeAspect="1" noMove="1" noResize="1" noEditPoints="1" noAdjustHandles="1" noChangeArrowheads="1" noChangeShapeType="1" noTextEdit="1"/>
+              </p:cNvSpPr>
+              <p:nvPr/>
+            </p:nvSpPr>
+            <p:spPr>
+              <a:xfrm>
+                <a:off x="3031246" y="3028890"/>
+                <a:ext cx="2621280" cy="400110"/>
+              </a:xfrm>
+              <a:prstGeom prst="rect">
+                <a:avLst/>
+              </a:prstGeom>
+              <a:blipFill>
+                <a:blip r:embed="rId2"/>
+                <a:stretch>
+                  <a:fillRect b="-16667"/>
+                </a:stretch>
+              </a:blipFill>
+            </p:spPr>
+            <p:txBody>
+              <a:bodyPr/>
+              <a:lstStyle/>
+              <a:p>
+                <a:r>
+                  <a:rPr lang="ko-KR" altLang="en-US">
+                    <a:noFill/>
+                  </a:rPr>
+                  <a:t> </a:t>
+                </a:r>
+              </a:p>
+            </p:txBody>
+          </p:sp>
+        </mc:Fallback>
+      </mc:AlternateContent>
+      <mc:AlternateContent xmlns:mc="http://schemas.openxmlformats.org/markup-compatibility/2006">
+        <mc:Choice xmlns:a14="http://schemas.microsoft.com/office/drawing/2010/main" Requires="a14">
+          <p:sp>
+            <p:nvSpPr>
+              <p:cNvPr id="6" name="TextBox 5">
+                <a:extLst>
+                  <a:ext uri="{FF2B5EF4-FFF2-40B4-BE49-F238E27FC236}">
+                    <a16:creationId xmlns:a16="http://schemas.microsoft.com/office/drawing/2014/main" id="{C5796132-C90C-6175-73F0-1A86CA39CFAA}"/>
+                  </a:ext>
+                </a:extLst>
+              </p:cNvPr>
+              <p:cNvSpPr txBox="1"/>
+              <p:nvPr/>
+            </p:nvSpPr>
+            <p:spPr>
+              <a:xfrm>
+                <a:off x="5581131" y="3028890"/>
+                <a:ext cx="2621280" cy="400110"/>
+              </a:xfrm>
+              <a:prstGeom prst="rect">
+                <a:avLst/>
+              </a:prstGeom>
+              <a:noFill/>
+            </p:spPr>
+            <p:txBody>
+              <a:bodyPr wrap="square">
+                <a:spAutoFit/>
+              </a:bodyPr>
+              <a:lstStyle/>
+              <a:p>
+                <a:pPr/>
+                <a14:m>
+                  <m:oMathPara xmlns:m="http://schemas.openxmlformats.org/officeDocument/2006/math">
+                    <m:oMathParaPr>
+                      <m:jc m:val="left"/>
+                    </m:oMathParaPr>
+                    <m:oMath xmlns:m="http://schemas.openxmlformats.org/officeDocument/2006/math">
+                      <m:r>
+                        <a:rPr lang="ko-KR" altLang="en-US" sz="2000" i="1" dirty="0" smtClean="0">
+                          <a:latin typeface="Cambria Math" panose="02040503050406030204" pitchFamily="18" charset="0"/>
+                        </a:rPr>
+                        <m:t>𝑦</m:t>
+                      </m:r>
+                      <m:r>
+                        <a:rPr lang="en-US" altLang="ko-KR" sz="2000" b="0" i="1" dirty="0" smtClean="0">
+                          <a:latin typeface="Cambria Math" panose="02040503050406030204" pitchFamily="18" charset="0"/>
+                        </a:rPr>
+                        <m:t> ={0, 1}</m:t>
+                      </m:r>
+                    </m:oMath>
+                  </m:oMathPara>
+                </a14:m>
+                <a:endParaRPr lang="ko-KR" altLang="en-US" sz="2000" dirty="0"/>
+              </a:p>
+            </p:txBody>
+          </p:sp>
+        </mc:Choice>
+        <mc:Fallback>
+          <p:sp>
+            <p:nvSpPr>
+              <p:cNvPr id="6" name="TextBox 5">
+                <a:extLst>
+                  <a:ext uri="{FF2B5EF4-FFF2-40B4-BE49-F238E27FC236}">
+                    <a16:creationId xmlns:a16="http://schemas.microsoft.com/office/drawing/2014/main" id="{C5796132-C90C-6175-73F0-1A86CA39CFAA}"/>
+                  </a:ext>
+                </a:extLst>
+              </p:cNvPr>
+              <p:cNvSpPr txBox="1">
+                <a:spLocks noRot="1" noChangeAspect="1" noMove="1" noResize="1" noEditPoints="1" noAdjustHandles="1" noChangeArrowheads="1" noChangeShapeType="1" noTextEdit="1"/>
+              </p:cNvSpPr>
+              <p:nvPr/>
+            </p:nvSpPr>
+            <p:spPr>
+              <a:xfrm>
+                <a:off x="5581131" y="3028890"/>
+                <a:ext cx="2621280" cy="400110"/>
+              </a:xfrm>
+              <a:prstGeom prst="rect">
+                <a:avLst/>
+              </a:prstGeom>
+              <a:blipFill>
+                <a:blip r:embed="rId3"/>
+                <a:stretch>
+                  <a:fillRect b="-16667"/>
+                </a:stretch>
+              </a:blipFill>
+            </p:spPr>
+            <p:txBody>
+              <a:bodyPr/>
+              <a:lstStyle/>
+              <a:p>
+                <a:r>
+                  <a:rPr lang="ko-KR" altLang="en-US">
+                    <a:noFill/>
+                  </a:rPr>
+                  <a:t> </a:t>
+                </a:r>
+              </a:p>
+            </p:txBody>
+          </p:sp>
+        </mc:Fallback>
+      </mc:AlternateContent>
+      <mc:AlternateContent xmlns:mc="http://schemas.openxmlformats.org/markup-compatibility/2006">
+        <mc:Choice xmlns:a14="http://schemas.microsoft.com/office/drawing/2010/main" Requires="a14">
+          <p:sp>
+            <p:nvSpPr>
+              <p:cNvPr id="9" name="TextBox 8">
+                <a:extLst>
+                  <a:ext uri="{FF2B5EF4-FFF2-40B4-BE49-F238E27FC236}">
+                    <a16:creationId xmlns:a16="http://schemas.microsoft.com/office/drawing/2014/main" id="{527B8489-026A-CC60-6975-5388A7F6724A}"/>
+                  </a:ext>
+                </a:extLst>
+              </p:cNvPr>
+              <p:cNvSpPr txBox="1"/>
+              <p:nvPr/>
+            </p:nvSpPr>
+            <p:spPr>
+              <a:xfrm>
+                <a:off x="5581130" y="3372444"/>
+                <a:ext cx="2621280" cy="400110"/>
+              </a:xfrm>
+              <a:prstGeom prst="rect">
+                <a:avLst/>
+              </a:prstGeom>
+              <a:noFill/>
+            </p:spPr>
+            <p:txBody>
+              <a:bodyPr wrap="square">
+                <a:spAutoFit/>
+              </a:bodyPr>
+              <a:lstStyle/>
+              <a:p>
+                <a:pPr/>
+                <a14:m>
+                  <m:oMathPara xmlns:m="http://schemas.openxmlformats.org/officeDocument/2006/math">
+                    <m:oMathParaPr>
+                      <m:jc m:val="left"/>
+                    </m:oMathParaPr>
+                    <m:oMath xmlns:m="http://schemas.openxmlformats.org/officeDocument/2006/math">
+                      <m:r>
+                        <a:rPr lang="ko-KR" altLang="en-US" sz="2000" i="1" dirty="0" smtClean="0">
+                          <a:latin typeface="Cambria Math" panose="02040503050406030204" pitchFamily="18" charset="0"/>
+                        </a:rPr>
+                        <m:t>𝑦</m:t>
+                      </m:r>
+                      <m:r>
+                        <a:rPr lang="en-US" altLang="ko-KR" sz="2000" b="0" i="1" dirty="0" smtClean="0">
+                          <a:latin typeface="Cambria Math" panose="02040503050406030204" pitchFamily="18" charset="0"/>
+                        </a:rPr>
+                        <m:t> ={0, 1, 2, 3,…</m:t>
+                      </m:r>
+                      <m:r>
+                        <m:rPr>
+                          <m:sty m:val="p"/>
+                        </m:rPr>
+                        <a:rPr lang="en-US" altLang="ko-KR" sz="2000" b="0" i="1" dirty="0" smtClean="0">
+                          <a:latin typeface="Cambria Math" panose="02040503050406030204" pitchFamily="18" charset="0"/>
+                        </a:rPr>
+                        <m:t>M</m:t>
+                      </m:r>
+                      <m:r>
+                        <a:rPr lang="en-US" altLang="ko-KR" sz="2000" b="0" i="1" dirty="0" smtClean="0">
+                          <a:latin typeface="Cambria Math" panose="02040503050406030204" pitchFamily="18" charset="0"/>
+                        </a:rPr>
+                        <m:t>}</m:t>
+                      </m:r>
+                    </m:oMath>
+                  </m:oMathPara>
+                </a14:m>
+                <a:endParaRPr lang="ko-KR" altLang="en-US" sz="2000" dirty="0"/>
+              </a:p>
+            </p:txBody>
+          </p:sp>
+        </mc:Choice>
+        <mc:Fallback>
+          <p:sp>
+            <p:nvSpPr>
+              <p:cNvPr id="9" name="TextBox 8">
+                <a:extLst>
+                  <a:ext uri="{FF2B5EF4-FFF2-40B4-BE49-F238E27FC236}">
+                    <a16:creationId xmlns:a16="http://schemas.microsoft.com/office/drawing/2014/main" id="{527B8489-026A-CC60-6975-5388A7F6724A}"/>
+                  </a:ext>
+                </a:extLst>
+              </p:cNvPr>
+              <p:cNvSpPr txBox="1">
+                <a:spLocks noRot="1" noChangeAspect="1" noMove="1" noResize="1" noEditPoints="1" noAdjustHandles="1" noChangeArrowheads="1" noChangeShapeType="1" noTextEdit="1"/>
+              </p:cNvSpPr>
+              <p:nvPr/>
+            </p:nvSpPr>
+            <p:spPr>
+              <a:xfrm>
+                <a:off x="5581130" y="3372444"/>
+                <a:ext cx="2621280" cy="400110"/>
+              </a:xfrm>
+              <a:prstGeom prst="rect">
+                <a:avLst/>
+              </a:prstGeom>
+              <a:blipFill>
+                <a:blip r:embed="rId4"/>
+                <a:stretch>
+                  <a:fillRect b="-18182"/>
+                </a:stretch>
+              </a:blipFill>
+            </p:spPr>
+            <p:txBody>
+              <a:bodyPr/>
+              <a:lstStyle/>
+              <a:p>
+                <a:r>
+                  <a:rPr lang="ko-KR" altLang="en-US">
+                    <a:noFill/>
+                  </a:rPr>
+                  <a:t> </a:t>
+                </a:r>
+              </a:p>
+            </p:txBody>
+          </p:sp>
+        </mc:Fallback>
+      </mc:AlternateContent>
+      <mc:AlternateContent xmlns:mc="http://schemas.openxmlformats.org/markup-compatibility/2006">
+        <mc:Choice xmlns:a14="http://schemas.microsoft.com/office/drawing/2010/main" Requires="a14">
+          <p:sp>
+            <p:nvSpPr>
+              <p:cNvPr id="10" name="TextBox 9">
+                <a:extLst>
+                  <a:ext uri="{FF2B5EF4-FFF2-40B4-BE49-F238E27FC236}">
+                    <a16:creationId xmlns:a16="http://schemas.microsoft.com/office/drawing/2014/main" id="{CAEA0734-904C-683A-AC78-7A4E78AFA2A8}"/>
+                  </a:ext>
+                </a:extLst>
+              </p:cNvPr>
+              <p:cNvSpPr txBox="1"/>
+              <p:nvPr/>
+            </p:nvSpPr>
+            <p:spPr>
+              <a:xfrm>
+                <a:off x="5581130" y="4205554"/>
+                <a:ext cx="2621280" cy="400110"/>
+              </a:xfrm>
+              <a:prstGeom prst="rect">
+                <a:avLst/>
+              </a:prstGeom>
+              <a:noFill/>
+            </p:spPr>
+            <p:txBody>
+              <a:bodyPr wrap="square">
+                <a:spAutoFit/>
+              </a:bodyPr>
+              <a:lstStyle/>
+              <a:p>
+                <a:pPr/>
+                <a14:m>
+                  <m:oMathPara xmlns:m="http://schemas.openxmlformats.org/officeDocument/2006/math">
+                    <m:oMathParaPr>
+                      <m:jc m:val="left"/>
+                    </m:oMathParaPr>
+                    <m:oMath xmlns:m="http://schemas.openxmlformats.org/officeDocument/2006/math">
+                      <m:r>
+                        <a:rPr lang="ko-KR" altLang="en-US" sz="2000" i="1" dirty="0" smtClean="0">
+                          <a:latin typeface="Cambria Math" panose="02040503050406030204" pitchFamily="18" charset="0"/>
+                        </a:rPr>
+                        <m:t>𝑦</m:t>
+                      </m:r>
+                      <m:r>
+                        <a:rPr lang="en-US" altLang="ko-KR" sz="2000" b="0" i="1" dirty="0" smtClean="0">
+                          <a:latin typeface="Cambria Math" panose="02040503050406030204" pitchFamily="18" charset="0"/>
+                        </a:rPr>
+                        <m:t> = </m:t>
+                      </m:r>
+                      <m:r>
+                        <m:rPr>
+                          <m:sty m:val="p"/>
+                        </m:rPr>
+                        <a:rPr lang="en-US" altLang="ko-KR" sz="2000" b="0" i="1" dirty="0" smtClean="0">
+                          <a:latin typeface="Cambria Math" panose="02040503050406030204" pitchFamily="18" charset="0"/>
+                        </a:rPr>
+                        <m:t>Real</m:t>
+                      </m:r>
+                      <m:r>
+                        <a:rPr lang="en-US" altLang="ko-KR" sz="2000" b="0" i="1" dirty="0" smtClean="0">
+                          <a:latin typeface="Cambria Math" panose="02040503050406030204" pitchFamily="18" charset="0"/>
+                        </a:rPr>
+                        <m:t> </m:t>
+                      </m:r>
+                      <m:r>
+                        <m:rPr>
+                          <m:sty m:val="p"/>
+                        </m:rPr>
+                        <a:rPr lang="en-US" altLang="ko-KR" sz="2000" b="0" i="1" dirty="0" smtClean="0">
+                          <a:latin typeface="Cambria Math" panose="02040503050406030204" pitchFamily="18" charset="0"/>
+                        </a:rPr>
+                        <m:t>number</m:t>
+                      </m:r>
+                    </m:oMath>
+                  </m:oMathPara>
+                </a14:m>
+                <a:endParaRPr lang="ko-KR" altLang="en-US" sz="2000" dirty="0"/>
+              </a:p>
+            </p:txBody>
+          </p:sp>
+        </mc:Choice>
+        <mc:Fallback>
+          <p:sp>
+            <p:nvSpPr>
+              <p:cNvPr id="10" name="TextBox 9">
+                <a:extLst>
+                  <a:ext uri="{FF2B5EF4-FFF2-40B4-BE49-F238E27FC236}">
+                    <a16:creationId xmlns:a16="http://schemas.microsoft.com/office/drawing/2014/main" id="{CAEA0734-904C-683A-AC78-7A4E78AFA2A8}"/>
+                  </a:ext>
+                </a:extLst>
+              </p:cNvPr>
+              <p:cNvSpPr txBox="1">
+                <a:spLocks noRot="1" noChangeAspect="1" noMove="1" noResize="1" noEditPoints="1" noAdjustHandles="1" noChangeArrowheads="1" noChangeShapeType="1" noTextEdit="1"/>
+              </p:cNvSpPr>
+              <p:nvPr/>
+            </p:nvSpPr>
+            <p:spPr>
+              <a:xfrm>
+                <a:off x="5581130" y="4205554"/>
+                <a:ext cx="2621280" cy="400110"/>
+              </a:xfrm>
+              <a:prstGeom prst="rect">
+                <a:avLst/>
+              </a:prstGeom>
+              <a:blipFill>
+                <a:blip r:embed="rId5"/>
+                <a:stretch>
+                  <a:fillRect b="-9091"/>
+                </a:stretch>
+              </a:blipFill>
+            </p:spPr>
+            <p:txBody>
+              <a:bodyPr/>
+              <a:lstStyle/>
+              <a:p>
+                <a:r>
+                  <a:rPr lang="ko-KR" altLang="en-US">
+                    <a:noFill/>
+                  </a:rPr>
+                  <a:t> </a:t>
+                </a:r>
+              </a:p>
+            </p:txBody>
+          </p:sp>
+        </mc:Fallback>
+      </mc:AlternateContent>
+      <mc:AlternateContent xmlns:mc="http://schemas.openxmlformats.org/markup-compatibility/2006">
+        <mc:Choice xmlns:a14="http://schemas.microsoft.com/office/drawing/2010/main" Requires="a14">
+          <p:sp>
+            <p:nvSpPr>
+              <p:cNvPr id="13" name="TextBox 12">
+                <a:extLst>
+                  <a:ext uri="{FF2B5EF4-FFF2-40B4-BE49-F238E27FC236}">
+                    <a16:creationId xmlns:a16="http://schemas.microsoft.com/office/drawing/2014/main" id="{D351D1FD-F8DD-11DA-51F7-A239E6FF6B6C}"/>
+                  </a:ext>
+                </a:extLst>
+              </p:cNvPr>
+              <p:cNvSpPr txBox="1"/>
+              <p:nvPr/>
+            </p:nvSpPr>
+            <p:spPr>
+              <a:xfrm>
+                <a:off x="3031246" y="5038665"/>
+                <a:ext cx="2621280" cy="400110"/>
+              </a:xfrm>
+              <a:prstGeom prst="rect">
+                <a:avLst/>
+              </a:prstGeom>
+              <a:noFill/>
+            </p:spPr>
+            <p:txBody>
+              <a:bodyPr wrap="square">
+                <a:spAutoFit/>
+              </a:bodyPr>
+              <a:lstStyle/>
+              <a:p>
+                <a:pPr/>
+                <a14:m>
+                  <m:oMath xmlns:m="http://schemas.openxmlformats.org/officeDocument/2006/math">
+                    <m:r>
+                      <a:rPr lang="ko-KR" altLang="en-US" sz="2000" i="1" dirty="0">
+                        <a:latin typeface="Cambria Math" panose="02040503050406030204" pitchFamily="18" charset="0"/>
+                      </a:rPr>
+                      <m:t>𝑓</m:t>
+                    </m:r>
+                    <m:d>
+                      <m:dPr>
+                        <m:ctrlPr>
+                          <a:rPr lang="ko-KR" altLang="en-US" sz="2000" i="1" dirty="0">
+                            <a:latin typeface="Cambria Math" panose="02040503050406030204" pitchFamily="18" charset="0"/>
+                          </a:rPr>
+                        </m:ctrlPr>
+                      </m:dPr>
+                      <m:e>
+                        <m:r>
+                          <a:rPr lang="ko-KR" altLang="en-US" sz="2000" i="1" dirty="0">
+                            <a:latin typeface="Cambria Math" panose="02040503050406030204" pitchFamily="18" charset="0"/>
+                          </a:rPr>
+                          <m:t>𝑥</m:t>
+                        </m:r>
+                      </m:e>
+                    </m:d>
+                  </m:oMath>
+                </a14:m>
+                <a:r>
+                  <a:rPr lang="ko-KR" altLang="en-US" sz="2000" dirty="0"/>
+                  <a:t> </a:t>
+                </a:r>
+                <a:r>
+                  <a:rPr lang="en-US" altLang="ko-KR" sz="2000" dirty="0">
+                    <a:sym typeface="Wingdings" panose="05000000000000000000" pitchFamily="2" charset="2"/>
+                  </a:rPr>
+                  <a:t> </a:t>
+                </a:r>
+                <a14:m>
+                  <m:oMath xmlns:m="http://schemas.openxmlformats.org/officeDocument/2006/math">
+                    <m:r>
+                      <a:rPr lang="ko-KR" altLang="en-US" sz="2000" i="1" dirty="0" smtClean="0">
+                        <a:latin typeface="Cambria Math" panose="02040503050406030204" pitchFamily="18" charset="0"/>
+                      </a:rPr>
+                      <m:t>𝑔</m:t>
+                    </m:r>
+                    <m:d>
+                      <m:dPr>
+                        <m:ctrlPr>
+                          <a:rPr lang="ko-KR" altLang="en-US" sz="2000" i="1" dirty="0">
+                            <a:latin typeface="Cambria Math" panose="02040503050406030204" pitchFamily="18" charset="0"/>
+                          </a:rPr>
+                        </m:ctrlPr>
+                      </m:dPr>
+                      <m:e>
+                        <m:sSup>
+                          <m:sSupPr>
+                            <m:ctrlPr>
+                              <a:rPr lang="ko-KR" altLang="en-US" sz="2000" i="1" dirty="0">
+                                <a:latin typeface="Cambria Math" panose="02040503050406030204" pitchFamily="18" charset="0"/>
+                              </a:rPr>
+                            </m:ctrlPr>
+                          </m:sSupPr>
+                          <m:e>
+                            <m:r>
+                              <a:rPr lang="ko-KR" altLang="en-US" sz="2000" i="1" dirty="0">
+                                <a:latin typeface="Cambria Math" panose="02040503050406030204" pitchFamily="18" charset="0"/>
+                              </a:rPr>
+                              <m:t>𝑥</m:t>
+                            </m:r>
+                          </m:e>
+                          <m:sup>
+                            <m:r>
+                              <a:rPr lang="ko-KR" altLang="en-US" sz="2000" i="0" dirty="0">
+                                <a:latin typeface="Cambria Math" panose="02040503050406030204" pitchFamily="18" charset="0"/>
+                              </a:rPr>
+                              <m:t>′</m:t>
+                            </m:r>
+                          </m:sup>
+                        </m:sSup>
+                      </m:e>
+                    </m:d>
+                  </m:oMath>
+                </a14:m>
+                <a:endParaRPr lang="ko-KR" altLang="en-US" sz="2000" dirty="0"/>
+              </a:p>
+            </p:txBody>
+          </p:sp>
+        </mc:Choice>
+        <mc:Fallback>
+          <p:sp>
+            <p:nvSpPr>
+              <p:cNvPr id="13" name="TextBox 12">
+                <a:extLst>
+                  <a:ext uri="{FF2B5EF4-FFF2-40B4-BE49-F238E27FC236}">
+                    <a16:creationId xmlns:a16="http://schemas.microsoft.com/office/drawing/2014/main" id="{D351D1FD-F8DD-11DA-51F7-A239E6FF6B6C}"/>
+                  </a:ext>
+                </a:extLst>
+              </p:cNvPr>
+              <p:cNvSpPr txBox="1">
+                <a:spLocks noRot="1" noChangeAspect="1" noMove="1" noResize="1" noEditPoints="1" noAdjustHandles="1" noChangeArrowheads="1" noChangeShapeType="1" noTextEdit="1"/>
+              </p:cNvSpPr>
+              <p:nvPr/>
+            </p:nvSpPr>
+            <p:spPr>
+              <a:xfrm>
+                <a:off x="3031246" y="5038665"/>
+                <a:ext cx="2621280" cy="400110"/>
+              </a:xfrm>
+              <a:prstGeom prst="rect">
+                <a:avLst/>
+              </a:prstGeom>
+              <a:blipFill>
+                <a:blip r:embed="rId6"/>
+                <a:stretch>
+                  <a:fillRect l="-930" t="-7692" b="-29231"/>
+                </a:stretch>
+              </a:blipFill>
+            </p:spPr>
+            <p:txBody>
+              <a:bodyPr/>
+              <a:lstStyle/>
+              <a:p>
+                <a:r>
+                  <a:rPr lang="ko-KR" altLang="en-US">
+                    <a:noFill/>
+                  </a:rPr>
+                  <a:t> </a:t>
+                </a:r>
+              </a:p>
+            </p:txBody>
+          </p:sp>
+        </mc:Fallback>
+      </mc:AlternateContent>
+      <mc:AlternateContent xmlns:mc="http://schemas.openxmlformats.org/markup-compatibility/2006">
+        <mc:Choice xmlns:a14="http://schemas.microsoft.com/office/drawing/2010/main" Requires="a14">
+          <p:sp>
+            <p:nvSpPr>
+              <p:cNvPr id="18" name="TextBox 17">
+                <a:extLst>
+                  <a:ext uri="{FF2B5EF4-FFF2-40B4-BE49-F238E27FC236}">
+                    <a16:creationId xmlns:a16="http://schemas.microsoft.com/office/drawing/2014/main" id="{8C38133B-766B-6075-7F9F-A6113F71A004}"/>
+                  </a:ext>
+                </a:extLst>
+              </p:cNvPr>
+              <p:cNvSpPr txBox="1"/>
+              <p:nvPr/>
+            </p:nvSpPr>
+            <p:spPr>
+              <a:xfrm>
+                <a:off x="5581130" y="5038665"/>
+                <a:ext cx="4362969" cy="400110"/>
+              </a:xfrm>
+              <a:prstGeom prst="rect">
+                <a:avLst/>
+              </a:prstGeom>
+              <a:noFill/>
+            </p:spPr>
+            <p:txBody>
+              <a:bodyPr wrap="square">
+                <a:spAutoFit/>
+              </a:bodyPr>
+              <a:lstStyle/>
+              <a:p>
+                <a:pPr/>
+                <a14:m>
+                  <m:oMathPara xmlns:m="http://schemas.openxmlformats.org/officeDocument/2006/math">
+                    <m:oMathParaPr>
+                      <m:jc m:val="left"/>
+                    </m:oMathParaPr>
+                    <m:oMath xmlns:m="http://schemas.openxmlformats.org/officeDocument/2006/math">
+                      <m:r>
+                        <m:rPr>
+                          <m:sty m:val="p"/>
+                        </m:rPr>
+                        <a:rPr lang="en-US" altLang="ko-KR" sz="2000" i="1" dirty="0" smtClean="0">
+                          <a:latin typeface="Cambria Math" panose="02040503050406030204" pitchFamily="18" charset="0"/>
+                        </a:rPr>
+                        <m:t>r</m:t>
+                      </m:r>
+                      <m:r>
+                        <m:rPr>
+                          <m:sty m:val="p"/>
+                        </m:rPr>
+                        <a:rPr lang="en-US" altLang="ko-KR" sz="2000" b="0" i="1" dirty="0" smtClean="0">
+                          <a:latin typeface="Cambria Math" panose="02040503050406030204" pitchFamily="18" charset="0"/>
+                        </a:rPr>
+                        <m:t>ank</m:t>
+                      </m:r>
+                      <m:r>
+                        <a:rPr lang="en-US" altLang="ko-KR" sz="2000" b="0" i="1" dirty="0" smtClean="0">
+                          <a:latin typeface="Cambria Math" panose="02040503050406030204" pitchFamily="18" charset="0"/>
+                        </a:rPr>
+                        <m:t>(</m:t>
+                      </m:r>
+                      <m:r>
+                        <a:rPr lang="ko-KR" altLang="en-US" sz="2000" i="1" dirty="0">
+                          <a:latin typeface="Cambria Math" panose="02040503050406030204" pitchFamily="18" charset="0"/>
+                        </a:rPr>
+                        <m:t>𝑥</m:t>
+                      </m:r>
+                      <m:r>
+                        <a:rPr lang="en-US" altLang="ko-KR" sz="2000" b="0" i="1" dirty="0" smtClean="0">
+                          <a:latin typeface="Cambria Math" panose="02040503050406030204" pitchFamily="18" charset="0"/>
+                        </a:rPr>
+                        <m:t>) ≥ </m:t>
+                      </m:r>
+                      <m:r>
+                        <m:rPr>
+                          <m:sty m:val="p"/>
+                        </m:rPr>
+                        <a:rPr lang="en-US" altLang="ko-KR" sz="2000" b="0" i="1" dirty="0" smtClean="0">
+                          <a:latin typeface="Cambria Math" panose="02040503050406030204" pitchFamily="18" charset="0"/>
+                        </a:rPr>
+                        <m:t>rank</m:t>
+                      </m:r>
+                      <m:r>
+                        <a:rPr lang="en-US" altLang="ko-KR" sz="2000" b="0" i="1" dirty="0" smtClean="0">
+                          <a:latin typeface="Cambria Math" panose="02040503050406030204" pitchFamily="18" charset="0"/>
+                        </a:rPr>
+                        <m:t>(</m:t>
+                      </m:r>
+                      <m:sSup>
+                        <m:sSupPr>
+                          <m:ctrlPr>
+                            <a:rPr lang="ko-KR" altLang="en-US" sz="2000" i="1" dirty="0">
+                              <a:latin typeface="Cambria Math" panose="02040503050406030204" pitchFamily="18" charset="0"/>
+                            </a:rPr>
+                          </m:ctrlPr>
+                        </m:sSupPr>
+                        <m:e>
+                          <m:r>
+                            <a:rPr lang="ko-KR" altLang="en-US" sz="2000" i="1" dirty="0">
+                              <a:latin typeface="Cambria Math" panose="02040503050406030204" pitchFamily="18" charset="0"/>
+                            </a:rPr>
+                            <m:t>𝑥</m:t>
+                          </m:r>
+                        </m:e>
+                        <m:sup>
+                          <m:r>
+                            <a:rPr lang="ko-KR" altLang="en-US" sz="2000" dirty="0">
+                              <a:latin typeface="Cambria Math" panose="02040503050406030204" pitchFamily="18" charset="0"/>
+                            </a:rPr>
+                            <m:t>′</m:t>
+                          </m:r>
+                        </m:sup>
+                      </m:sSup>
+                      <m:r>
+                        <a:rPr lang="en-US" altLang="ko-KR" sz="2000" b="0" i="1" dirty="0" smtClean="0">
+                          <a:latin typeface="Cambria Math" panose="02040503050406030204" pitchFamily="18" charset="0"/>
+                        </a:rPr>
+                        <m:t>)</m:t>
+                      </m:r>
+                    </m:oMath>
+                  </m:oMathPara>
+                </a14:m>
+                <a:endParaRPr lang="ko-KR" altLang="en-US" sz="2000" dirty="0"/>
+              </a:p>
+            </p:txBody>
+          </p:sp>
+        </mc:Choice>
+        <mc:Fallback>
+          <p:sp>
+            <p:nvSpPr>
+              <p:cNvPr id="18" name="TextBox 17">
+                <a:extLst>
+                  <a:ext uri="{FF2B5EF4-FFF2-40B4-BE49-F238E27FC236}">
+                    <a16:creationId xmlns:a16="http://schemas.microsoft.com/office/drawing/2014/main" id="{8C38133B-766B-6075-7F9F-A6113F71A004}"/>
+                  </a:ext>
+                </a:extLst>
+              </p:cNvPr>
+              <p:cNvSpPr txBox="1">
+                <a:spLocks noRot="1" noChangeAspect="1" noMove="1" noResize="1" noEditPoints="1" noAdjustHandles="1" noChangeArrowheads="1" noChangeShapeType="1" noTextEdit="1"/>
+              </p:cNvSpPr>
+              <p:nvPr/>
+            </p:nvSpPr>
+            <p:spPr>
+              <a:xfrm>
+                <a:off x="5581130" y="5038665"/>
+                <a:ext cx="4362969" cy="400110"/>
+              </a:xfrm>
+              <a:prstGeom prst="rect">
+                <a:avLst/>
+              </a:prstGeom>
+              <a:blipFill>
+                <a:blip r:embed="rId7"/>
+                <a:stretch>
+                  <a:fillRect b="-18462"/>
+                </a:stretch>
+              </a:blipFill>
+            </p:spPr>
+            <p:txBody>
+              <a:bodyPr/>
+              <a:lstStyle/>
+              <a:p>
+                <a:r>
+                  <a:rPr lang="ko-KR" altLang="en-US">
+                    <a:noFill/>
+                  </a:rPr>
+                  <a:t> </a:t>
+                </a:r>
+              </a:p>
+            </p:txBody>
+          </p:sp>
+        </mc:Fallback>
+      </mc:AlternateContent>
+    </p:spTree>
+    <p:extLst>
+      <p:ext uri="{BB962C8B-B14F-4D97-AF65-F5344CB8AC3E}">
+        <p14:creationId xmlns:p14="http://schemas.microsoft.com/office/powerpoint/2010/main" val="845917094"/>
+      </p:ext>
+    </p:extLst>
+  </p:cSld>
+  <p:clrMapOvr>
+    <a:masterClrMapping/>
+  </p:clrMapOvr>
+  <p:timing>
+    <p:tnLst>
+      <p:par>
+        <p:cTn id="1" dur="indefinite" restart="never" nodeType="tmRoot">
+          <p:childTnLst>
+            <p:seq concurrent="1" nextAc="seek">
+              <p:cTn id="2" dur="indefinite" nodeType="mainSeq">
+                <p:childTnLst>
+                  <p:par>
+                    <p:cTn id="3" fill="hold">
+                      <p:stCondLst>
+                        <p:cond delay="indefinite"/>
+                        <p:cond evt="onBegin" delay="0">
+                          <p:tn val="2"/>
+                        </p:cond>
+                      </p:stCondLst>
+                      <p:childTnLst>
+                        <p:par>
+                          <p:cTn id="4" fill="hold">
+                            <p:stCondLst>
+                              <p:cond delay="0"/>
+                            </p:stCondLst>
+                            <p:childTnLst>
+                              <p:par>
+                                <p:cTn id="5" presetID="1" presetClass="entr" presetSubtype="0" fill="hold" grpId="0" nodeType="withEffect">
+                                  <p:stCondLst>
+                                    <p:cond delay="0"/>
+                                  </p:stCondLst>
+                                  <p:childTnLst>
+                                    <p:set>
+                                      <p:cBhvr>
+                                        <p:cTn id="6" dur="1" fill="hold">
+                                          <p:stCondLst>
+                                            <p:cond delay="0"/>
+                                          </p:stCondLst>
+                                        </p:cTn>
+                                        <p:tgtEl>
+                                          <p:spTgt spid="16"/>
+                                        </p:tgtEl>
+                                        <p:attrNameLst>
+                                          <p:attrName>style.visibility</p:attrName>
+                                        </p:attrNameLst>
+                                      </p:cBhvr>
+                                      <p:to>
+                                        <p:strVal val="visible"/>
+                                      </p:to>
+                                    </p:set>
+                                  </p:childTnLst>
+                                </p:cTn>
+                              </p:par>
+                              <p:par>
+                                <p:cTn id="7" presetID="1" presetClass="entr" presetSubtype="0" fill="hold" grpId="0" nodeType="withEffect">
+                                  <p:stCondLst>
+                                    <p:cond delay="0"/>
+                                  </p:stCondLst>
+                                  <p:childTnLst>
+                                    <p:set>
+                                      <p:cBhvr>
+                                        <p:cTn id="8" dur="1" fill="hold">
+                                          <p:stCondLst>
+                                            <p:cond delay="0"/>
+                                          </p:stCondLst>
+                                        </p:cTn>
+                                        <p:tgtEl>
+                                          <p:spTgt spid="13"/>
+                                        </p:tgtEl>
+                                        <p:attrNameLst>
+                                          <p:attrName>style.visibility</p:attrName>
+                                        </p:attrNameLst>
+                                      </p:cBhvr>
+                                      <p:to>
+                                        <p:strVal val="visible"/>
+                                      </p:to>
+                                    </p:set>
+                                  </p:childTnLst>
+                                </p:cTn>
+                              </p:par>
+                            </p:childTnLst>
+                          </p:cTn>
+                        </p:par>
+                      </p:childTnLst>
+                    </p:cTn>
+                  </p:par>
+                </p:childTnLst>
+              </p:cTn>
+              <p:prevCondLst>
+                <p:cond evt="onPrev" delay="0">
+                  <p:tgtEl>
+                    <p:sldTgt/>
+                  </p:tgtEl>
+                </p:cond>
+              </p:prevCondLst>
+              <p:nextCondLst>
+                <p:cond evt="onNext" delay="0">
+                  <p:tgtEl>
+                    <p:sldTgt/>
+                  </p:tgtEl>
+                </p:cond>
+              </p:nextCondLst>
+            </p:seq>
+          </p:childTnLst>
+        </p:cTn>
+      </p:par>
+    </p:tnLst>
+    <p:bldLst>
+      <p:bldP spid="16" grpId="0"/>
+      <p:bldP spid="13" grpId="0"/>
+    </p:bldLst>
+  </p:timing>
+</p:sld>
+</file>
+
+<file path=ppt/slides/slide14.xml><?xml version="1.0" encoding="utf-8"?>
+<p:sld xmlns:a="http://schemas.openxmlformats.org/drawingml/2006/main" xmlns:r="http://schemas.openxmlformats.org/officeDocument/2006/relationships" xmlns:p="http://schemas.openxmlformats.org/presentationml/2006/main">
+  <p:cSld>
+    <p:spTree>
+      <p:nvGrpSpPr>
+        <p:cNvPr id="1" name="">
+          <a:extLst>
+            <a:ext uri="{FF2B5EF4-FFF2-40B4-BE49-F238E27FC236}">
               <a16:creationId xmlns:a16="http://schemas.microsoft.com/office/drawing/2014/main" id="{30AD84C8-6C06-6C62-C7A1-14D0495D830D}"/>
             </a:ext>
           </a:extLst>
@@ -6741,7 +7913,7 @@
             <a:fld id="{D57F1E4F-1CFF-5643-939E-217C01CDF565}" type="slidenum">
               <a:rPr lang="en-US" smtClean="0"/>
               <a:pPr/>
-              <a:t>13</a:t>
+              <a:t>14</a:t>
             </a:fld>
             <a:endParaRPr lang="en-US" dirty="0"/>
           </a:p>
@@ -7079,7 +8251,7 @@
 </p:sld>
 </file>
 
-<file path=ppt/slides/slide14.xml><?xml version="1.0" encoding="utf-8"?>
+<file path=ppt/slides/slide15.xml><?xml version="1.0" encoding="utf-8"?>
 <p:sld xmlns:a="http://schemas.openxmlformats.org/drawingml/2006/main" xmlns:r="http://schemas.openxmlformats.org/officeDocument/2006/relationships" xmlns:p="http://schemas.openxmlformats.org/presentationml/2006/main">
   <p:cSld>
     <p:spTree>
@@ -7131,7 +8303,7 @@
             <a:fld id="{D57F1E4F-1CFF-5643-939E-217C01CDF565}" type="slidenum">
               <a:rPr lang="en-US" smtClean="0"/>
               <a:pPr/>
-              <a:t>14</a:t>
+              <a:t>15</a:t>
             </a:fld>
             <a:endParaRPr lang="en-US" dirty="0"/>
           </a:p>
@@ -7406,7 +8578,7 @@
 </p:sld>
 </file>
 
-<file path=ppt/slides/slide15.xml><?xml version="1.0" encoding="utf-8"?>
+<file path=ppt/slides/slide16.xml><?xml version="1.0" encoding="utf-8"?>
 <p:sld xmlns:a="http://schemas.openxmlformats.org/drawingml/2006/main" xmlns:r="http://schemas.openxmlformats.org/officeDocument/2006/relationships" xmlns:p="http://schemas.openxmlformats.org/presentationml/2006/main">
   <p:cSld>
     <p:spTree>
@@ -7458,7 +8630,7 @@
             <a:fld id="{D57F1E4F-1CFF-5643-939E-217C01CDF565}" type="slidenum">
               <a:rPr lang="en-US" smtClean="0"/>
               <a:pPr/>
-              <a:t>15</a:t>
+              <a:t>16</a:t>
             </a:fld>
             <a:endParaRPr lang="en-US" dirty="0"/>
           </a:p>
@@ -7597,6 +8769,2784 @@
     <p:extLst>
       <p:ext uri="{BB962C8B-B14F-4D97-AF65-F5344CB8AC3E}">
         <p14:creationId xmlns:p14="http://schemas.microsoft.com/office/powerpoint/2010/main" val="64998647"/>
+      </p:ext>
+    </p:extLst>
+  </p:cSld>
+  <p:clrMapOvr>
+    <a:masterClrMapping/>
+  </p:clrMapOvr>
+</p:sld>
+</file>
+
+<file path=ppt/slides/slide17.xml><?xml version="1.0" encoding="utf-8"?>
+<p:sld xmlns:a="http://schemas.openxmlformats.org/drawingml/2006/main" xmlns:r="http://schemas.openxmlformats.org/officeDocument/2006/relationships" xmlns:p="http://schemas.openxmlformats.org/presentationml/2006/main">
+  <p:cSld>
+    <p:spTree>
+      <p:nvGrpSpPr>
+        <p:cNvPr id="1" name="">
+          <a:extLst>
+            <a:ext uri="{FF2B5EF4-FFF2-40B4-BE49-F238E27FC236}">
+              <a16:creationId xmlns:a16="http://schemas.microsoft.com/office/drawing/2014/main" id="{069A8EE5-C864-FA6F-1485-90C464ED0C7E}"/>
+            </a:ext>
+          </a:extLst>
+        </p:cNvPr>
+        <p:cNvGrpSpPr/>
+        <p:nvPr/>
+      </p:nvGrpSpPr>
+      <p:grpSpPr>
+        <a:xfrm>
+          <a:off x="0" y="0"/>
+          <a:ext cx="0" cy="0"/>
+          <a:chOff x="0" y="0"/>
+          <a:chExt cx="0" cy="0"/>
+        </a:xfrm>
+      </p:grpSpPr>
+      <p:sp>
+        <p:nvSpPr>
+          <p:cNvPr id="7" name="직사각형 6">
+            <a:extLst>
+              <a:ext uri="{FF2B5EF4-FFF2-40B4-BE49-F238E27FC236}">
+                <a16:creationId xmlns:a16="http://schemas.microsoft.com/office/drawing/2014/main" id="{5A3BD93F-CDCA-B31E-BFCE-661A56ABA5C4}"/>
+              </a:ext>
+            </a:extLst>
+          </p:cNvPr>
+          <p:cNvSpPr/>
+          <p:nvPr/>
+        </p:nvSpPr>
+        <p:spPr>
+          <a:xfrm>
+            <a:off x="670590" y="2956604"/>
+            <a:ext cx="7467600" cy="523195"/>
+          </a:xfrm>
+          <a:prstGeom prst="rect">
+            <a:avLst/>
+          </a:prstGeom>
+          <a:solidFill>
+            <a:schemeClr val="bg1">
+              <a:lumMod val="85000"/>
+            </a:schemeClr>
+          </a:solidFill>
+          <a:ln>
+            <a:solidFill>
+              <a:schemeClr val="bg1">
+                <a:lumMod val="85000"/>
+              </a:schemeClr>
+            </a:solidFill>
+          </a:ln>
+        </p:spPr>
+        <p:style>
+          <a:lnRef idx="2">
+            <a:schemeClr val="accent1">
+              <a:shade val="15000"/>
+            </a:schemeClr>
+          </a:lnRef>
+          <a:fillRef idx="1">
+            <a:schemeClr val="accent1"/>
+          </a:fillRef>
+          <a:effectRef idx="0">
+            <a:schemeClr val="accent1"/>
+          </a:effectRef>
+          <a:fontRef idx="minor">
+            <a:schemeClr val="lt1"/>
+          </a:fontRef>
+        </p:style>
+        <p:txBody>
+          <a:bodyPr rtlCol="0" anchor="ctr"/>
+          <a:lstStyle/>
+          <a:p>
+            <a:pPr algn="ctr"/>
+            <a:endParaRPr lang="ko-KR" altLang="en-US" dirty="0"/>
+          </a:p>
+        </p:txBody>
+      </p:sp>
+      <p:sp>
+        <p:nvSpPr>
+          <p:cNvPr id="4" name="슬라이드 번호 개체 틀 3">
+            <a:extLst>
+              <a:ext uri="{FF2B5EF4-FFF2-40B4-BE49-F238E27FC236}">
+                <a16:creationId xmlns:a16="http://schemas.microsoft.com/office/drawing/2014/main" id="{48CF901D-F2AE-B3E4-03F2-33D74D38115A}"/>
+              </a:ext>
+            </a:extLst>
+          </p:cNvPr>
+          <p:cNvSpPr>
+            <a:spLocks noGrp="1"/>
+          </p:cNvSpPr>
+          <p:nvPr>
+            <p:ph type="sldNum" sz="quarter" idx="12"/>
+          </p:nvPr>
+        </p:nvSpPr>
+        <p:spPr>
+          <a:xfrm>
+            <a:off x="10514011" y="6036261"/>
+            <a:ext cx="753545" cy="365125"/>
+          </a:xfrm>
+        </p:spPr>
+        <p:txBody>
+          <a:bodyPr/>
+          <a:lstStyle/>
+          <a:p>
+            <a:fld id="{D57F1E4F-1CFF-5643-939E-217C01CDF565}" type="slidenum">
+              <a:rPr lang="en-US" smtClean="0"/>
+              <a:pPr/>
+              <a:t>17</a:t>
+            </a:fld>
+            <a:endParaRPr lang="en-US" dirty="0"/>
+          </a:p>
+        </p:txBody>
+      </p:sp>
+      <p:sp>
+        <p:nvSpPr>
+          <p:cNvPr id="3" name="제목 1">
+            <a:extLst>
+              <a:ext uri="{FF2B5EF4-FFF2-40B4-BE49-F238E27FC236}">
+                <a16:creationId xmlns:a16="http://schemas.microsoft.com/office/drawing/2014/main" id="{A88AA08C-D1EF-B373-5F1A-89B957A0D0A3}"/>
+              </a:ext>
+            </a:extLst>
+          </p:cNvPr>
+          <p:cNvSpPr txBox="1">
+            <a:spLocks/>
+          </p:cNvSpPr>
+          <p:nvPr/>
+        </p:nvSpPr>
+        <p:spPr>
+          <a:xfrm>
+            <a:off x="475645" y="481983"/>
+            <a:ext cx="10353762" cy="766439"/>
+          </a:xfrm>
+          <a:prstGeom prst="rect">
+            <a:avLst/>
+          </a:prstGeom>
+        </p:spPr>
+        <p:txBody>
+          <a:bodyPr vert="horz" lIns="91440" tIns="45720" rIns="91440" bIns="45720" rtlCol="0" anchor="ctr">
+            <a:normAutofit/>
+          </a:bodyPr>
+          <a:lstStyle>
+            <a:lvl1pPr algn="ctr" defTabSz="914400" rtl="0" eaLnBrk="1" latinLnBrk="1" hangingPunct="1">
+              <a:lnSpc>
+                <a:spcPct val="90000"/>
+              </a:lnSpc>
+              <a:spcBef>
+                <a:spcPct val="0"/>
+              </a:spcBef>
+              <a:buNone/>
+              <a:defRPr sz="3200" kern="1200" cap="all" baseline="0">
+                <a:solidFill>
+                  <a:schemeClr val="tx1"/>
+                </a:solidFill>
+                <a:effectLst/>
+                <a:latin typeface="Batang" panose="02030600000101010101" pitchFamily="18" charset="-127"/>
+                <a:ea typeface="Batang" panose="02030600000101010101" pitchFamily="18" charset="-127"/>
+                <a:cs typeface="+mj-cs"/>
+              </a:defRPr>
+            </a:lvl1pPr>
+          </a:lstStyle>
+          <a:p>
+            <a:pPr algn="l"/>
+            <a:r>
+              <a:rPr lang="en-US" altLang="ko-KR" sz="2800" cap="none" dirty="0">
+                <a:solidFill>
+                  <a:schemeClr val="bg2">
+                    <a:lumMod val="25000"/>
+                  </a:schemeClr>
+                </a:solidFill>
+                <a:latin typeface="D2Coding" panose="020B0609020101020101" pitchFamily="49" charset="-127"/>
+                <a:ea typeface="D2Coding" panose="020B0609020101020101" pitchFamily="49" charset="-127"/>
+                <a:cs typeface="Segoe UI Light" panose="020B0502040204020203" pitchFamily="34" charset="0"/>
+              </a:rPr>
+              <a:t>Contents</a:t>
+            </a:r>
+            <a:endParaRPr lang="ko-KR" altLang="en-US" sz="2800" cap="none" dirty="0">
+              <a:solidFill>
+                <a:schemeClr val="bg2">
+                  <a:lumMod val="25000"/>
+                </a:schemeClr>
+              </a:solidFill>
+              <a:latin typeface="D2Coding" panose="020B0609020101020101" pitchFamily="49" charset="-127"/>
+              <a:ea typeface="D2Coding" panose="020B0609020101020101" pitchFamily="49" charset="-127"/>
+              <a:cs typeface="Segoe UI Light" panose="020B0502040204020203" pitchFamily="34" charset="0"/>
+            </a:endParaRPr>
+          </a:p>
+        </p:txBody>
+      </p:sp>
+      <p:sp>
+        <p:nvSpPr>
+          <p:cNvPr id="5" name="TextBox 4">
+            <a:extLst>
+              <a:ext uri="{FF2B5EF4-FFF2-40B4-BE49-F238E27FC236}">
+                <a16:creationId xmlns:a16="http://schemas.microsoft.com/office/drawing/2014/main" id="{D10AFBE2-87CE-1BD6-F3B8-CDA67FC14450}"/>
+              </a:ext>
+            </a:extLst>
+          </p:cNvPr>
+          <p:cNvSpPr txBox="1"/>
+          <p:nvPr/>
+        </p:nvSpPr>
+        <p:spPr>
+          <a:xfrm>
+            <a:off x="1896858" y="1555154"/>
+            <a:ext cx="9370698" cy="4189993"/>
+          </a:xfrm>
+          <a:prstGeom prst="rect">
+            <a:avLst/>
+          </a:prstGeom>
+          <a:noFill/>
+        </p:spPr>
+        <p:txBody>
+          <a:bodyPr wrap="square">
+            <a:spAutoFit/>
+          </a:bodyPr>
+          <a:lstStyle/>
+          <a:p>
+            <a:pPr marL="457200" indent="-457200">
+              <a:lnSpc>
+                <a:spcPct val="150000"/>
+              </a:lnSpc>
+              <a:buAutoNum type="arabicPeriod"/>
+            </a:pPr>
+            <a:r>
+              <a:rPr lang="en-US" altLang="ko-KR" sz="2000" b="1" dirty="0">
+                <a:latin typeface="Yu Gothic UI Semilight" panose="020B0400000000000000" pitchFamily="34" charset="-128"/>
+                <a:ea typeface="Yu Gothic UI Semilight" panose="020B0400000000000000" pitchFamily="34" charset="-128"/>
+                <a:cs typeface="맑은 고딕 Semilight" panose="020B0502040204020203" pitchFamily="50" charset="-127"/>
+              </a:rPr>
+              <a:t>Problem Definition</a:t>
+            </a:r>
+          </a:p>
+          <a:p>
+            <a:pPr marL="457200" indent="-457200">
+              <a:lnSpc>
+                <a:spcPct val="150000"/>
+              </a:lnSpc>
+              <a:buAutoNum type="arabicPeriod"/>
+            </a:pPr>
+            <a:r>
+              <a:rPr lang="en-US" altLang="ko-KR" sz="2000" b="1" dirty="0">
+                <a:latin typeface="Yu Gothic UI Semilight" panose="020B0400000000000000" pitchFamily="34" charset="-128"/>
+                <a:ea typeface="Yu Gothic UI Semilight" panose="020B0400000000000000" pitchFamily="34" charset="-128"/>
+                <a:cs typeface="맑은 고딕 Semilight" panose="020B0502040204020203" pitchFamily="50" charset="-127"/>
+              </a:rPr>
+              <a:t>Data, algorithm and model</a:t>
+            </a:r>
+            <a:endParaRPr lang="en-US" altLang="ko-KR" sz="2000" b="1" i="0" dirty="0">
+              <a:effectLst/>
+              <a:latin typeface="Yu Gothic UI Semilight" panose="020B0400000000000000" pitchFamily="34" charset="-128"/>
+              <a:ea typeface="Yu Gothic UI Semilight" panose="020B0400000000000000" pitchFamily="34" charset="-128"/>
+              <a:cs typeface="맑은 고딕 Semilight" panose="020B0502040204020203" pitchFamily="50" charset="-127"/>
+            </a:endParaRPr>
+          </a:p>
+          <a:p>
+            <a:pPr marL="457200" indent="-457200" algn="l">
+              <a:lnSpc>
+                <a:spcPct val="150000"/>
+              </a:lnSpc>
+              <a:buAutoNum type="arabicPeriod"/>
+            </a:pPr>
+            <a:r>
+              <a:rPr lang="en-US" altLang="ko-KR" sz="2000" b="1" i="0" dirty="0">
+                <a:effectLst/>
+                <a:latin typeface="Yu Gothic UI Semilight" panose="020B0400000000000000" pitchFamily="34" charset="-128"/>
+                <a:ea typeface="Yu Gothic UI Semilight" panose="020B0400000000000000" pitchFamily="34" charset="-128"/>
+                <a:cs typeface="맑은 고딕 Semilight" panose="020B0502040204020203" pitchFamily="50" charset="-127"/>
+              </a:rPr>
+              <a:t>Extrapolation</a:t>
+            </a:r>
+          </a:p>
+          <a:p>
+            <a:pPr marL="457200" indent="-457200">
+              <a:lnSpc>
+                <a:spcPct val="150000"/>
+              </a:lnSpc>
+              <a:buAutoNum type="arabicPeriod"/>
+            </a:pPr>
+            <a:r>
+              <a:rPr lang="en-US" altLang="ko-KR" sz="2000" b="1" dirty="0">
+                <a:latin typeface="Yu Gothic UI Semilight" panose="020B0400000000000000" pitchFamily="34" charset="-128"/>
+                <a:ea typeface="Yu Gothic UI Semilight" panose="020B0400000000000000" pitchFamily="34" charset="-128"/>
+                <a:cs typeface="맑은 고딕 Semilight" panose="020B0502040204020203" pitchFamily="50" charset="-127"/>
+              </a:rPr>
+              <a:t>Logistic</a:t>
+            </a:r>
+            <a:r>
+              <a:rPr lang="ko-KR" altLang="en-US" sz="2000" b="1" dirty="0">
+                <a:latin typeface="Yu Gothic UI Semilight" panose="020B0400000000000000" pitchFamily="34" charset="-128"/>
+                <a:ea typeface="Yu Gothic UI Semilight" panose="020B0400000000000000" pitchFamily="34" charset="-128"/>
+                <a:cs typeface="맑은 고딕 Semilight" panose="020B0502040204020203" pitchFamily="50" charset="-127"/>
+              </a:rPr>
+              <a:t> </a:t>
+            </a:r>
+            <a:r>
+              <a:rPr lang="en-US" altLang="ko-KR" sz="2000" b="1" dirty="0">
+                <a:latin typeface="Yu Gothic UI Semilight" panose="020B0400000000000000" pitchFamily="34" charset="-128"/>
+                <a:ea typeface="Yu Gothic UI Semilight" panose="020B0400000000000000" pitchFamily="34" charset="-128"/>
+                <a:cs typeface="맑은 고딕 Semilight" panose="020B0502040204020203" pitchFamily="50" charset="-127"/>
+              </a:rPr>
+              <a:t>Regression</a:t>
+            </a:r>
+            <a:endParaRPr lang="en-US" altLang="ko-KR" sz="2000" b="1" i="0" dirty="0">
+              <a:effectLst/>
+              <a:latin typeface="Yu Gothic UI Semilight" panose="020B0400000000000000" pitchFamily="34" charset="-128"/>
+              <a:ea typeface="Yu Gothic UI Semilight" panose="020B0400000000000000" pitchFamily="34" charset="-128"/>
+              <a:cs typeface="맑은 고딕 Semilight" panose="020B0502040204020203" pitchFamily="50" charset="-127"/>
+            </a:endParaRPr>
+          </a:p>
+          <a:p>
+            <a:pPr marL="457200" indent="-457200" algn="l">
+              <a:lnSpc>
+                <a:spcPct val="150000"/>
+              </a:lnSpc>
+              <a:buAutoNum type="arabicPeriod"/>
+            </a:pPr>
+            <a:r>
+              <a:rPr lang="en-US" altLang="ko-KR" sz="2000" b="1" dirty="0">
+                <a:latin typeface="Yu Gothic UI Semilight" panose="020B0400000000000000" pitchFamily="34" charset="-128"/>
+                <a:ea typeface="Yu Gothic UI Semilight" panose="020B0400000000000000" pitchFamily="34" charset="-128"/>
+                <a:cs typeface="맑은 고딕 Semilight" panose="020B0502040204020203" pitchFamily="50" charset="-127"/>
+              </a:rPr>
+              <a:t>Ensemble Model</a:t>
+            </a:r>
+            <a:endParaRPr lang="en-US" altLang="ko-KR" sz="2000" b="1" i="0" dirty="0">
+              <a:effectLst/>
+              <a:latin typeface="Yu Gothic UI Semilight" panose="020B0400000000000000" pitchFamily="34" charset="-128"/>
+              <a:ea typeface="Yu Gothic UI Semilight" panose="020B0400000000000000" pitchFamily="34" charset="-128"/>
+              <a:cs typeface="맑은 고딕 Semilight" panose="020B0502040204020203" pitchFamily="50" charset="-127"/>
+            </a:endParaRPr>
+          </a:p>
+          <a:p>
+            <a:pPr marL="457200" indent="-457200" algn="l">
+              <a:lnSpc>
+                <a:spcPct val="150000"/>
+              </a:lnSpc>
+              <a:buAutoNum type="arabicPeriod"/>
+            </a:pPr>
+            <a:r>
+              <a:rPr lang="en-US" altLang="ko-KR" sz="2000" b="1" dirty="0">
+                <a:latin typeface="Yu Gothic UI Semilight" panose="020B0400000000000000" pitchFamily="34" charset="-128"/>
+                <a:ea typeface="Yu Gothic UI Semilight" panose="020B0400000000000000" pitchFamily="34" charset="-128"/>
+                <a:cs typeface="맑은 고딕 Semilight" panose="020B0502040204020203" pitchFamily="50" charset="-127"/>
+              </a:rPr>
+              <a:t>Calibration</a:t>
+            </a:r>
+          </a:p>
+          <a:p>
+            <a:pPr marL="457200" indent="-457200" algn="l">
+              <a:lnSpc>
+                <a:spcPct val="150000"/>
+              </a:lnSpc>
+              <a:buAutoNum type="arabicPeriod"/>
+            </a:pPr>
+            <a:r>
+              <a:rPr lang="en-US" altLang="ko-KR" sz="2000" b="1" i="0" dirty="0">
+                <a:effectLst/>
+                <a:latin typeface="Yu Gothic UI Semilight" panose="020B0400000000000000" pitchFamily="34" charset="-128"/>
+                <a:ea typeface="Yu Gothic UI Semilight" panose="020B0400000000000000" pitchFamily="34" charset="-128"/>
+                <a:cs typeface="맑은 고딕 Semilight" panose="020B0502040204020203" pitchFamily="50" charset="-127"/>
+              </a:rPr>
+              <a:t>Non-Parametric</a:t>
+            </a:r>
+            <a:r>
+              <a:rPr lang="en-US" altLang="ko-KR" sz="2000" b="1" dirty="0">
+                <a:latin typeface="Yu Gothic UI Semilight" panose="020B0400000000000000" pitchFamily="34" charset="-128"/>
+                <a:ea typeface="Yu Gothic UI Semilight" panose="020B0400000000000000" pitchFamily="34" charset="-128"/>
+                <a:cs typeface="맑은 고딕 Semilight" panose="020B0502040204020203" pitchFamily="50" charset="-127"/>
+              </a:rPr>
+              <a:t> vs Parametric</a:t>
+            </a:r>
+          </a:p>
+          <a:p>
+            <a:pPr marL="457200" indent="-457200" algn="l">
+              <a:lnSpc>
+                <a:spcPct val="150000"/>
+              </a:lnSpc>
+              <a:buAutoNum type="arabicPeriod"/>
+            </a:pPr>
+            <a:r>
+              <a:rPr lang="en-US" altLang="ko-KR" sz="2000" b="1" i="0" dirty="0">
+                <a:effectLst/>
+                <a:latin typeface="Yu Gothic UI Semilight" panose="020B0400000000000000" pitchFamily="34" charset="-128"/>
+                <a:ea typeface="Yu Gothic UI Semilight" panose="020B0400000000000000" pitchFamily="34" charset="-128"/>
+                <a:cs typeface="맑은 고딕 Semilight" panose="020B0502040204020203" pitchFamily="50" charset="-127"/>
+              </a:rPr>
+              <a:t>G</a:t>
+            </a:r>
+            <a:r>
+              <a:rPr lang="en-US" altLang="ko-KR" sz="2000" b="1" dirty="0">
+                <a:latin typeface="Yu Gothic UI Semilight" panose="020B0400000000000000" pitchFamily="34" charset="-128"/>
+                <a:ea typeface="Yu Gothic UI Semilight" panose="020B0400000000000000" pitchFamily="34" charset="-128"/>
+                <a:cs typeface="맑은 고딕 Semilight" panose="020B0502040204020203" pitchFamily="50" charset="-127"/>
+              </a:rPr>
+              <a:t>enerative vs Deterministic</a:t>
+            </a:r>
+          </a:p>
+          <a:p>
+            <a:pPr marL="457200" indent="-457200" algn="l">
+              <a:lnSpc>
+                <a:spcPct val="150000"/>
+              </a:lnSpc>
+              <a:buAutoNum type="arabicPeriod"/>
+            </a:pPr>
+            <a:r>
+              <a:rPr lang="en-US" altLang="ko-KR" sz="2000" b="1" i="0" dirty="0">
+                <a:effectLst/>
+                <a:latin typeface="Yu Gothic UI Semilight" panose="020B0400000000000000" pitchFamily="34" charset="-128"/>
+                <a:ea typeface="Yu Gothic UI Semilight" panose="020B0400000000000000" pitchFamily="34" charset="-128"/>
+                <a:cs typeface="맑은 고딕 Semilight" panose="020B0502040204020203" pitchFamily="50" charset="-127"/>
+              </a:rPr>
+              <a:t>Imbalance </a:t>
+            </a:r>
+            <a:r>
+              <a:rPr lang="en-US" altLang="ko-KR" sz="2000" b="1" dirty="0">
+                <a:latin typeface="Yu Gothic UI Semilight" panose="020B0400000000000000" pitchFamily="34" charset="-128"/>
+                <a:ea typeface="Yu Gothic UI Semilight" panose="020B0400000000000000" pitchFamily="34" charset="-128"/>
+                <a:cs typeface="맑은 고딕 Semilight" panose="020B0502040204020203" pitchFamily="50" charset="-127"/>
+              </a:rPr>
+              <a:t>D</a:t>
+            </a:r>
+            <a:r>
+              <a:rPr lang="en-US" altLang="ko-KR" sz="2000" b="1" i="0" dirty="0">
+                <a:effectLst/>
+                <a:latin typeface="Yu Gothic UI Semilight" panose="020B0400000000000000" pitchFamily="34" charset="-128"/>
+                <a:ea typeface="Yu Gothic UI Semilight" panose="020B0400000000000000" pitchFamily="34" charset="-128"/>
+                <a:cs typeface="맑은 고딕 Semilight" panose="020B0502040204020203" pitchFamily="50" charset="-127"/>
+              </a:rPr>
+              <a:t>ata</a:t>
+            </a:r>
+          </a:p>
+        </p:txBody>
+      </p:sp>
+    </p:spTree>
+    <p:extLst>
+      <p:ext uri="{BB962C8B-B14F-4D97-AF65-F5344CB8AC3E}">
+        <p14:creationId xmlns:p14="http://schemas.microsoft.com/office/powerpoint/2010/main" val="2678542644"/>
+      </p:ext>
+    </p:extLst>
+  </p:cSld>
+  <p:clrMapOvr>
+    <a:masterClrMapping/>
+  </p:clrMapOvr>
+</p:sld>
+</file>
+
+<file path=ppt/slides/slide18.xml><?xml version="1.0" encoding="utf-8"?>
+<p:sld xmlns:a="http://schemas.openxmlformats.org/drawingml/2006/main" xmlns:r="http://schemas.openxmlformats.org/officeDocument/2006/relationships" xmlns:p="http://schemas.openxmlformats.org/presentationml/2006/main">
+  <p:cSld>
+    <p:spTree>
+      <p:nvGrpSpPr>
+        <p:cNvPr id="1" name="">
+          <a:extLst>
+            <a:ext uri="{FF2B5EF4-FFF2-40B4-BE49-F238E27FC236}">
+              <a16:creationId xmlns:a16="http://schemas.microsoft.com/office/drawing/2014/main" id="{A2C740DF-875F-5D13-B6C8-0C72857468AC}"/>
+            </a:ext>
+          </a:extLst>
+        </p:cNvPr>
+        <p:cNvGrpSpPr/>
+        <p:nvPr/>
+      </p:nvGrpSpPr>
+      <p:grpSpPr>
+        <a:xfrm>
+          <a:off x="0" y="0"/>
+          <a:ext cx="0" cy="0"/>
+          <a:chOff x="0" y="0"/>
+          <a:chExt cx="0" cy="0"/>
+        </a:xfrm>
+      </p:grpSpPr>
+      <p:sp>
+        <p:nvSpPr>
+          <p:cNvPr id="4" name="슬라이드 번호 개체 틀 3">
+            <a:extLst>
+              <a:ext uri="{FF2B5EF4-FFF2-40B4-BE49-F238E27FC236}">
+                <a16:creationId xmlns:a16="http://schemas.microsoft.com/office/drawing/2014/main" id="{3E8EA706-2C98-9D95-81C7-563273F36EDF}"/>
+              </a:ext>
+            </a:extLst>
+          </p:cNvPr>
+          <p:cNvSpPr>
+            <a:spLocks noGrp="1"/>
+          </p:cNvSpPr>
+          <p:nvPr>
+            <p:ph type="sldNum" sz="quarter" idx="12"/>
+          </p:nvPr>
+        </p:nvSpPr>
+        <p:spPr>
+          <a:xfrm>
+            <a:off x="10514011" y="6036261"/>
+            <a:ext cx="753545" cy="365125"/>
+          </a:xfrm>
+        </p:spPr>
+        <p:txBody>
+          <a:bodyPr/>
+          <a:lstStyle/>
+          <a:p>
+            <a:fld id="{D57F1E4F-1CFF-5643-939E-217C01CDF565}" type="slidenum">
+              <a:rPr lang="en-US" smtClean="0"/>
+              <a:pPr/>
+              <a:t>18</a:t>
+            </a:fld>
+            <a:endParaRPr lang="en-US" dirty="0"/>
+          </a:p>
+        </p:txBody>
+      </p:sp>
+      <p:sp>
+        <p:nvSpPr>
+          <p:cNvPr id="3" name="제목 1">
+            <a:extLst>
+              <a:ext uri="{FF2B5EF4-FFF2-40B4-BE49-F238E27FC236}">
+                <a16:creationId xmlns:a16="http://schemas.microsoft.com/office/drawing/2014/main" id="{10FB6279-1DEB-EB79-E28C-34765A155254}"/>
+              </a:ext>
+            </a:extLst>
+          </p:cNvPr>
+          <p:cNvSpPr txBox="1">
+            <a:spLocks/>
+          </p:cNvSpPr>
+          <p:nvPr/>
+        </p:nvSpPr>
+        <p:spPr>
+          <a:xfrm>
+            <a:off x="475645" y="481983"/>
+            <a:ext cx="10353762" cy="766439"/>
+          </a:xfrm>
+          <a:prstGeom prst="rect">
+            <a:avLst/>
+          </a:prstGeom>
+        </p:spPr>
+        <p:txBody>
+          <a:bodyPr vert="horz" lIns="91440" tIns="45720" rIns="91440" bIns="45720" rtlCol="0" anchor="ctr">
+            <a:normAutofit/>
+          </a:bodyPr>
+          <a:lstStyle>
+            <a:lvl1pPr algn="ctr" defTabSz="914400" rtl="0" eaLnBrk="1" latinLnBrk="1" hangingPunct="1">
+              <a:lnSpc>
+                <a:spcPct val="90000"/>
+              </a:lnSpc>
+              <a:spcBef>
+                <a:spcPct val="0"/>
+              </a:spcBef>
+              <a:buNone/>
+              <a:defRPr sz="3200" kern="1200" cap="all" baseline="0">
+                <a:solidFill>
+                  <a:schemeClr val="tx1"/>
+                </a:solidFill>
+                <a:effectLst/>
+                <a:latin typeface="Batang" panose="02030600000101010101" pitchFamily="18" charset="-127"/>
+                <a:ea typeface="Batang" panose="02030600000101010101" pitchFamily="18" charset="-127"/>
+                <a:cs typeface="+mj-cs"/>
+              </a:defRPr>
+            </a:lvl1pPr>
+          </a:lstStyle>
+          <a:p>
+            <a:pPr algn="l">
+              <a:lnSpc>
+                <a:spcPct val="150000"/>
+              </a:lnSpc>
+            </a:pPr>
+            <a:r>
+              <a:rPr lang="en-US" altLang="ko-KR" sz="2800" cap="none" dirty="0">
+                <a:latin typeface="D2Coding" panose="020B0609020101020101" pitchFamily="49" charset="-127"/>
+                <a:ea typeface="D2Coding" panose="020B0609020101020101" pitchFamily="49" charset="-127"/>
+              </a:rPr>
+              <a:t>Regression</a:t>
+            </a:r>
+            <a:r>
+              <a:rPr lang="ko-KR" altLang="en-US" sz="2800" cap="none" dirty="0">
+                <a:latin typeface="D2Coding" panose="020B0609020101020101" pitchFamily="49" charset="-127"/>
+                <a:ea typeface="D2Coding" panose="020B0609020101020101" pitchFamily="49" charset="-127"/>
+              </a:rPr>
+              <a:t> </a:t>
+            </a:r>
+            <a:r>
+              <a:rPr lang="en-US" altLang="ko-KR" sz="2800" cap="none" dirty="0">
+                <a:latin typeface="D2Coding" panose="020B0609020101020101" pitchFamily="49" charset="-127"/>
+                <a:ea typeface="D2Coding" panose="020B0609020101020101" pitchFamily="49" charset="-127"/>
+              </a:rPr>
+              <a:t>Model</a:t>
+            </a:r>
+          </a:p>
+        </p:txBody>
+      </p:sp>
+      <p:sp>
+        <p:nvSpPr>
+          <p:cNvPr id="8" name="TextBox 7">
+            <a:extLst>
+              <a:ext uri="{FF2B5EF4-FFF2-40B4-BE49-F238E27FC236}">
+                <a16:creationId xmlns:a16="http://schemas.microsoft.com/office/drawing/2014/main" id="{EE8D4F8E-D2F3-DAA3-255A-4777BE0D753B}"/>
+              </a:ext>
+            </a:extLst>
+          </p:cNvPr>
+          <p:cNvSpPr txBox="1"/>
+          <p:nvPr/>
+        </p:nvSpPr>
+        <p:spPr>
+          <a:xfrm>
+            <a:off x="475645" y="1248422"/>
+            <a:ext cx="11240710" cy="880819"/>
+          </a:xfrm>
+          <a:prstGeom prst="rect">
+            <a:avLst/>
+          </a:prstGeom>
+          <a:noFill/>
+        </p:spPr>
+        <p:txBody>
+          <a:bodyPr wrap="square" rtlCol="0">
+            <a:spAutoFit/>
+          </a:bodyPr>
+          <a:lstStyle/>
+          <a:p>
+            <a:pPr>
+              <a:lnSpc>
+                <a:spcPct val="150000"/>
+              </a:lnSpc>
+            </a:pPr>
+            <a:r>
+              <a:rPr lang="ko-KR" altLang="en-US" dirty="0">
+                <a:latin typeface="D2Coding" panose="020B0609020101020101" pitchFamily="49" charset="-127"/>
+                <a:ea typeface="D2Coding" panose="020B0609020101020101" pitchFamily="49" charset="-127"/>
+              </a:rPr>
+              <a:t>키</a:t>
+            </a:r>
+            <a:r>
+              <a:rPr lang="en-US" altLang="ko-KR" dirty="0">
+                <a:latin typeface="D2Coding" panose="020B0609020101020101" pitchFamily="49" charset="-127"/>
+                <a:ea typeface="D2Coding" panose="020B0609020101020101" pitchFamily="49" charset="-127"/>
+              </a:rPr>
+              <a:t>(Height)</a:t>
+            </a:r>
+            <a:r>
+              <a:rPr lang="ko-KR" altLang="en-US" dirty="0">
+                <a:latin typeface="D2Coding" panose="020B0609020101020101" pitchFamily="49" charset="-127"/>
+                <a:ea typeface="D2Coding" panose="020B0609020101020101" pitchFamily="49" charset="-127"/>
+              </a:rPr>
+              <a:t>를 입력변수로 하고 성별</a:t>
+            </a:r>
+            <a:r>
+              <a:rPr lang="en-US" altLang="ko-KR" dirty="0">
+                <a:latin typeface="D2Coding" panose="020B0609020101020101" pitchFamily="49" charset="-127"/>
+                <a:ea typeface="D2Coding" panose="020B0609020101020101" pitchFamily="49" charset="-127"/>
+              </a:rPr>
+              <a:t>(Gender)</a:t>
+            </a:r>
+            <a:r>
+              <a:rPr lang="ko-KR" altLang="en-US" dirty="0">
+                <a:latin typeface="D2Coding" panose="020B0609020101020101" pitchFamily="49" charset="-127"/>
+                <a:ea typeface="D2Coding" panose="020B0609020101020101" pitchFamily="49" charset="-127"/>
+              </a:rPr>
+              <a:t>를 출력변수로 하여 단순회귀 모델을 적용하여 </a:t>
+            </a:r>
+            <a:r>
+              <a:rPr lang="en-US" altLang="ko-KR" dirty="0">
+                <a:latin typeface="D2Coding" panose="020B0609020101020101" pitchFamily="49" charset="-127"/>
+                <a:ea typeface="D2Coding" panose="020B0609020101020101" pitchFamily="49" charset="-127"/>
+              </a:rPr>
+              <a:t>parameters</a:t>
+            </a:r>
+            <a:r>
+              <a:rPr lang="ko-KR" altLang="en-US" dirty="0">
+                <a:latin typeface="D2Coding" panose="020B0609020101020101" pitchFamily="49" charset="-127"/>
+                <a:ea typeface="D2Coding" panose="020B0609020101020101" pitchFamily="49" charset="-127"/>
+              </a:rPr>
+              <a:t>를 구한 후 회귀식을 </a:t>
+            </a:r>
+            <a:r>
+              <a:rPr lang="ko-KR" altLang="en-US" dirty="0" err="1">
+                <a:latin typeface="D2Coding" panose="020B0609020101020101" pitchFamily="49" charset="-127"/>
+                <a:ea typeface="D2Coding" panose="020B0609020101020101" pitchFamily="49" charset="-127"/>
+              </a:rPr>
+              <a:t>시각화하라</a:t>
+            </a:r>
+            <a:r>
+              <a:rPr lang="en-US" altLang="ko-KR" dirty="0">
+                <a:latin typeface="D2Coding" panose="020B0609020101020101" pitchFamily="49" charset="-127"/>
+                <a:ea typeface="D2Coding" panose="020B0609020101020101" pitchFamily="49" charset="-127"/>
+              </a:rPr>
+              <a:t>(</a:t>
+            </a:r>
+            <a:r>
+              <a:rPr lang="ko-KR" altLang="en-US" dirty="0">
+                <a:latin typeface="D2Coding" panose="020B0609020101020101" pitchFamily="49" charset="-127"/>
+                <a:ea typeface="D2Coding" panose="020B0609020101020101" pitchFamily="49" charset="-127"/>
+              </a:rPr>
+              <a:t>구글시트</a:t>
+            </a:r>
+            <a:r>
+              <a:rPr lang="en-US" altLang="ko-KR" dirty="0">
+                <a:latin typeface="D2Coding" panose="020B0609020101020101" pitchFamily="49" charset="-127"/>
+                <a:ea typeface="D2Coding" panose="020B0609020101020101" pitchFamily="49" charset="-127"/>
+              </a:rPr>
+              <a:t> &amp; </a:t>
+            </a:r>
+            <a:r>
+              <a:rPr lang="ko-KR" altLang="en-US" dirty="0">
+                <a:latin typeface="D2Coding" panose="020B0609020101020101" pitchFamily="49" charset="-127"/>
+                <a:ea typeface="D2Coding" panose="020B0609020101020101" pitchFamily="49" charset="-127"/>
+              </a:rPr>
+              <a:t>파이썬</a:t>
+            </a:r>
+            <a:r>
+              <a:rPr lang="en-US" altLang="ko-KR" dirty="0">
+                <a:latin typeface="D2Coding" panose="020B0609020101020101" pitchFamily="49" charset="-127"/>
+                <a:ea typeface="D2Coding" panose="020B0609020101020101" pitchFamily="49" charset="-127"/>
+              </a:rPr>
+              <a:t>)</a:t>
+            </a:r>
+            <a:endParaRPr lang="ko-KR" altLang="en-US" dirty="0">
+              <a:latin typeface="D2Coding" panose="020B0609020101020101" pitchFamily="49" charset="-127"/>
+              <a:ea typeface="D2Coding" panose="020B0609020101020101" pitchFamily="49" charset="-127"/>
+            </a:endParaRPr>
+          </a:p>
+        </p:txBody>
+      </p:sp>
+      <p:graphicFrame>
+        <p:nvGraphicFramePr>
+          <p:cNvPr id="15" name="표 14">
+            <a:extLst>
+              <a:ext uri="{FF2B5EF4-FFF2-40B4-BE49-F238E27FC236}">
+                <a16:creationId xmlns:a16="http://schemas.microsoft.com/office/drawing/2014/main" id="{5B540336-108C-0228-6DBD-8DA79BE96B09}"/>
+              </a:ext>
+            </a:extLst>
+          </p:cNvPr>
+          <p:cNvGraphicFramePr>
+            <a:graphicFrameLocks noGrp="1"/>
+          </p:cNvGraphicFramePr>
+          <p:nvPr>
+            <p:extLst>
+              <p:ext uri="{D42A27DB-BD31-4B8C-83A1-F6EECF244321}">
+                <p14:modId xmlns:p14="http://schemas.microsoft.com/office/powerpoint/2010/main" val="1988464300"/>
+              </p:ext>
+            </p:extLst>
+          </p:nvPr>
+        </p:nvGraphicFramePr>
+        <p:xfrm>
+          <a:off x="1192660" y="2495274"/>
+          <a:ext cx="2007394" cy="3036235"/>
+        </p:xfrm>
+        <a:graphic>
+          <a:graphicData uri="http://schemas.openxmlformats.org/drawingml/2006/table">
+            <a:tbl>
+              <a:tblPr>
+                <a:tableStyleId>{5940675A-B579-460E-94D1-54222C63F5DA}</a:tableStyleId>
+              </a:tblPr>
+              <a:tblGrid>
+                <a:gridCol w="1003697">
+                  <a:extLst>
+                    <a:ext uri="{9D8B030D-6E8A-4147-A177-3AD203B41FA5}">
+                      <a16:colId xmlns:a16="http://schemas.microsoft.com/office/drawing/2014/main" val="729620001"/>
+                    </a:ext>
+                  </a:extLst>
+                </a:gridCol>
+                <a:gridCol w="1003697">
+                  <a:extLst>
+                    <a:ext uri="{9D8B030D-6E8A-4147-A177-3AD203B41FA5}">
+                      <a16:colId xmlns:a16="http://schemas.microsoft.com/office/drawing/2014/main" val="1387980696"/>
+                    </a:ext>
+                  </a:extLst>
+                </a:gridCol>
+              </a:tblGrid>
+              <a:tr h="579955">
+                <a:tc>
+                  <a:txBody>
+                    <a:bodyPr/>
+                    <a:lstStyle/>
+                    <a:p>
+                      <a:pPr algn="ctr" rtl="0" fontAlgn="b">
+                        <a:buNone/>
+                      </a:pPr>
+                      <a:r>
+                        <a:rPr lang="en-US" sz="1600" dirty="0">
+                          <a:effectLst/>
+                        </a:rPr>
+                        <a:t>Person</a:t>
+                      </a:r>
+                      <a:endParaRPr lang="en-US" sz="1600" dirty="0">
+                        <a:effectLst/>
+                        <a:latin typeface="D2Coding" panose="020B0609020101020101" pitchFamily="49" charset="-127"/>
+                        <a:ea typeface="D2Coding" panose="020B0609020101020101" pitchFamily="49" charset="-127"/>
+                      </a:endParaRPr>
+                    </a:p>
+                  </a:txBody>
+                  <a:tcPr marL="22860" marR="22860" marT="15240" marB="15240" anchor="b">
+                    <a:solidFill>
+                      <a:schemeClr val="accent6">
+                        <a:lumMod val="20000"/>
+                        <a:lumOff val="80000"/>
+                      </a:schemeClr>
+                    </a:solidFill>
+                  </a:tcPr>
+                </a:tc>
+                <a:tc>
+                  <a:txBody>
+                    <a:bodyPr/>
+                    <a:lstStyle/>
+                    <a:p>
+                      <a:pPr algn="ctr" rtl="0" fontAlgn="b">
+                        <a:buNone/>
+                      </a:pPr>
+                      <a:r>
+                        <a:rPr lang="en-US" sz="1600" dirty="0">
+                          <a:effectLst/>
+                        </a:rPr>
+                        <a:t>Height</a:t>
+                      </a:r>
+                    </a:p>
+                    <a:p>
+                      <a:pPr algn="ctr" rtl="0" fontAlgn="b">
+                        <a:buNone/>
+                      </a:pPr>
+                      <a:r>
+                        <a:rPr lang="en-US" sz="1600" dirty="0">
+                          <a:effectLst/>
+                        </a:rPr>
+                        <a:t>(feet)</a:t>
+                      </a:r>
+                      <a:endParaRPr lang="en-US" sz="1600" dirty="0">
+                        <a:effectLst/>
+                        <a:latin typeface="D2Coding" panose="020B0609020101020101" pitchFamily="49" charset="-127"/>
+                        <a:ea typeface="D2Coding" panose="020B0609020101020101" pitchFamily="49" charset="-127"/>
+                      </a:endParaRPr>
+                    </a:p>
+                  </a:txBody>
+                  <a:tcPr marL="22860" marR="22860" marT="15240" marB="15240" anchor="b">
+                    <a:solidFill>
+                      <a:schemeClr val="accent5">
+                        <a:lumMod val="20000"/>
+                        <a:lumOff val="80000"/>
+                      </a:schemeClr>
+                    </a:solidFill>
+                  </a:tcPr>
+                </a:tc>
+                <a:extLst>
+                  <a:ext uri="{0D108BD9-81ED-4DB2-BD59-A6C34878D82A}">
+                    <a16:rowId xmlns:a16="http://schemas.microsoft.com/office/drawing/2014/main" val="204437853"/>
+                  </a:ext>
+                </a:extLst>
+              </a:tr>
+              <a:tr h="307035">
+                <a:tc>
+                  <a:txBody>
+                    <a:bodyPr/>
+                    <a:lstStyle/>
+                    <a:p>
+                      <a:pPr algn="ctr" rtl="0" fontAlgn="b">
+                        <a:buNone/>
+                      </a:pPr>
+                      <a:r>
+                        <a:rPr lang="en-US" sz="1600" dirty="0">
+                          <a:effectLst/>
+                        </a:rPr>
+                        <a:t>male</a:t>
+                      </a:r>
+                      <a:endParaRPr lang="en-US" sz="1600" dirty="0">
+                        <a:effectLst/>
+                        <a:latin typeface="D2Coding" panose="020B0609020101020101" pitchFamily="49" charset="-127"/>
+                        <a:ea typeface="D2Coding" panose="020B0609020101020101" pitchFamily="49" charset="-127"/>
+                      </a:endParaRPr>
+                    </a:p>
+                  </a:txBody>
+                  <a:tcPr marL="22860" marR="22860" marT="15240" marB="15240" anchor="b">
+                    <a:solidFill>
+                      <a:schemeClr val="accent6">
+                        <a:lumMod val="20000"/>
+                        <a:lumOff val="80000"/>
+                      </a:schemeClr>
+                    </a:solidFill>
+                  </a:tcPr>
+                </a:tc>
+                <a:tc>
+                  <a:txBody>
+                    <a:bodyPr/>
+                    <a:lstStyle/>
+                    <a:p>
+                      <a:pPr algn="ctr" rtl="0" fontAlgn="b">
+                        <a:buNone/>
+                      </a:pPr>
+                      <a:r>
+                        <a:rPr lang="en-US" altLang="ko-KR" sz="1600" dirty="0">
+                          <a:effectLst/>
+                        </a:rPr>
+                        <a:t>6.00</a:t>
+                      </a:r>
+                      <a:endParaRPr lang="en-US" altLang="ko-KR" sz="1600" dirty="0">
+                        <a:effectLst/>
+                        <a:latin typeface="D2Coding" panose="020B0609020101020101" pitchFamily="49" charset="-127"/>
+                        <a:ea typeface="D2Coding" panose="020B0609020101020101" pitchFamily="49" charset="-127"/>
+                      </a:endParaRPr>
+                    </a:p>
+                  </a:txBody>
+                  <a:tcPr marL="22860" marR="22860" marT="15240" marB="15240" anchor="b">
+                    <a:solidFill>
+                      <a:schemeClr val="accent5">
+                        <a:lumMod val="20000"/>
+                        <a:lumOff val="80000"/>
+                      </a:schemeClr>
+                    </a:solidFill>
+                  </a:tcPr>
+                </a:tc>
+                <a:extLst>
+                  <a:ext uri="{0D108BD9-81ED-4DB2-BD59-A6C34878D82A}">
+                    <a16:rowId xmlns:a16="http://schemas.microsoft.com/office/drawing/2014/main" val="2327080991"/>
+                  </a:ext>
+                </a:extLst>
+              </a:tr>
+              <a:tr h="307035">
+                <a:tc>
+                  <a:txBody>
+                    <a:bodyPr/>
+                    <a:lstStyle/>
+                    <a:p>
+                      <a:pPr algn="ctr" rtl="0" fontAlgn="b">
+                        <a:buNone/>
+                      </a:pPr>
+                      <a:r>
+                        <a:rPr lang="en-US" sz="1600" dirty="0">
+                          <a:effectLst/>
+                        </a:rPr>
+                        <a:t>male</a:t>
+                      </a:r>
+                      <a:endParaRPr lang="en-US" sz="1600" dirty="0">
+                        <a:effectLst/>
+                        <a:latin typeface="D2Coding" panose="020B0609020101020101" pitchFamily="49" charset="-127"/>
+                        <a:ea typeface="D2Coding" panose="020B0609020101020101" pitchFamily="49" charset="-127"/>
+                      </a:endParaRPr>
+                    </a:p>
+                  </a:txBody>
+                  <a:tcPr marL="22860" marR="22860" marT="15240" marB="15240" anchor="b">
+                    <a:solidFill>
+                      <a:schemeClr val="accent6">
+                        <a:lumMod val="20000"/>
+                        <a:lumOff val="80000"/>
+                      </a:schemeClr>
+                    </a:solidFill>
+                  </a:tcPr>
+                </a:tc>
+                <a:tc>
+                  <a:txBody>
+                    <a:bodyPr/>
+                    <a:lstStyle/>
+                    <a:p>
+                      <a:pPr algn="ctr" rtl="0" fontAlgn="b">
+                        <a:buNone/>
+                      </a:pPr>
+                      <a:r>
+                        <a:rPr lang="en-US" altLang="ko-KR" sz="1600" dirty="0">
+                          <a:effectLst/>
+                        </a:rPr>
+                        <a:t>5.92</a:t>
+                      </a:r>
+                      <a:endParaRPr lang="en-US" altLang="ko-KR" sz="1600" dirty="0">
+                        <a:effectLst/>
+                        <a:latin typeface="D2Coding" panose="020B0609020101020101" pitchFamily="49" charset="-127"/>
+                        <a:ea typeface="D2Coding" panose="020B0609020101020101" pitchFamily="49" charset="-127"/>
+                      </a:endParaRPr>
+                    </a:p>
+                  </a:txBody>
+                  <a:tcPr marL="22860" marR="22860" marT="15240" marB="15240" anchor="b">
+                    <a:solidFill>
+                      <a:schemeClr val="accent5">
+                        <a:lumMod val="20000"/>
+                        <a:lumOff val="80000"/>
+                      </a:schemeClr>
+                    </a:solidFill>
+                  </a:tcPr>
+                </a:tc>
+                <a:extLst>
+                  <a:ext uri="{0D108BD9-81ED-4DB2-BD59-A6C34878D82A}">
+                    <a16:rowId xmlns:a16="http://schemas.microsoft.com/office/drawing/2014/main" val="1530259819"/>
+                  </a:ext>
+                </a:extLst>
+              </a:tr>
+              <a:tr h="307035">
+                <a:tc>
+                  <a:txBody>
+                    <a:bodyPr/>
+                    <a:lstStyle/>
+                    <a:p>
+                      <a:pPr algn="ctr" rtl="0" fontAlgn="b">
+                        <a:buNone/>
+                      </a:pPr>
+                      <a:r>
+                        <a:rPr lang="en-US" sz="1600">
+                          <a:effectLst/>
+                        </a:rPr>
+                        <a:t>male</a:t>
+                      </a:r>
+                      <a:endParaRPr lang="en-US" sz="1600">
+                        <a:effectLst/>
+                        <a:latin typeface="D2Coding" panose="020B0609020101020101" pitchFamily="49" charset="-127"/>
+                        <a:ea typeface="D2Coding" panose="020B0609020101020101" pitchFamily="49" charset="-127"/>
+                      </a:endParaRPr>
+                    </a:p>
+                  </a:txBody>
+                  <a:tcPr marL="22860" marR="22860" marT="15240" marB="15240" anchor="b">
+                    <a:solidFill>
+                      <a:schemeClr val="accent6">
+                        <a:lumMod val="20000"/>
+                        <a:lumOff val="80000"/>
+                      </a:schemeClr>
+                    </a:solidFill>
+                  </a:tcPr>
+                </a:tc>
+                <a:tc>
+                  <a:txBody>
+                    <a:bodyPr/>
+                    <a:lstStyle/>
+                    <a:p>
+                      <a:pPr algn="ctr" rtl="0" fontAlgn="b">
+                        <a:buNone/>
+                      </a:pPr>
+                      <a:r>
+                        <a:rPr lang="en-US" altLang="ko-KR" sz="1600" dirty="0">
+                          <a:effectLst/>
+                        </a:rPr>
+                        <a:t>5.58</a:t>
+                      </a:r>
+                      <a:endParaRPr lang="en-US" altLang="ko-KR" sz="1600" dirty="0">
+                        <a:effectLst/>
+                        <a:latin typeface="D2Coding" panose="020B0609020101020101" pitchFamily="49" charset="-127"/>
+                        <a:ea typeface="D2Coding" panose="020B0609020101020101" pitchFamily="49" charset="-127"/>
+                      </a:endParaRPr>
+                    </a:p>
+                  </a:txBody>
+                  <a:tcPr marL="22860" marR="22860" marT="15240" marB="15240" anchor="b">
+                    <a:solidFill>
+                      <a:schemeClr val="accent5">
+                        <a:lumMod val="20000"/>
+                        <a:lumOff val="80000"/>
+                      </a:schemeClr>
+                    </a:solidFill>
+                  </a:tcPr>
+                </a:tc>
+                <a:extLst>
+                  <a:ext uri="{0D108BD9-81ED-4DB2-BD59-A6C34878D82A}">
+                    <a16:rowId xmlns:a16="http://schemas.microsoft.com/office/drawing/2014/main" val="2235397511"/>
+                  </a:ext>
+                </a:extLst>
+              </a:tr>
+              <a:tr h="307035">
+                <a:tc>
+                  <a:txBody>
+                    <a:bodyPr/>
+                    <a:lstStyle/>
+                    <a:p>
+                      <a:pPr algn="ctr" rtl="0" fontAlgn="b">
+                        <a:buNone/>
+                      </a:pPr>
+                      <a:r>
+                        <a:rPr lang="en-US" sz="1600">
+                          <a:effectLst/>
+                        </a:rPr>
+                        <a:t>male</a:t>
+                      </a:r>
+                      <a:endParaRPr lang="en-US" sz="1600">
+                        <a:effectLst/>
+                        <a:latin typeface="D2Coding" panose="020B0609020101020101" pitchFamily="49" charset="-127"/>
+                        <a:ea typeface="D2Coding" panose="020B0609020101020101" pitchFamily="49" charset="-127"/>
+                      </a:endParaRPr>
+                    </a:p>
+                  </a:txBody>
+                  <a:tcPr marL="22860" marR="22860" marT="15240" marB="15240" anchor="b">
+                    <a:solidFill>
+                      <a:schemeClr val="accent6">
+                        <a:lumMod val="20000"/>
+                        <a:lumOff val="80000"/>
+                      </a:schemeClr>
+                    </a:solidFill>
+                  </a:tcPr>
+                </a:tc>
+                <a:tc>
+                  <a:txBody>
+                    <a:bodyPr/>
+                    <a:lstStyle/>
+                    <a:p>
+                      <a:pPr algn="ctr" rtl="0" fontAlgn="b">
+                        <a:buNone/>
+                      </a:pPr>
+                      <a:r>
+                        <a:rPr lang="en-US" altLang="ko-KR" sz="1600" dirty="0">
+                          <a:effectLst/>
+                        </a:rPr>
+                        <a:t>5.92</a:t>
+                      </a:r>
+                      <a:endParaRPr lang="en-US" altLang="ko-KR" sz="1600" dirty="0">
+                        <a:effectLst/>
+                        <a:latin typeface="D2Coding" panose="020B0609020101020101" pitchFamily="49" charset="-127"/>
+                        <a:ea typeface="D2Coding" panose="020B0609020101020101" pitchFamily="49" charset="-127"/>
+                      </a:endParaRPr>
+                    </a:p>
+                  </a:txBody>
+                  <a:tcPr marL="22860" marR="22860" marT="15240" marB="15240" anchor="b">
+                    <a:solidFill>
+                      <a:schemeClr val="accent5">
+                        <a:lumMod val="20000"/>
+                        <a:lumOff val="80000"/>
+                      </a:schemeClr>
+                    </a:solidFill>
+                  </a:tcPr>
+                </a:tc>
+                <a:extLst>
+                  <a:ext uri="{0D108BD9-81ED-4DB2-BD59-A6C34878D82A}">
+                    <a16:rowId xmlns:a16="http://schemas.microsoft.com/office/drawing/2014/main" val="3297033087"/>
+                  </a:ext>
+                </a:extLst>
+              </a:tr>
+              <a:tr h="307035">
+                <a:tc>
+                  <a:txBody>
+                    <a:bodyPr/>
+                    <a:lstStyle/>
+                    <a:p>
+                      <a:pPr algn="ctr" rtl="0" fontAlgn="b">
+                        <a:buNone/>
+                      </a:pPr>
+                      <a:r>
+                        <a:rPr lang="en-US" sz="1600" dirty="0">
+                          <a:effectLst/>
+                        </a:rPr>
+                        <a:t>female</a:t>
+                      </a:r>
+                      <a:endParaRPr lang="en-US" sz="1600" dirty="0">
+                        <a:effectLst/>
+                        <a:latin typeface="D2Coding" panose="020B0609020101020101" pitchFamily="49" charset="-127"/>
+                        <a:ea typeface="D2Coding" panose="020B0609020101020101" pitchFamily="49" charset="-127"/>
+                      </a:endParaRPr>
+                    </a:p>
+                  </a:txBody>
+                  <a:tcPr marL="22860" marR="22860" marT="15240" marB="15240" anchor="b">
+                    <a:solidFill>
+                      <a:schemeClr val="accent6">
+                        <a:lumMod val="20000"/>
+                        <a:lumOff val="80000"/>
+                      </a:schemeClr>
+                    </a:solidFill>
+                  </a:tcPr>
+                </a:tc>
+                <a:tc>
+                  <a:txBody>
+                    <a:bodyPr/>
+                    <a:lstStyle/>
+                    <a:p>
+                      <a:pPr algn="ctr" rtl="0" fontAlgn="b">
+                        <a:buNone/>
+                      </a:pPr>
+                      <a:r>
+                        <a:rPr lang="en-US" altLang="ko-KR" sz="1600" dirty="0">
+                          <a:effectLst/>
+                        </a:rPr>
+                        <a:t>5.00</a:t>
+                      </a:r>
+                      <a:endParaRPr lang="en-US" altLang="ko-KR" sz="1600" dirty="0">
+                        <a:effectLst/>
+                        <a:latin typeface="D2Coding" panose="020B0609020101020101" pitchFamily="49" charset="-127"/>
+                        <a:ea typeface="D2Coding" panose="020B0609020101020101" pitchFamily="49" charset="-127"/>
+                      </a:endParaRPr>
+                    </a:p>
+                  </a:txBody>
+                  <a:tcPr marL="22860" marR="22860" marT="15240" marB="15240" anchor="b">
+                    <a:solidFill>
+                      <a:schemeClr val="accent5">
+                        <a:lumMod val="20000"/>
+                        <a:lumOff val="80000"/>
+                      </a:schemeClr>
+                    </a:solidFill>
+                  </a:tcPr>
+                </a:tc>
+                <a:extLst>
+                  <a:ext uri="{0D108BD9-81ED-4DB2-BD59-A6C34878D82A}">
+                    <a16:rowId xmlns:a16="http://schemas.microsoft.com/office/drawing/2014/main" val="1914524656"/>
+                  </a:ext>
+                </a:extLst>
+              </a:tr>
+              <a:tr h="307035">
+                <a:tc>
+                  <a:txBody>
+                    <a:bodyPr/>
+                    <a:lstStyle/>
+                    <a:p>
+                      <a:pPr algn="ctr" rtl="0" fontAlgn="b">
+                        <a:buNone/>
+                      </a:pPr>
+                      <a:r>
+                        <a:rPr lang="en-US" sz="1600" dirty="0">
+                          <a:effectLst/>
+                        </a:rPr>
+                        <a:t>female</a:t>
+                      </a:r>
+                      <a:endParaRPr lang="en-US" sz="1600" dirty="0">
+                        <a:effectLst/>
+                        <a:latin typeface="D2Coding" panose="020B0609020101020101" pitchFamily="49" charset="-127"/>
+                        <a:ea typeface="D2Coding" panose="020B0609020101020101" pitchFamily="49" charset="-127"/>
+                      </a:endParaRPr>
+                    </a:p>
+                  </a:txBody>
+                  <a:tcPr marL="22860" marR="22860" marT="15240" marB="15240" anchor="b">
+                    <a:solidFill>
+                      <a:schemeClr val="accent6">
+                        <a:lumMod val="20000"/>
+                        <a:lumOff val="80000"/>
+                      </a:schemeClr>
+                    </a:solidFill>
+                  </a:tcPr>
+                </a:tc>
+                <a:tc>
+                  <a:txBody>
+                    <a:bodyPr/>
+                    <a:lstStyle/>
+                    <a:p>
+                      <a:pPr algn="ctr" rtl="0" fontAlgn="b">
+                        <a:buNone/>
+                      </a:pPr>
+                      <a:r>
+                        <a:rPr lang="en-US" altLang="ko-KR" sz="1600" dirty="0">
+                          <a:effectLst/>
+                        </a:rPr>
+                        <a:t>5.50</a:t>
+                      </a:r>
+                      <a:endParaRPr lang="en-US" altLang="ko-KR" sz="1600" dirty="0">
+                        <a:effectLst/>
+                        <a:latin typeface="D2Coding" panose="020B0609020101020101" pitchFamily="49" charset="-127"/>
+                        <a:ea typeface="D2Coding" panose="020B0609020101020101" pitchFamily="49" charset="-127"/>
+                      </a:endParaRPr>
+                    </a:p>
+                  </a:txBody>
+                  <a:tcPr marL="22860" marR="22860" marT="15240" marB="15240" anchor="b">
+                    <a:solidFill>
+                      <a:schemeClr val="accent5">
+                        <a:lumMod val="20000"/>
+                        <a:lumOff val="80000"/>
+                      </a:schemeClr>
+                    </a:solidFill>
+                  </a:tcPr>
+                </a:tc>
+                <a:extLst>
+                  <a:ext uri="{0D108BD9-81ED-4DB2-BD59-A6C34878D82A}">
+                    <a16:rowId xmlns:a16="http://schemas.microsoft.com/office/drawing/2014/main" val="467656357"/>
+                  </a:ext>
+                </a:extLst>
+              </a:tr>
+              <a:tr h="307035">
+                <a:tc>
+                  <a:txBody>
+                    <a:bodyPr/>
+                    <a:lstStyle/>
+                    <a:p>
+                      <a:pPr algn="ctr" rtl="0" fontAlgn="b">
+                        <a:buNone/>
+                      </a:pPr>
+                      <a:r>
+                        <a:rPr lang="en-US" sz="1600" dirty="0">
+                          <a:effectLst/>
+                        </a:rPr>
+                        <a:t>female</a:t>
+                      </a:r>
+                      <a:endParaRPr lang="en-US" sz="1600" dirty="0">
+                        <a:effectLst/>
+                        <a:latin typeface="D2Coding" panose="020B0609020101020101" pitchFamily="49" charset="-127"/>
+                        <a:ea typeface="D2Coding" panose="020B0609020101020101" pitchFamily="49" charset="-127"/>
+                      </a:endParaRPr>
+                    </a:p>
+                  </a:txBody>
+                  <a:tcPr marL="22860" marR="22860" marT="15240" marB="15240" anchor="b">
+                    <a:solidFill>
+                      <a:schemeClr val="accent6">
+                        <a:lumMod val="20000"/>
+                        <a:lumOff val="80000"/>
+                      </a:schemeClr>
+                    </a:solidFill>
+                  </a:tcPr>
+                </a:tc>
+                <a:tc>
+                  <a:txBody>
+                    <a:bodyPr/>
+                    <a:lstStyle/>
+                    <a:p>
+                      <a:pPr algn="ctr" rtl="0" fontAlgn="b">
+                        <a:buNone/>
+                      </a:pPr>
+                      <a:r>
+                        <a:rPr lang="en-US" altLang="ko-KR" sz="1600" dirty="0">
+                          <a:effectLst/>
+                        </a:rPr>
+                        <a:t>5.42</a:t>
+                      </a:r>
+                      <a:endParaRPr lang="en-US" altLang="ko-KR" sz="1600" dirty="0">
+                        <a:effectLst/>
+                        <a:latin typeface="D2Coding" panose="020B0609020101020101" pitchFamily="49" charset="-127"/>
+                        <a:ea typeface="D2Coding" panose="020B0609020101020101" pitchFamily="49" charset="-127"/>
+                      </a:endParaRPr>
+                    </a:p>
+                  </a:txBody>
+                  <a:tcPr marL="22860" marR="22860" marT="15240" marB="15240" anchor="b">
+                    <a:solidFill>
+                      <a:schemeClr val="accent5">
+                        <a:lumMod val="20000"/>
+                        <a:lumOff val="80000"/>
+                      </a:schemeClr>
+                    </a:solidFill>
+                  </a:tcPr>
+                </a:tc>
+                <a:extLst>
+                  <a:ext uri="{0D108BD9-81ED-4DB2-BD59-A6C34878D82A}">
+                    <a16:rowId xmlns:a16="http://schemas.microsoft.com/office/drawing/2014/main" val="2887534912"/>
+                  </a:ext>
+                </a:extLst>
+              </a:tr>
+              <a:tr h="307035">
+                <a:tc>
+                  <a:txBody>
+                    <a:bodyPr/>
+                    <a:lstStyle/>
+                    <a:p>
+                      <a:pPr algn="ctr" rtl="0" fontAlgn="b">
+                        <a:buNone/>
+                      </a:pPr>
+                      <a:r>
+                        <a:rPr lang="en-US" sz="1600" dirty="0">
+                          <a:effectLst/>
+                        </a:rPr>
+                        <a:t>female</a:t>
+                      </a:r>
+                      <a:endParaRPr lang="en-US" sz="1600" dirty="0">
+                        <a:effectLst/>
+                        <a:latin typeface="D2Coding" panose="020B0609020101020101" pitchFamily="49" charset="-127"/>
+                        <a:ea typeface="D2Coding" panose="020B0609020101020101" pitchFamily="49" charset="-127"/>
+                      </a:endParaRPr>
+                    </a:p>
+                  </a:txBody>
+                  <a:tcPr marL="22860" marR="22860" marT="15240" marB="15240" anchor="b">
+                    <a:solidFill>
+                      <a:schemeClr val="accent6">
+                        <a:lumMod val="20000"/>
+                        <a:lumOff val="80000"/>
+                      </a:schemeClr>
+                    </a:solidFill>
+                  </a:tcPr>
+                </a:tc>
+                <a:tc>
+                  <a:txBody>
+                    <a:bodyPr/>
+                    <a:lstStyle/>
+                    <a:p>
+                      <a:pPr algn="ctr" rtl="0" fontAlgn="b">
+                        <a:buNone/>
+                      </a:pPr>
+                      <a:r>
+                        <a:rPr lang="en-US" altLang="ko-KR" sz="1600" dirty="0">
+                          <a:effectLst/>
+                        </a:rPr>
+                        <a:t>5.75</a:t>
+                      </a:r>
+                      <a:endParaRPr lang="en-US" altLang="ko-KR" sz="1600" dirty="0">
+                        <a:effectLst/>
+                        <a:latin typeface="D2Coding" panose="020B0609020101020101" pitchFamily="49" charset="-127"/>
+                        <a:ea typeface="D2Coding" panose="020B0609020101020101" pitchFamily="49" charset="-127"/>
+                      </a:endParaRPr>
+                    </a:p>
+                  </a:txBody>
+                  <a:tcPr marL="22860" marR="22860" marT="15240" marB="15240" anchor="b">
+                    <a:solidFill>
+                      <a:schemeClr val="accent5">
+                        <a:lumMod val="20000"/>
+                        <a:lumOff val="80000"/>
+                      </a:schemeClr>
+                    </a:solidFill>
+                  </a:tcPr>
+                </a:tc>
+                <a:extLst>
+                  <a:ext uri="{0D108BD9-81ED-4DB2-BD59-A6C34878D82A}">
+                    <a16:rowId xmlns:a16="http://schemas.microsoft.com/office/drawing/2014/main" val="1369158088"/>
+                  </a:ext>
+                </a:extLst>
+              </a:tr>
+            </a:tbl>
+          </a:graphicData>
+        </a:graphic>
+      </p:graphicFrame>
+      <p:pic>
+        <p:nvPicPr>
+          <p:cNvPr id="11266" name="Picture 2">
+            <a:extLst>
+              <a:ext uri="{FF2B5EF4-FFF2-40B4-BE49-F238E27FC236}">
+                <a16:creationId xmlns:a16="http://schemas.microsoft.com/office/drawing/2014/main" id="{E531F24A-0D43-8901-1334-68771529AE25}"/>
+              </a:ext>
+            </a:extLst>
+          </p:cNvPr>
+          <p:cNvPicPr>
+            <a:picLocks noChangeAspect="1" noChangeArrowheads="1"/>
+          </p:cNvPicPr>
+          <p:nvPr/>
+        </p:nvPicPr>
+        <p:blipFill>
+          <a:blip r:embed="rId2">
+            <a:extLst>
+              <a:ext uri="{BEBA8EAE-BF5A-486C-A8C5-ECC9F3942E4B}">
+                <a14:imgProps xmlns:a14="http://schemas.microsoft.com/office/drawing/2010/main">
+                  <a14:imgLayer r:embed="rId3">
+                    <a14:imgEffect>
+                      <a14:colorTemperature colorTemp="7200"/>
+                    </a14:imgEffect>
+                  </a14:imgLayer>
+                </a14:imgProps>
+              </a:ext>
+              <a:ext uri="{28A0092B-C50C-407E-A947-70E740481C1C}">
+                <a14:useLocalDpi xmlns:a14="http://schemas.microsoft.com/office/drawing/2010/main" val="0"/>
+              </a:ext>
+            </a:extLst>
+          </a:blip>
+          <a:srcRect/>
+          <a:stretch>
+            <a:fillRect/>
+          </a:stretch>
+        </p:blipFill>
+        <p:spPr bwMode="auto">
+          <a:xfrm>
+            <a:off x="4638674" y="2495275"/>
+            <a:ext cx="5954763" cy="3616072"/>
+          </a:xfrm>
+          <a:prstGeom prst="rect">
+            <a:avLst/>
+          </a:prstGeom>
+          <a:noFill/>
+          <a:extLst>
+            <a:ext uri="{909E8E84-426E-40DD-AFC4-6F175D3DCCD1}">
+              <a14:hiddenFill xmlns:a14="http://schemas.microsoft.com/office/drawing/2010/main">
+                <a:solidFill>
+                  <a:srgbClr val="FFFFFF"/>
+                </a:solidFill>
+              </a14:hiddenFill>
+            </a:ext>
+          </a:extLst>
+        </p:spPr>
+      </p:pic>
+      <mc:AlternateContent xmlns:mc="http://schemas.openxmlformats.org/markup-compatibility/2006">
+        <mc:Choice xmlns:a14="http://schemas.microsoft.com/office/drawing/2010/main" Requires="a14">
+          <p:sp>
+            <p:nvSpPr>
+              <p:cNvPr id="2" name="TextBox 1">
+                <a:extLst>
+                  <a:ext uri="{FF2B5EF4-FFF2-40B4-BE49-F238E27FC236}">
+                    <a16:creationId xmlns:a16="http://schemas.microsoft.com/office/drawing/2014/main" id="{0C85B13A-980C-20B1-9604-29C6E314AF92}"/>
+                  </a:ext>
+                </a:extLst>
+              </p:cNvPr>
+              <p:cNvSpPr txBox="1"/>
+              <p:nvPr/>
+            </p:nvSpPr>
+            <p:spPr>
+              <a:xfrm>
+                <a:off x="8983829" y="3705614"/>
+                <a:ext cx="1609608" cy="307777"/>
+              </a:xfrm>
+              <a:prstGeom prst="rect">
+                <a:avLst/>
+              </a:prstGeom>
+              <a:solidFill>
+                <a:schemeClr val="accent4">
+                  <a:lumMod val="20000"/>
+                  <a:lumOff val="80000"/>
+                </a:schemeClr>
+              </a:solidFill>
+            </p:spPr>
+            <p:txBody>
+              <a:bodyPr wrap="none" lIns="0" tIns="0" rIns="0" bIns="0" rtlCol="0">
+                <a:spAutoFit/>
+              </a:bodyPr>
+              <a:lstStyle/>
+              <a:p>
+                <a14:m>
+                  <m:oMathPara xmlns:m="http://schemas.openxmlformats.org/officeDocument/2006/math">
+                    <m:oMathParaPr>
+                      <m:jc m:val="centerGroup"/>
+                    </m:oMathParaPr>
+                    <m:oMath xmlns:m="http://schemas.openxmlformats.org/officeDocument/2006/math">
+                      <m:r>
+                        <a:rPr lang="ko-KR" altLang="en-US" sz="2000" i="1" smtClean="0">
+                          <a:latin typeface="Cambria Math" panose="02040503050406030204" pitchFamily="18" charset="0"/>
+                        </a:rPr>
+                        <m:t>𝑦</m:t>
+                      </m:r>
+                      <m:r>
+                        <a:rPr lang="ko-KR" altLang="en-US" sz="2000" i="0">
+                          <a:latin typeface="Cambria Math" panose="02040503050406030204" pitchFamily="18" charset="0"/>
+                        </a:rPr>
+                        <m:t>=</m:t>
+                      </m:r>
+                      <m:sSub>
+                        <m:sSubPr>
+                          <m:ctrlPr>
+                            <a:rPr lang="ko-KR" altLang="en-US" sz="2000" i="1">
+                              <a:latin typeface="Cambria Math" panose="02040503050406030204" pitchFamily="18" charset="0"/>
+                            </a:rPr>
+                          </m:ctrlPr>
+                        </m:sSubPr>
+                        <m:e>
+                          <m:r>
+                            <a:rPr lang="ko-KR" altLang="en-US" sz="2000" i="1">
+                              <a:latin typeface="Cambria Math" panose="02040503050406030204" pitchFamily="18" charset="0"/>
+                            </a:rPr>
+                            <m:t>𝜔</m:t>
+                          </m:r>
+                        </m:e>
+                        <m:sub>
+                          <m:r>
+                            <a:rPr lang="ko-KR" altLang="en-US" sz="2000" i="0">
+                              <a:latin typeface="Cambria Math" panose="02040503050406030204" pitchFamily="18" charset="0"/>
+                            </a:rPr>
+                            <m:t>1</m:t>
+                          </m:r>
+                        </m:sub>
+                      </m:sSub>
+                      <m:r>
+                        <a:rPr lang="ko-KR" altLang="en-US" sz="2000" i="1">
+                          <a:latin typeface="Cambria Math" panose="02040503050406030204" pitchFamily="18" charset="0"/>
+                        </a:rPr>
+                        <m:t>𝑥</m:t>
+                      </m:r>
+                      <m:r>
+                        <a:rPr lang="ko-KR" altLang="en-US" sz="2000" i="0">
+                          <a:latin typeface="Cambria Math" panose="02040503050406030204" pitchFamily="18" charset="0"/>
+                        </a:rPr>
+                        <m:t>+</m:t>
+                      </m:r>
+                      <m:sSub>
+                        <m:sSubPr>
+                          <m:ctrlPr>
+                            <a:rPr lang="ko-KR" altLang="en-US" sz="2000" i="1">
+                              <a:latin typeface="Cambria Math" panose="02040503050406030204" pitchFamily="18" charset="0"/>
+                            </a:rPr>
+                          </m:ctrlPr>
+                        </m:sSubPr>
+                        <m:e>
+                          <m:r>
+                            <a:rPr lang="ko-KR" altLang="en-US" sz="2000" i="1">
+                              <a:latin typeface="Cambria Math" panose="02040503050406030204" pitchFamily="18" charset="0"/>
+                            </a:rPr>
+                            <m:t>𝜔</m:t>
+                          </m:r>
+                        </m:e>
+                        <m:sub>
+                          <m:r>
+                            <a:rPr lang="ko-KR" altLang="en-US" sz="2000" i="0">
+                              <a:latin typeface="Cambria Math" panose="02040503050406030204" pitchFamily="18" charset="0"/>
+                            </a:rPr>
+                            <m:t>0</m:t>
+                          </m:r>
+                        </m:sub>
+                      </m:sSub>
+                    </m:oMath>
+                  </m:oMathPara>
+                </a14:m>
+                <a:endParaRPr lang="ko-KR" altLang="en-US" sz="2000" dirty="0"/>
+              </a:p>
+            </p:txBody>
+          </p:sp>
+        </mc:Choice>
+        <mc:Fallback>
+          <p:sp>
+            <p:nvSpPr>
+              <p:cNvPr id="2" name="TextBox 1">
+                <a:extLst>
+                  <a:ext uri="{FF2B5EF4-FFF2-40B4-BE49-F238E27FC236}">
+                    <a16:creationId xmlns:a16="http://schemas.microsoft.com/office/drawing/2014/main" id="{0C85B13A-980C-20B1-9604-29C6E314AF92}"/>
+                  </a:ext>
+                </a:extLst>
+              </p:cNvPr>
+              <p:cNvSpPr txBox="1">
+                <a:spLocks noRot="1" noChangeAspect="1" noMove="1" noResize="1" noEditPoints="1" noAdjustHandles="1" noChangeArrowheads="1" noChangeShapeType="1" noTextEdit="1"/>
+              </p:cNvSpPr>
+              <p:nvPr/>
+            </p:nvSpPr>
+            <p:spPr>
+              <a:xfrm>
+                <a:off x="8983829" y="3705614"/>
+                <a:ext cx="1609608" cy="307777"/>
+              </a:xfrm>
+              <a:prstGeom prst="rect">
+                <a:avLst/>
+              </a:prstGeom>
+              <a:blipFill>
+                <a:blip r:embed="rId4"/>
+                <a:stretch>
+                  <a:fillRect l="-3030" b="-30000"/>
+                </a:stretch>
+              </a:blipFill>
+            </p:spPr>
+            <p:txBody>
+              <a:bodyPr/>
+              <a:lstStyle/>
+              <a:p>
+                <a:r>
+                  <a:rPr lang="ko-KR" altLang="en-US">
+                    <a:noFill/>
+                  </a:rPr>
+                  <a:t> </a:t>
+                </a:r>
+              </a:p>
+            </p:txBody>
+          </p:sp>
+        </mc:Fallback>
+      </mc:AlternateContent>
+    </p:spTree>
+    <p:extLst>
+      <p:ext uri="{BB962C8B-B14F-4D97-AF65-F5344CB8AC3E}">
+        <p14:creationId xmlns:p14="http://schemas.microsoft.com/office/powerpoint/2010/main" val="2930280559"/>
+      </p:ext>
+    </p:extLst>
+  </p:cSld>
+  <p:clrMapOvr>
+    <a:masterClrMapping/>
+  </p:clrMapOvr>
+</p:sld>
+</file>
+
+<file path=ppt/slides/slide19.xml><?xml version="1.0" encoding="utf-8"?>
+<p:sld xmlns:a="http://schemas.openxmlformats.org/drawingml/2006/main" xmlns:r="http://schemas.openxmlformats.org/officeDocument/2006/relationships" xmlns:p="http://schemas.openxmlformats.org/presentationml/2006/main">
+  <p:cSld>
+    <p:spTree>
+      <p:nvGrpSpPr>
+        <p:cNvPr id="1" name="">
+          <a:extLst>
+            <a:ext uri="{FF2B5EF4-FFF2-40B4-BE49-F238E27FC236}">
+              <a16:creationId xmlns:a16="http://schemas.microsoft.com/office/drawing/2014/main" id="{7A54AD0B-D159-4091-49EC-27F737FE46CC}"/>
+            </a:ext>
+          </a:extLst>
+        </p:cNvPr>
+        <p:cNvGrpSpPr/>
+        <p:nvPr/>
+      </p:nvGrpSpPr>
+      <p:grpSpPr>
+        <a:xfrm>
+          <a:off x="0" y="0"/>
+          <a:ext cx="0" cy="0"/>
+          <a:chOff x="0" y="0"/>
+          <a:chExt cx="0" cy="0"/>
+        </a:xfrm>
+      </p:grpSpPr>
+      <p:sp>
+        <p:nvSpPr>
+          <p:cNvPr id="4" name="슬라이드 번호 개체 틀 3">
+            <a:extLst>
+              <a:ext uri="{FF2B5EF4-FFF2-40B4-BE49-F238E27FC236}">
+                <a16:creationId xmlns:a16="http://schemas.microsoft.com/office/drawing/2014/main" id="{A6486A0B-665C-CEC3-0D43-C3E7DC3CA5F9}"/>
+              </a:ext>
+            </a:extLst>
+          </p:cNvPr>
+          <p:cNvSpPr>
+            <a:spLocks noGrp="1"/>
+          </p:cNvSpPr>
+          <p:nvPr>
+            <p:ph type="sldNum" sz="quarter" idx="12"/>
+          </p:nvPr>
+        </p:nvSpPr>
+        <p:spPr>
+          <a:xfrm>
+            <a:off x="10514011" y="6036261"/>
+            <a:ext cx="753545" cy="365125"/>
+          </a:xfrm>
+        </p:spPr>
+        <p:txBody>
+          <a:bodyPr/>
+          <a:lstStyle/>
+          <a:p>
+            <a:fld id="{D57F1E4F-1CFF-5643-939E-217C01CDF565}" type="slidenum">
+              <a:rPr lang="en-US" smtClean="0"/>
+              <a:pPr/>
+              <a:t>19</a:t>
+            </a:fld>
+            <a:endParaRPr lang="en-US" dirty="0"/>
+          </a:p>
+        </p:txBody>
+      </p:sp>
+      <p:sp>
+        <p:nvSpPr>
+          <p:cNvPr id="3" name="제목 1">
+            <a:extLst>
+              <a:ext uri="{FF2B5EF4-FFF2-40B4-BE49-F238E27FC236}">
+                <a16:creationId xmlns:a16="http://schemas.microsoft.com/office/drawing/2014/main" id="{2071E021-E2DF-EBD1-4FAF-76C96CF4579D}"/>
+              </a:ext>
+            </a:extLst>
+          </p:cNvPr>
+          <p:cNvSpPr txBox="1">
+            <a:spLocks/>
+          </p:cNvSpPr>
+          <p:nvPr/>
+        </p:nvSpPr>
+        <p:spPr>
+          <a:xfrm>
+            <a:off x="475645" y="481983"/>
+            <a:ext cx="10353762" cy="766439"/>
+          </a:xfrm>
+          <a:prstGeom prst="rect">
+            <a:avLst/>
+          </a:prstGeom>
+        </p:spPr>
+        <p:txBody>
+          <a:bodyPr vert="horz" lIns="91440" tIns="45720" rIns="91440" bIns="45720" rtlCol="0" anchor="ctr">
+            <a:normAutofit/>
+          </a:bodyPr>
+          <a:lstStyle>
+            <a:lvl1pPr algn="ctr" defTabSz="914400" rtl="0" eaLnBrk="1" latinLnBrk="1" hangingPunct="1">
+              <a:lnSpc>
+                <a:spcPct val="90000"/>
+              </a:lnSpc>
+              <a:spcBef>
+                <a:spcPct val="0"/>
+              </a:spcBef>
+              <a:buNone/>
+              <a:defRPr sz="3200" kern="1200" cap="all" baseline="0">
+                <a:solidFill>
+                  <a:schemeClr val="tx1"/>
+                </a:solidFill>
+                <a:effectLst/>
+                <a:latin typeface="Batang" panose="02030600000101010101" pitchFamily="18" charset="-127"/>
+                <a:ea typeface="Batang" panose="02030600000101010101" pitchFamily="18" charset="-127"/>
+                <a:cs typeface="+mj-cs"/>
+              </a:defRPr>
+            </a:lvl1pPr>
+          </a:lstStyle>
+          <a:p>
+            <a:pPr algn="l">
+              <a:lnSpc>
+                <a:spcPct val="150000"/>
+              </a:lnSpc>
+            </a:pPr>
+            <a:r>
+              <a:rPr lang="en-US" altLang="ko-KR" sz="2800" cap="none" dirty="0">
+                <a:latin typeface="D2Coding" panose="020B0609020101020101" pitchFamily="49" charset="-127"/>
+                <a:ea typeface="D2Coding" panose="020B0609020101020101" pitchFamily="49" charset="-127"/>
+              </a:rPr>
+              <a:t>Regression</a:t>
+            </a:r>
+            <a:r>
+              <a:rPr lang="ko-KR" altLang="en-US" sz="2800" cap="none" dirty="0">
+                <a:latin typeface="D2Coding" panose="020B0609020101020101" pitchFamily="49" charset="-127"/>
+                <a:ea typeface="D2Coding" panose="020B0609020101020101" pitchFamily="49" charset="-127"/>
+              </a:rPr>
+              <a:t> </a:t>
+            </a:r>
+            <a:r>
+              <a:rPr lang="en-US" altLang="ko-KR" sz="2800" cap="none" dirty="0">
+                <a:latin typeface="D2Coding" panose="020B0609020101020101" pitchFamily="49" charset="-127"/>
+                <a:ea typeface="D2Coding" panose="020B0609020101020101" pitchFamily="49" charset="-127"/>
+              </a:rPr>
+              <a:t>Model</a:t>
+            </a:r>
+          </a:p>
+        </p:txBody>
+      </p:sp>
+      <p:pic>
+        <p:nvPicPr>
+          <p:cNvPr id="11268" name="Picture 4">
+            <a:extLst>
+              <a:ext uri="{FF2B5EF4-FFF2-40B4-BE49-F238E27FC236}">
+                <a16:creationId xmlns:a16="http://schemas.microsoft.com/office/drawing/2014/main" id="{84072C57-E3BF-AF4F-0EAA-DD08A2FD9913}"/>
+              </a:ext>
+            </a:extLst>
+          </p:cNvPr>
+          <p:cNvPicPr>
+            <a:picLocks noChangeAspect="1" noChangeArrowheads="1"/>
+          </p:cNvPicPr>
+          <p:nvPr/>
+        </p:nvPicPr>
+        <p:blipFill>
+          <a:blip r:embed="rId2">
+            <a:extLst>
+              <a:ext uri="{28A0092B-C50C-407E-A947-70E740481C1C}">
+                <a14:useLocalDpi xmlns:a14="http://schemas.microsoft.com/office/drawing/2010/main" val="0"/>
+              </a:ext>
+            </a:extLst>
+          </a:blip>
+          <a:srcRect/>
+          <a:stretch>
+            <a:fillRect/>
+          </a:stretch>
+        </p:blipFill>
+        <p:spPr bwMode="auto">
+          <a:xfrm>
+            <a:off x="4581525" y="2476224"/>
+            <a:ext cx="6005158" cy="3600726"/>
+          </a:xfrm>
+          <a:prstGeom prst="rect">
+            <a:avLst/>
+          </a:prstGeom>
+          <a:noFill/>
+          <a:extLst>
+            <a:ext uri="{909E8E84-426E-40DD-AFC4-6F175D3DCCD1}">
+              <a14:hiddenFill xmlns:a14="http://schemas.microsoft.com/office/drawing/2010/main">
+                <a:solidFill>
+                  <a:srgbClr val="FFFFFF"/>
+                </a:solidFill>
+              </a14:hiddenFill>
+            </a:ext>
+          </a:extLst>
+        </p:spPr>
+      </p:pic>
+      <p:sp>
+        <p:nvSpPr>
+          <p:cNvPr id="2" name="TextBox 1">
+            <a:extLst>
+              <a:ext uri="{FF2B5EF4-FFF2-40B4-BE49-F238E27FC236}">
+                <a16:creationId xmlns:a16="http://schemas.microsoft.com/office/drawing/2014/main" id="{E1AAB137-19F1-794F-55A6-CF165E5433F9}"/>
+              </a:ext>
+            </a:extLst>
+          </p:cNvPr>
+          <p:cNvSpPr txBox="1"/>
+          <p:nvPr/>
+        </p:nvSpPr>
+        <p:spPr>
+          <a:xfrm>
+            <a:off x="475645" y="1248422"/>
+            <a:ext cx="11240710" cy="880819"/>
+          </a:xfrm>
+          <a:prstGeom prst="rect">
+            <a:avLst/>
+          </a:prstGeom>
+          <a:noFill/>
+        </p:spPr>
+        <p:txBody>
+          <a:bodyPr wrap="square" rtlCol="0">
+            <a:spAutoFit/>
+          </a:bodyPr>
+          <a:lstStyle/>
+          <a:p>
+            <a:pPr>
+              <a:lnSpc>
+                <a:spcPct val="150000"/>
+              </a:lnSpc>
+            </a:pPr>
+            <a:r>
+              <a:rPr lang="ko-KR" altLang="en-US" dirty="0">
+                <a:latin typeface="D2Coding" panose="020B0609020101020101" pitchFamily="49" charset="-127"/>
+                <a:ea typeface="D2Coding" panose="020B0609020101020101" pitchFamily="49" charset="-127"/>
+              </a:rPr>
+              <a:t>키</a:t>
+            </a:r>
+            <a:r>
+              <a:rPr lang="en-US" altLang="ko-KR" dirty="0">
+                <a:latin typeface="D2Coding" panose="020B0609020101020101" pitchFamily="49" charset="-127"/>
+                <a:ea typeface="D2Coding" panose="020B0609020101020101" pitchFamily="49" charset="-127"/>
+              </a:rPr>
+              <a:t>(Height)</a:t>
+            </a:r>
+            <a:r>
+              <a:rPr lang="ko-KR" altLang="en-US" dirty="0">
+                <a:latin typeface="D2Coding" panose="020B0609020101020101" pitchFamily="49" charset="-127"/>
+                <a:ea typeface="D2Coding" panose="020B0609020101020101" pitchFamily="49" charset="-127"/>
+              </a:rPr>
+              <a:t>를 입력변수로 하고 성별</a:t>
+            </a:r>
+            <a:r>
+              <a:rPr lang="en-US" altLang="ko-KR" dirty="0">
+                <a:latin typeface="D2Coding" panose="020B0609020101020101" pitchFamily="49" charset="-127"/>
+                <a:ea typeface="D2Coding" panose="020B0609020101020101" pitchFamily="49" charset="-127"/>
+              </a:rPr>
+              <a:t>(Gender)</a:t>
+            </a:r>
+            <a:r>
+              <a:rPr lang="ko-KR" altLang="en-US" dirty="0">
+                <a:latin typeface="D2Coding" panose="020B0609020101020101" pitchFamily="49" charset="-127"/>
+                <a:ea typeface="D2Coding" panose="020B0609020101020101" pitchFamily="49" charset="-127"/>
+              </a:rPr>
+              <a:t>를 출력변수로 하여 로지스틱 단순회귀 모델을 적용하고</a:t>
+            </a:r>
+            <a:r>
+              <a:rPr lang="en-US" altLang="ko-KR" dirty="0">
+                <a:latin typeface="D2Coding" panose="020B0609020101020101" pitchFamily="49" charset="-127"/>
+                <a:ea typeface="D2Coding" panose="020B0609020101020101" pitchFamily="49" charset="-127"/>
+              </a:rPr>
+              <a:t>(</a:t>
+            </a:r>
+            <a:r>
+              <a:rPr lang="ko-KR" altLang="en-US" dirty="0">
+                <a:latin typeface="D2Coding" panose="020B0609020101020101" pitchFamily="49" charset="-127"/>
+                <a:ea typeface="D2Coding" panose="020B0609020101020101" pitchFamily="49" charset="-127"/>
+              </a:rPr>
+              <a:t>구글시트</a:t>
+            </a:r>
+            <a:r>
+              <a:rPr lang="en-US" altLang="ko-KR" dirty="0">
+                <a:latin typeface="D2Coding" panose="020B0609020101020101" pitchFamily="49" charset="-127"/>
+                <a:ea typeface="D2Coding" panose="020B0609020101020101" pitchFamily="49" charset="-127"/>
+              </a:rPr>
+              <a:t> &amp; </a:t>
+            </a:r>
+            <a:r>
+              <a:rPr lang="ko-KR" altLang="en-US" dirty="0">
+                <a:latin typeface="D2Coding" panose="020B0609020101020101" pitchFamily="49" charset="-127"/>
+                <a:ea typeface="D2Coding" panose="020B0609020101020101" pitchFamily="49" charset="-127"/>
+              </a:rPr>
+              <a:t>파이썬</a:t>
+            </a:r>
+            <a:r>
+              <a:rPr lang="en-US" altLang="ko-KR" dirty="0">
+                <a:latin typeface="D2Coding" panose="020B0609020101020101" pitchFamily="49" charset="-127"/>
+                <a:ea typeface="D2Coding" panose="020B0609020101020101" pitchFamily="49" charset="-127"/>
+              </a:rPr>
+              <a:t>)</a:t>
+            </a:r>
+            <a:r>
+              <a:rPr lang="ko-KR" altLang="en-US" dirty="0">
+                <a:latin typeface="D2Coding" panose="020B0609020101020101" pitchFamily="49" charset="-127"/>
+                <a:ea typeface="D2Coding" panose="020B0609020101020101" pitchFamily="49" charset="-127"/>
+              </a:rPr>
+              <a:t> 그 의미를 토론하자</a:t>
+            </a:r>
+          </a:p>
+        </p:txBody>
+      </p:sp>
+      <p:graphicFrame>
+        <p:nvGraphicFramePr>
+          <p:cNvPr id="5" name="표 4">
+            <a:extLst>
+              <a:ext uri="{FF2B5EF4-FFF2-40B4-BE49-F238E27FC236}">
+                <a16:creationId xmlns:a16="http://schemas.microsoft.com/office/drawing/2014/main" id="{C4BDA658-90EF-0817-D2D1-2F062E4F5908}"/>
+              </a:ext>
+            </a:extLst>
+          </p:cNvPr>
+          <p:cNvGraphicFramePr>
+            <a:graphicFrameLocks noGrp="1"/>
+          </p:cNvGraphicFramePr>
+          <p:nvPr>
+            <p:extLst>
+              <p:ext uri="{D42A27DB-BD31-4B8C-83A1-F6EECF244321}">
+                <p14:modId xmlns:p14="http://schemas.microsoft.com/office/powerpoint/2010/main" val="2790635577"/>
+              </p:ext>
+            </p:extLst>
+          </p:nvPr>
+        </p:nvGraphicFramePr>
+        <p:xfrm>
+          <a:off x="1192660" y="2476224"/>
+          <a:ext cx="2007394" cy="3036235"/>
+        </p:xfrm>
+        <a:graphic>
+          <a:graphicData uri="http://schemas.openxmlformats.org/drawingml/2006/table">
+            <a:tbl>
+              <a:tblPr>
+                <a:tableStyleId>{5940675A-B579-460E-94D1-54222C63F5DA}</a:tableStyleId>
+              </a:tblPr>
+              <a:tblGrid>
+                <a:gridCol w="1003697">
+                  <a:extLst>
+                    <a:ext uri="{9D8B030D-6E8A-4147-A177-3AD203B41FA5}">
+                      <a16:colId xmlns:a16="http://schemas.microsoft.com/office/drawing/2014/main" val="729620001"/>
+                    </a:ext>
+                  </a:extLst>
+                </a:gridCol>
+                <a:gridCol w="1003697">
+                  <a:extLst>
+                    <a:ext uri="{9D8B030D-6E8A-4147-A177-3AD203B41FA5}">
+                      <a16:colId xmlns:a16="http://schemas.microsoft.com/office/drawing/2014/main" val="1387980696"/>
+                    </a:ext>
+                  </a:extLst>
+                </a:gridCol>
+              </a:tblGrid>
+              <a:tr h="579955">
+                <a:tc>
+                  <a:txBody>
+                    <a:bodyPr/>
+                    <a:lstStyle/>
+                    <a:p>
+                      <a:pPr algn="ctr" rtl="0" fontAlgn="b">
+                        <a:buNone/>
+                      </a:pPr>
+                      <a:r>
+                        <a:rPr lang="en-US" sz="1600" dirty="0">
+                          <a:effectLst/>
+                        </a:rPr>
+                        <a:t>Person</a:t>
+                      </a:r>
+                      <a:endParaRPr lang="en-US" sz="1600" dirty="0">
+                        <a:effectLst/>
+                        <a:latin typeface="D2Coding" panose="020B0609020101020101" pitchFamily="49" charset="-127"/>
+                        <a:ea typeface="D2Coding" panose="020B0609020101020101" pitchFamily="49" charset="-127"/>
+                      </a:endParaRPr>
+                    </a:p>
+                  </a:txBody>
+                  <a:tcPr marL="22860" marR="22860" marT="15240" marB="15240" anchor="b">
+                    <a:solidFill>
+                      <a:schemeClr val="accent6">
+                        <a:lumMod val="20000"/>
+                        <a:lumOff val="80000"/>
+                      </a:schemeClr>
+                    </a:solidFill>
+                  </a:tcPr>
+                </a:tc>
+                <a:tc>
+                  <a:txBody>
+                    <a:bodyPr/>
+                    <a:lstStyle/>
+                    <a:p>
+                      <a:pPr algn="ctr" rtl="0" fontAlgn="b">
+                        <a:buNone/>
+                      </a:pPr>
+                      <a:r>
+                        <a:rPr lang="en-US" sz="1600" dirty="0">
+                          <a:effectLst/>
+                        </a:rPr>
+                        <a:t>Height</a:t>
+                      </a:r>
+                    </a:p>
+                    <a:p>
+                      <a:pPr algn="ctr" rtl="0" fontAlgn="b">
+                        <a:buNone/>
+                      </a:pPr>
+                      <a:r>
+                        <a:rPr lang="en-US" sz="1600" dirty="0">
+                          <a:effectLst/>
+                        </a:rPr>
+                        <a:t>(feet)</a:t>
+                      </a:r>
+                      <a:endParaRPr lang="en-US" sz="1600" dirty="0">
+                        <a:effectLst/>
+                        <a:latin typeface="D2Coding" panose="020B0609020101020101" pitchFamily="49" charset="-127"/>
+                        <a:ea typeface="D2Coding" panose="020B0609020101020101" pitchFamily="49" charset="-127"/>
+                      </a:endParaRPr>
+                    </a:p>
+                  </a:txBody>
+                  <a:tcPr marL="22860" marR="22860" marT="15240" marB="15240" anchor="b">
+                    <a:solidFill>
+                      <a:schemeClr val="accent5">
+                        <a:lumMod val="20000"/>
+                        <a:lumOff val="80000"/>
+                      </a:schemeClr>
+                    </a:solidFill>
+                  </a:tcPr>
+                </a:tc>
+                <a:extLst>
+                  <a:ext uri="{0D108BD9-81ED-4DB2-BD59-A6C34878D82A}">
+                    <a16:rowId xmlns:a16="http://schemas.microsoft.com/office/drawing/2014/main" val="204437853"/>
+                  </a:ext>
+                </a:extLst>
+              </a:tr>
+              <a:tr h="307035">
+                <a:tc>
+                  <a:txBody>
+                    <a:bodyPr/>
+                    <a:lstStyle/>
+                    <a:p>
+                      <a:pPr algn="ctr" rtl="0" fontAlgn="b">
+                        <a:buNone/>
+                      </a:pPr>
+                      <a:r>
+                        <a:rPr lang="en-US" sz="1600" dirty="0">
+                          <a:effectLst/>
+                        </a:rPr>
+                        <a:t>male</a:t>
+                      </a:r>
+                      <a:endParaRPr lang="en-US" sz="1600" dirty="0">
+                        <a:effectLst/>
+                        <a:latin typeface="D2Coding" panose="020B0609020101020101" pitchFamily="49" charset="-127"/>
+                        <a:ea typeface="D2Coding" panose="020B0609020101020101" pitchFamily="49" charset="-127"/>
+                      </a:endParaRPr>
+                    </a:p>
+                  </a:txBody>
+                  <a:tcPr marL="22860" marR="22860" marT="15240" marB="15240" anchor="b">
+                    <a:solidFill>
+                      <a:schemeClr val="accent6">
+                        <a:lumMod val="20000"/>
+                        <a:lumOff val="80000"/>
+                      </a:schemeClr>
+                    </a:solidFill>
+                  </a:tcPr>
+                </a:tc>
+                <a:tc>
+                  <a:txBody>
+                    <a:bodyPr/>
+                    <a:lstStyle/>
+                    <a:p>
+                      <a:pPr algn="ctr" rtl="0" fontAlgn="b">
+                        <a:buNone/>
+                      </a:pPr>
+                      <a:r>
+                        <a:rPr lang="en-US" altLang="ko-KR" sz="1600" dirty="0">
+                          <a:effectLst/>
+                        </a:rPr>
+                        <a:t>6.00</a:t>
+                      </a:r>
+                      <a:endParaRPr lang="en-US" altLang="ko-KR" sz="1600" dirty="0">
+                        <a:effectLst/>
+                        <a:latin typeface="D2Coding" panose="020B0609020101020101" pitchFamily="49" charset="-127"/>
+                        <a:ea typeface="D2Coding" panose="020B0609020101020101" pitchFamily="49" charset="-127"/>
+                      </a:endParaRPr>
+                    </a:p>
+                  </a:txBody>
+                  <a:tcPr marL="22860" marR="22860" marT="15240" marB="15240" anchor="b">
+                    <a:solidFill>
+                      <a:schemeClr val="accent5">
+                        <a:lumMod val="20000"/>
+                        <a:lumOff val="80000"/>
+                      </a:schemeClr>
+                    </a:solidFill>
+                  </a:tcPr>
+                </a:tc>
+                <a:extLst>
+                  <a:ext uri="{0D108BD9-81ED-4DB2-BD59-A6C34878D82A}">
+                    <a16:rowId xmlns:a16="http://schemas.microsoft.com/office/drawing/2014/main" val="2327080991"/>
+                  </a:ext>
+                </a:extLst>
+              </a:tr>
+              <a:tr h="307035">
+                <a:tc>
+                  <a:txBody>
+                    <a:bodyPr/>
+                    <a:lstStyle/>
+                    <a:p>
+                      <a:pPr algn="ctr" rtl="0" fontAlgn="b">
+                        <a:buNone/>
+                      </a:pPr>
+                      <a:r>
+                        <a:rPr lang="en-US" sz="1600" dirty="0">
+                          <a:effectLst/>
+                        </a:rPr>
+                        <a:t>male</a:t>
+                      </a:r>
+                      <a:endParaRPr lang="en-US" sz="1600" dirty="0">
+                        <a:effectLst/>
+                        <a:latin typeface="D2Coding" panose="020B0609020101020101" pitchFamily="49" charset="-127"/>
+                        <a:ea typeface="D2Coding" panose="020B0609020101020101" pitchFamily="49" charset="-127"/>
+                      </a:endParaRPr>
+                    </a:p>
+                  </a:txBody>
+                  <a:tcPr marL="22860" marR="22860" marT="15240" marB="15240" anchor="b">
+                    <a:solidFill>
+                      <a:schemeClr val="accent6">
+                        <a:lumMod val="20000"/>
+                        <a:lumOff val="80000"/>
+                      </a:schemeClr>
+                    </a:solidFill>
+                  </a:tcPr>
+                </a:tc>
+                <a:tc>
+                  <a:txBody>
+                    <a:bodyPr/>
+                    <a:lstStyle/>
+                    <a:p>
+                      <a:pPr algn="ctr" rtl="0" fontAlgn="b">
+                        <a:buNone/>
+                      </a:pPr>
+                      <a:r>
+                        <a:rPr lang="en-US" altLang="ko-KR" sz="1600" dirty="0">
+                          <a:effectLst/>
+                        </a:rPr>
+                        <a:t>5.92</a:t>
+                      </a:r>
+                      <a:endParaRPr lang="en-US" altLang="ko-KR" sz="1600" dirty="0">
+                        <a:effectLst/>
+                        <a:latin typeface="D2Coding" panose="020B0609020101020101" pitchFamily="49" charset="-127"/>
+                        <a:ea typeface="D2Coding" panose="020B0609020101020101" pitchFamily="49" charset="-127"/>
+                      </a:endParaRPr>
+                    </a:p>
+                  </a:txBody>
+                  <a:tcPr marL="22860" marR="22860" marT="15240" marB="15240" anchor="b">
+                    <a:solidFill>
+                      <a:schemeClr val="accent5">
+                        <a:lumMod val="20000"/>
+                        <a:lumOff val="80000"/>
+                      </a:schemeClr>
+                    </a:solidFill>
+                  </a:tcPr>
+                </a:tc>
+                <a:extLst>
+                  <a:ext uri="{0D108BD9-81ED-4DB2-BD59-A6C34878D82A}">
+                    <a16:rowId xmlns:a16="http://schemas.microsoft.com/office/drawing/2014/main" val="1530259819"/>
+                  </a:ext>
+                </a:extLst>
+              </a:tr>
+              <a:tr h="307035">
+                <a:tc>
+                  <a:txBody>
+                    <a:bodyPr/>
+                    <a:lstStyle/>
+                    <a:p>
+                      <a:pPr algn="ctr" rtl="0" fontAlgn="b">
+                        <a:buNone/>
+                      </a:pPr>
+                      <a:r>
+                        <a:rPr lang="en-US" sz="1600">
+                          <a:effectLst/>
+                        </a:rPr>
+                        <a:t>male</a:t>
+                      </a:r>
+                      <a:endParaRPr lang="en-US" sz="1600">
+                        <a:effectLst/>
+                        <a:latin typeface="D2Coding" panose="020B0609020101020101" pitchFamily="49" charset="-127"/>
+                        <a:ea typeface="D2Coding" panose="020B0609020101020101" pitchFamily="49" charset="-127"/>
+                      </a:endParaRPr>
+                    </a:p>
+                  </a:txBody>
+                  <a:tcPr marL="22860" marR="22860" marT="15240" marB="15240" anchor="b">
+                    <a:solidFill>
+                      <a:schemeClr val="accent6">
+                        <a:lumMod val="20000"/>
+                        <a:lumOff val="80000"/>
+                      </a:schemeClr>
+                    </a:solidFill>
+                  </a:tcPr>
+                </a:tc>
+                <a:tc>
+                  <a:txBody>
+                    <a:bodyPr/>
+                    <a:lstStyle/>
+                    <a:p>
+                      <a:pPr algn="ctr" rtl="0" fontAlgn="b">
+                        <a:buNone/>
+                      </a:pPr>
+                      <a:r>
+                        <a:rPr lang="en-US" altLang="ko-KR" sz="1600" dirty="0">
+                          <a:effectLst/>
+                        </a:rPr>
+                        <a:t>5.58</a:t>
+                      </a:r>
+                      <a:endParaRPr lang="en-US" altLang="ko-KR" sz="1600" dirty="0">
+                        <a:effectLst/>
+                        <a:latin typeface="D2Coding" panose="020B0609020101020101" pitchFamily="49" charset="-127"/>
+                        <a:ea typeface="D2Coding" panose="020B0609020101020101" pitchFamily="49" charset="-127"/>
+                      </a:endParaRPr>
+                    </a:p>
+                  </a:txBody>
+                  <a:tcPr marL="22860" marR="22860" marT="15240" marB="15240" anchor="b">
+                    <a:solidFill>
+                      <a:schemeClr val="accent5">
+                        <a:lumMod val="20000"/>
+                        <a:lumOff val="80000"/>
+                      </a:schemeClr>
+                    </a:solidFill>
+                  </a:tcPr>
+                </a:tc>
+                <a:extLst>
+                  <a:ext uri="{0D108BD9-81ED-4DB2-BD59-A6C34878D82A}">
+                    <a16:rowId xmlns:a16="http://schemas.microsoft.com/office/drawing/2014/main" val="2235397511"/>
+                  </a:ext>
+                </a:extLst>
+              </a:tr>
+              <a:tr h="307035">
+                <a:tc>
+                  <a:txBody>
+                    <a:bodyPr/>
+                    <a:lstStyle/>
+                    <a:p>
+                      <a:pPr algn="ctr" rtl="0" fontAlgn="b">
+                        <a:buNone/>
+                      </a:pPr>
+                      <a:r>
+                        <a:rPr lang="en-US" sz="1600">
+                          <a:effectLst/>
+                        </a:rPr>
+                        <a:t>male</a:t>
+                      </a:r>
+                      <a:endParaRPr lang="en-US" sz="1600">
+                        <a:effectLst/>
+                        <a:latin typeface="D2Coding" panose="020B0609020101020101" pitchFamily="49" charset="-127"/>
+                        <a:ea typeface="D2Coding" panose="020B0609020101020101" pitchFamily="49" charset="-127"/>
+                      </a:endParaRPr>
+                    </a:p>
+                  </a:txBody>
+                  <a:tcPr marL="22860" marR="22860" marT="15240" marB="15240" anchor="b">
+                    <a:solidFill>
+                      <a:schemeClr val="accent6">
+                        <a:lumMod val="20000"/>
+                        <a:lumOff val="80000"/>
+                      </a:schemeClr>
+                    </a:solidFill>
+                  </a:tcPr>
+                </a:tc>
+                <a:tc>
+                  <a:txBody>
+                    <a:bodyPr/>
+                    <a:lstStyle/>
+                    <a:p>
+                      <a:pPr algn="ctr" rtl="0" fontAlgn="b">
+                        <a:buNone/>
+                      </a:pPr>
+                      <a:r>
+                        <a:rPr lang="en-US" altLang="ko-KR" sz="1600" dirty="0">
+                          <a:effectLst/>
+                        </a:rPr>
+                        <a:t>5.92</a:t>
+                      </a:r>
+                      <a:endParaRPr lang="en-US" altLang="ko-KR" sz="1600" dirty="0">
+                        <a:effectLst/>
+                        <a:latin typeface="D2Coding" panose="020B0609020101020101" pitchFamily="49" charset="-127"/>
+                        <a:ea typeface="D2Coding" panose="020B0609020101020101" pitchFamily="49" charset="-127"/>
+                      </a:endParaRPr>
+                    </a:p>
+                  </a:txBody>
+                  <a:tcPr marL="22860" marR="22860" marT="15240" marB="15240" anchor="b">
+                    <a:solidFill>
+                      <a:schemeClr val="accent5">
+                        <a:lumMod val="20000"/>
+                        <a:lumOff val="80000"/>
+                      </a:schemeClr>
+                    </a:solidFill>
+                  </a:tcPr>
+                </a:tc>
+                <a:extLst>
+                  <a:ext uri="{0D108BD9-81ED-4DB2-BD59-A6C34878D82A}">
+                    <a16:rowId xmlns:a16="http://schemas.microsoft.com/office/drawing/2014/main" val="3297033087"/>
+                  </a:ext>
+                </a:extLst>
+              </a:tr>
+              <a:tr h="307035">
+                <a:tc>
+                  <a:txBody>
+                    <a:bodyPr/>
+                    <a:lstStyle/>
+                    <a:p>
+                      <a:pPr algn="ctr" rtl="0" fontAlgn="b">
+                        <a:buNone/>
+                      </a:pPr>
+                      <a:r>
+                        <a:rPr lang="en-US" sz="1600" dirty="0">
+                          <a:effectLst/>
+                        </a:rPr>
+                        <a:t>female</a:t>
+                      </a:r>
+                      <a:endParaRPr lang="en-US" sz="1600" dirty="0">
+                        <a:effectLst/>
+                        <a:latin typeface="D2Coding" panose="020B0609020101020101" pitchFamily="49" charset="-127"/>
+                        <a:ea typeface="D2Coding" panose="020B0609020101020101" pitchFamily="49" charset="-127"/>
+                      </a:endParaRPr>
+                    </a:p>
+                  </a:txBody>
+                  <a:tcPr marL="22860" marR="22860" marT="15240" marB="15240" anchor="b">
+                    <a:solidFill>
+                      <a:schemeClr val="accent6">
+                        <a:lumMod val="20000"/>
+                        <a:lumOff val="80000"/>
+                      </a:schemeClr>
+                    </a:solidFill>
+                  </a:tcPr>
+                </a:tc>
+                <a:tc>
+                  <a:txBody>
+                    <a:bodyPr/>
+                    <a:lstStyle/>
+                    <a:p>
+                      <a:pPr algn="ctr" rtl="0" fontAlgn="b">
+                        <a:buNone/>
+                      </a:pPr>
+                      <a:r>
+                        <a:rPr lang="en-US" altLang="ko-KR" sz="1600" dirty="0">
+                          <a:effectLst/>
+                        </a:rPr>
+                        <a:t>5.00</a:t>
+                      </a:r>
+                      <a:endParaRPr lang="en-US" altLang="ko-KR" sz="1600" dirty="0">
+                        <a:effectLst/>
+                        <a:latin typeface="D2Coding" panose="020B0609020101020101" pitchFamily="49" charset="-127"/>
+                        <a:ea typeface="D2Coding" panose="020B0609020101020101" pitchFamily="49" charset="-127"/>
+                      </a:endParaRPr>
+                    </a:p>
+                  </a:txBody>
+                  <a:tcPr marL="22860" marR="22860" marT="15240" marB="15240" anchor="b">
+                    <a:solidFill>
+                      <a:schemeClr val="accent5">
+                        <a:lumMod val="20000"/>
+                        <a:lumOff val="80000"/>
+                      </a:schemeClr>
+                    </a:solidFill>
+                  </a:tcPr>
+                </a:tc>
+                <a:extLst>
+                  <a:ext uri="{0D108BD9-81ED-4DB2-BD59-A6C34878D82A}">
+                    <a16:rowId xmlns:a16="http://schemas.microsoft.com/office/drawing/2014/main" val="1914524656"/>
+                  </a:ext>
+                </a:extLst>
+              </a:tr>
+              <a:tr h="307035">
+                <a:tc>
+                  <a:txBody>
+                    <a:bodyPr/>
+                    <a:lstStyle/>
+                    <a:p>
+                      <a:pPr algn="ctr" rtl="0" fontAlgn="b">
+                        <a:buNone/>
+                      </a:pPr>
+                      <a:r>
+                        <a:rPr lang="en-US" sz="1600" dirty="0">
+                          <a:effectLst/>
+                        </a:rPr>
+                        <a:t>female</a:t>
+                      </a:r>
+                      <a:endParaRPr lang="en-US" sz="1600" dirty="0">
+                        <a:effectLst/>
+                        <a:latin typeface="D2Coding" panose="020B0609020101020101" pitchFamily="49" charset="-127"/>
+                        <a:ea typeface="D2Coding" panose="020B0609020101020101" pitchFamily="49" charset="-127"/>
+                      </a:endParaRPr>
+                    </a:p>
+                  </a:txBody>
+                  <a:tcPr marL="22860" marR="22860" marT="15240" marB="15240" anchor="b">
+                    <a:solidFill>
+                      <a:schemeClr val="accent6">
+                        <a:lumMod val="20000"/>
+                        <a:lumOff val="80000"/>
+                      </a:schemeClr>
+                    </a:solidFill>
+                  </a:tcPr>
+                </a:tc>
+                <a:tc>
+                  <a:txBody>
+                    <a:bodyPr/>
+                    <a:lstStyle/>
+                    <a:p>
+                      <a:pPr algn="ctr" rtl="0" fontAlgn="b">
+                        <a:buNone/>
+                      </a:pPr>
+                      <a:r>
+                        <a:rPr lang="en-US" altLang="ko-KR" sz="1600" dirty="0">
+                          <a:effectLst/>
+                        </a:rPr>
+                        <a:t>5.50</a:t>
+                      </a:r>
+                      <a:endParaRPr lang="en-US" altLang="ko-KR" sz="1600" dirty="0">
+                        <a:effectLst/>
+                        <a:latin typeface="D2Coding" panose="020B0609020101020101" pitchFamily="49" charset="-127"/>
+                        <a:ea typeface="D2Coding" panose="020B0609020101020101" pitchFamily="49" charset="-127"/>
+                      </a:endParaRPr>
+                    </a:p>
+                  </a:txBody>
+                  <a:tcPr marL="22860" marR="22860" marT="15240" marB="15240" anchor="b">
+                    <a:solidFill>
+                      <a:schemeClr val="accent5">
+                        <a:lumMod val="20000"/>
+                        <a:lumOff val="80000"/>
+                      </a:schemeClr>
+                    </a:solidFill>
+                  </a:tcPr>
+                </a:tc>
+                <a:extLst>
+                  <a:ext uri="{0D108BD9-81ED-4DB2-BD59-A6C34878D82A}">
+                    <a16:rowId xmlns:a16="http://schemas.microsoft.com/office/drawing/2014/main" val="467656357"/>
+                  </a:ext>
+                </a:extLst>
+              </a:tr>
+              <a:tr h="307035">
+                <a:tc>
+                  <a:txBody>
+                    <a:bodyPr/>
+                    <a:lstStyle/>
+                    <a:p>
+                      <a:pPr algn="ctr" rtl="0" fontAlgn="b">
+                        <a:buNone/>
+                      </a:pPr>
+                      <a:r>
+                        <a:rPr lang="en-US" sz="1600" dirty="0">
+                          <a:effectLst/>
+                        </a:rPr>
+                        <a:t>female</a:t>
+                      </a:r>
+                      <a:endParaRPr lang="en-US" sz="1600" dirty="0">
+                        <a:effectLst/>
+                        <a:latin typeface="D2Coding" panose="020B0609020101020101" pitchFamily="49" charset="-127"/>
+                        <a:ea typeface="D2Coding" panose="020B0609020101020101" pitchFamily="49" charset="-127"/>
+                      </a:endParaRPr>
+                    </a:p>
+                  </a:txBody>
+                  <a:tcPr marL="22860" marR="22860" marT="15240" marB="15240" anchor="b">
+                    <a:solidFill>
+                      <a:schemeClr val="accent6">
+                        <a:lumMod val="20000"/>
+                        <a:lumOff val="80000"/>
+                      </a:schemeClr>
+                    </a:solidFill>
+                  </a:tcPr>
+                </a:tc>
+                <a:tc>
+                  <a:txBody>
+                    <a:bodyPr/>
+                    <a:lstStyle/>
+                    <a:p>
+                      <a:pPr algn="ctr" rtl="0" fontAlgn="b">
+                        <a:buNone/>
+                      </a:pPr>
+                      <a:r>
+                        <a:rPr lang="en-US" altLang="ko-KR" sz="1600" dirty="0">
+                          <a:effectLst/>
+                        </a:rPr>
+                        <a:t>5.42</a:t>
+                      </a:r>
+                      <a:endParaRPr lang="en-US" altLang="ko-KR" sz="1600" dirty="0">
+                        <a:effectLst/>
+                        <a:latin typeface="D2Coding" panose="020B0609020101020101" pitchFamily="49" charset="-127"/>
+                        <a:ea typeface="D2Coding" panose="020B0609020101020101" pitchFamily="49" charset="-127"/>
+                      </a:endParaRPr>
+                    </a:p>
+                  </a:txBody>
+                  <a:tcPr marL="22860" marR="22860" marT="15240" marB="15240" anchor="b">
+                    <a:solidFill>
+                      <a:schemeClr val="accent5">
+                        <a:lumMod val="20000"/>
+                        <a:lumOff val="80000"/>
+                      </a:schemeClr>
+                    </a:solidFill>
+                  </a:tcPr>
+                </a:tc>
+                <a:extLst>
+                  <a:ext uri="{0D108BD9-81ED-4DB2-BD59-A6C34878D82A}">
+                    <a16:rowId xmlns:a16="http://schemas.microsoft.com/office/drawing/2014/main" val="2887534912"/>
+                  </a:ext>
+                </a:extLst>
+              </a:tr>
+              <a:tr h="307035">
+                <a:tc>
+                  <a:txBody>
+                    <a:bodyPr/>
+                    <a:lstStyle/>
+                    <a:p>
+                      <a:pPr algn="ctr" rtl="0" fontAlgn="b">
+                        <a:buNone/>
+                      </a:pPr>
+                      <a:r>
+                        <a:rPr lang="en-US" sz="1600" dirty="0">
+                          <a:effectLst/>
+                        </a:rPr>
+                        <a:t>female</a:t>
+                      </a:r>
+                      <a:endParaRPr lang="en-US" sz="1600" dirty="0">
+                        <a:effectLst/>
+                        <a:latin typeface="D2Coding" panose="020B0609020101020101" pitchFamily="49" charset="-127"/>
+                        <a:ea typeface="D2Coding" panose="020B0609020101020101" pitchFamily="49" charset="-127"/>
+                      </a:endParaRPr>
+                    </a:p>
+                  </a:txBody>
+                  <a:tcPr marL="22860" marR="22860" marT="15240" marB="15240" anchor="b">
+                    <a:solidFill>
+                      <a:schemeClr val="accent6">
+                        <a:lumMod val="20000"/>
+                        <a:lumOff val="80000"/>
+                      </a:schemeClr>
+                    </a:solidFill>
+                  </a:tcPr>
+                </a:tc>
+                <a:tc>
+                  <a:txBody>
+                    <a:bodyPr/>
+                    <a:lstStyle/>
+                    <a:p>
+                      <a:pPr algn="ctr" rtl="0" fontAlgn="b">
+                        <a:buNone/>
+                      </a:pPr>
+                      <a:r>
+                        <a:rPr lang="en-US" altLang="ko-KR" sz="1600" dirty="0">
+                          <a:effectLst/>
+                        </a:rPr>
+                        <a:t>5.75</a:t>
+                      </a:r>
+                      <a:endParaRPr lang="en-US" altLang="ko-KR" sz="1600" dirty="0">
+                        <a:effectLst/>
+                        <a:latin typeface="D2Coding" panose="020B0609020101020101" pitchFamily="49" charset="-127"/>
+                        <a:ea typeface="D2Coding" panose="020B0609020101020101" pitchFamily="49" charset="-127"/>
+                      </a:endParaRPr>
+                    </a:p>
+                  </a:txBody>
+                  <a:tcPr marL="22860" marR="22860" marT="15240" marB="15240" anchor="b">
+                    <a:solidFill>
+                      <a:schemeClr val="accent5">
+                        <a:lumMod val="20000"/>
+                        <a:lumOff val="80000"/>
+                      </a:schemeClr>
+                    </a:solidFill>
+                  </a:tcPr>
+                </a:tc>
+                <a:extLst>
+                  <a:ext uri="{0D108BD9-81ED-4DB2-BD59-A6C34878D82A}">
+                    <a16:rowId xmlns:a16="http://schemas.microsoft.com/office/drawing/2014/main" val="1369158088"/>
+                  </a:ext>
+                </a:extLst>
+              </a:tr>
+            </a:tbl>
+          </a:graphicData>
+        </a:graphic>
+      </p:graphicFrame>
+      <mc:AlternateContent xmlns:mc="http://schemas.openxmlformats.org/markup-compatibility/2006">
+        <mc:Choice xmlns:a14="http://schemas.microsoft.com/office/drawing/2010/main" Requires="a14">
+          <p:sp>
+            <p:nvSpPr>
+              <p:cNvPr id="6" name="TextBox 5">
+                <a:extLst>
+                  <a:ext uri="{FF2B5EF4-FFF2-40B4-BE49-F238E27FC236}">
+                    <a16:creationId xmlns:a16="http://schemas.microsoft.com/office/drawing/2014/main" id="{DFC8F8C4-C96E-F2F3-3FDB-EE8CFEC3E0AF}"/>
+                  </a:ext>
+                </a:extLst>
+              </p:cNvPr>
+              <p:cNvSpPr txBox="1"/>
+              <p:nvPr/>
+            </p:nvSpPr>
+            <p:spPr>
+              <a:xfrm>
+                <a:off x="5810250" y="3994341"/>
+                <a:ext cx="2006190" cy="525016"/>
+              </a:xfrm>
+              <a:prstGeom prst="rect">
+                <a:avLst/>
+              </a:prstGeom>
+              <a:solidFill>
+                <a:schemeClr val="accent4">
+                  <a:lumMod val="20000"/>
+                  <a:lumOff val="80000"/>
+                </a:schemeClr>
+              </a:solidFill>
+            </p:spPr>
+            <p:txBody>
+              <a:bodyPr wrap="none" lIns="0" tIns="0" rIns="0" bIns="0" rtlCol="0">
+                <a:spAutoFit/>
+              </a:bodyPr>
+              <a:lstStyle/>
+              <a:p>
+                <a14:m>
+                  <m:oMathPara xmlns:m="http://schemas.openxmlformats.org/officeDocument/2006/math">
+                    <m:oMathParaPr>
+                      <m:jc m:val="centerGroup"/>
+                    </m:oMathParaPr>
+                    <m:oMath xmlns:m="http://schemas.openxmlformats.org/officeDocument/2006/math">
+                      <m:r>
+                        <a:rPr lang="ko-KR" altLang="en-US" i="1" smtClean="0">
+                          <a:latin typeface="Cambria Math" panose="02040503050406030204" pitchFamily="18" charset="0"/>
+                        </a:rPr>
+                        <m:t>𝑧</m:t>
+                      </m:r>
+                      <m:r>
+                        <a:rPr lang="ko-KR" altLang="en-US" i="0">
+                          <a:latin typeface="Cambria Math" panose="02040503050406030204" pitchFamily="18" charset="0"/>
+                        </a:rPr>
+                        <m:t>=</m:t>
+                      </m:r>
+                      <m:r>
+                        <a:rPr lang="ko-KR" altLang="en-US" i="1">
+                          <a:latin typeface="Cambria Math" panose="02040503050406030204" pitchFamily="18" charset="0"/>
+                        </a:rPr>
+                        <m:t>𝜎</m:t>
+                      </m:r>
+                      <m:d>
+                        <m:dPr>
+                          <m:ctrlPr>
+                            <a:rPr lang="ko-KR" altLang="en-US" i="1">
+                              <a:latin typeface="Cambria Math" panose="02040503050406030204" pitchFamily="18" charset="0"/>
+                            </a:rPr>
+                          </m:ctrlPr>
+                        </m:dPr>
+                        <m:e>
+                          <m:r>
+                            <a:rPr lang="ko-KR" altLang="en-US" i="1">
+                              <a:latin typeface="Cambria Math" panose="02040503050406030204" pitchFamily="18" charset="0"/>
+                            </a:rPr>
+                            <m:t>𝑦</m:t>
+                          </m:r>
+                        </m:e>
+                      </m:d>
+                      <m:r>
+                        <a:rPr lang="ko-KR" altLang="en-US" i="0">
+                          <a:latin typeface="Cambria Math" panose="02040503050406030204" pitchFamily="18" charset="0"/>
+                        </a:rPr>
+                        <m:t>=</m:t>
+                      </m:r>
+                      <m:f>
+                        <m:fPr>
+                          <m:ctrlPr>
+                            <a:rPr lang="ko-KR" altLang="en-US" i="1">
+                              <a:latin typeface="Cambria Math" panose="02040503050406030204" pitchFamily="18" charset="0"/>
+                            </a:rPr>
+                          </m:ctrlPr>
+                        </m:fPr>
+                        <m:num>
+                          <m:r>
+                            <a:rPr lang="ko-KR" altLang="en-US" i="0">
+                              <a:latin typeface="Cambria Math" panose="02040503050406030204" pitchFamily="18" charset="0"/>
+                            </a:rPr>
+                            <m:t>1</m:t>
+                          </m:r>
+                        </m:num>
+                        <m:den>
+                          <m:r>
+                            <a:rPr lang="ko-KR" altLang="en-US" i="0">
+                              <a:latin typeface="Cambria Math" panose="02040503050406030204" pitchFamily="18" charset="0"/>
+                            </a:rPr>
+                            <m:t>1+</m:t>
+                          </m:r>
+                          <m:sSup>
+                            <m:sSupPr>
+                              <m:ctrlPr>
+                                <a:rPr lang="ko-KR" altLang="en-US" i="1">
+                                  <a:latin typeface="Cambria Math" panose="02040503050406030204" pitchFamily="18" charset="0"/>
+                                </a:rPr>
+                              </m:ctrlPr>
+                            </m:sSupPr>
+                            <m:e>
+                              <m:r>
+                                <a:rPr lang="ko-KR" altLang="en-US" i="0">
+                                  <a:latin typeface="Cambria Math" panose="02040503050406030204" pitchFamily="18" charset="0"/>
+                                </a:rPr>
+                                <m:t>ⅇ</m:t>
+                              </m:r>
+                            </m:e>
+                            <m:sup>
+                              <m:r>
+                                <a:rPr lang="ko-KR" altLang="en-US" i="0">
+                                  <a:latin typeface="Cambria Math" panose="02040503050406030204" pitchFamily="18" charset="0"/>
+                                </a:rPr>
+                                <m:t>−</m:t>
+                              </m:r>
+                              <m:r>
+                                <a:rPr lang="ko-KR" altLang="en-US" i="1">
+                                  <a:latin typeface="Cambria Math" panose="02040503050406030204" pitchFamily="18" charset="0"/>
+                                </a:rPr>
+                                <m:t>𝑦</m:t>
+                              </m:r>
+                            </m:sup>
+                          </m:sSup>
+                        </m:den>
+                      </m:f>
+                    </m:oMath>
+                  </m:oMathPara>
+                </a14:m>
+                <a:endParaRPr lang="ko-KR" altLang="en-US" dirty="0"/>
+              </a:p>
+            </p:txBody>
+          </p:sp>
+        </mc:Choice>
+        <mc:Fallback>
+          <p:sp>
+            <p:nvSpPr>
+              <p:cNvPr id="6" name="TextBox 5">
+                <a:extLst>
+                  <a:ext uri="{FF2B5EF4-FFF2-40B4-BE49-F238E27FC236}">
+                    <a16:creationId xmlns:a16="http://schemas.microsoft.com/office/drawing/2014/main" id="{DFC8F8C4-C96E-F2F3-3FDB-EE8CFEC3E0AF}"/>
+                  </a:ext>
+                </a:extLst>
+              </p:cNvPr>
+              <p:cNvSpPr txBox="1">
+                <a:spLocks noRot="1" noChangeAspect="1" noMove="1" noResize="1" noEditPoints="1" noAdjustHandles="1" noChangeArrowheads="1" noChangeShapeType="1" noTextEdit="1"/>
+              </p:cNvSpPr>
+              <p:nvPr/>
+            </p:nvSpPr>
+            <p:spPr>
+              <a:xfrm>
+                <a:off x="5810250" y="3994341"/>
+                <a:ext cx="2006190" cy="525016"/>
+              </a:xfrm>
+              <a:prstGeom prst="rect">
+                <a:avLst/>
+              </a:prstGeom>
+              <a:blipFill>
+                <a:blip r:embed="rId3"/>
+                <a:stretch>
+                  <a:fillRect/>
+                </a:stretch>
+              </a:blipFill>
+            </p:spPr>
+            <p:txBody>
+              <a:bodyPr/>
+              <a:lstStyle/>
+              <a:p>
+                <a:r>
+                  <a:rPr lang="ko-KR" altLang="en-US">
+                    <a:noFill/>
+                  </a:rPr>
+                  <a:t> </a:t>
+                </a:r>
+              </a:p>
+            </p:txBody>
+          </p:sp>
+        </mc:Fallback>
+      </mc:AlternateContent>
+    </p:spTree>
+    <p:extLst>
+      <p:ext uri="{BB962C8B-B14F-4D97-AF65-F5344CB8AC3E}">
+        <p14:creationId xmlns:p14="http://schemas.microsoft.com/office/powerpoint/2010/main" val="1389096602"/>
       </p:ext>
     </p:extLst>
   </p:cSld>
@@ -8045,6 +11995,454 @@
     <p:extLst>
       <p:ext uri="{BB962C8B-B14F-4D97-AF65-F5344CB8AC3E}">
         <p14:creationId xmlns:p14="http://schemas.microsoft.com/office/powerpoint/2010/main" val="3690334973"/>
+      </p:ext>
+    </p:extLst>
+  </p:cSld>
+  <p:clrMapOvr>
+    <a:masterClrMapping/>
+  </p:clrMapOvr>
+</p:sld>
+</file>
+
+<file path=ppt/slides/slide20.xml><?xml version="1.0" encoding="utf-8"?>
+<p:sld xmlns:a="http://schemas.openxmlformats.org/drawingml/2006/main" xmlns:r="http://schemas.openxmlformats.org/officeDocument/2006/relationships" xmlns:p="http://schemas.openxmlformats.org/presentationml/2006/main">
+  <p:cSld>
+    <p:spTree>
+      <p:nvGrpSpPr>
+        <p:cNvPr id="1" name="">
+          <a:extLst>
+            <a:ext uri="{FF2B5EF4-FFF2-40B4-BE49-F238E27FC236}">
+              <a16:creationId xmlns:a16="http://schemas.microsoft.com/office/drawing/2014/main" id="{E2746333-54FE-98CD-B6F8-E4E15D580FBB}"/>
+            </a:ext>
+          </a:extLst>
+        </p:cNvPr>
+        <p:cNvGrpSpPr/>
+        <p:nvPr/>
+      </p:nvGrpSpPr>
+      <p:grpSpPr>
+        <a:xfrm>
+          <a:off x="0" y="0"/>
+          <a:ext cx="0" cy="0"/>
+          <a:chOff x="0" y="0"/>
+          <a:chExt cx="0" cy="0"/>
+        </a:xfrm>
+      </p:grpSpPr>
+      <p:sp>
+        <p:nvSpPr>
+          <p:cNvPr id="7" name="직사각형 6">
+            <a:extLst>
+              <a:ext uri="{FF2B5EF4-FFF2-40B4-BE49-F238E27FC236}">
+                <a16:creationId xmlns:a16="http://schemas.microsoft.com/office/drawing/2014/main" id="{DB71BC0C-FD37-3561-DD17-16985DBD291B}"/>
+              </a:ext>
+            </a:extLst>
+          </p:cNvPr>
+          <p:cNvSpPr/>
+          <p:nvPr/>
+        </p:nvSpPr>
+        <p:spPr>
+          <a:xfrm>
+            <a:off x="670590" y="3423329"/>
+            <a:ext cx="7467600" cy="523195"/>
+          </a:xfrm>
+          <a:prstGeom prst="rect">
+            <a:avLst/>
+          </a:prstGeom>
+          <a:solidFill>
+            <a:schemeClr val="bg1">
+              <a:lumMod val="85000"/>
+            </a:schemeClr>
+          </a:solidFill>
+          <a:ln>
+            <a:solidFill>
+              <a:schemeClr val="bg1">
+                <a:lumMod val="85000"/>
+              </a:schemeClr>
+            </a:solidFill>
+          </a:ln>
+        </p:spPr>
+        <p:style>
+          <a:lnRef idx="2">
+            <a:schemeClr val="accent1">
+              <a:shade val="15000"/>
+            </a:schemeClr>
+          </a:lnRef>
+          <a:fillRef idx="1">
+            <a:schemeClr val="accent1"/>
+          </a:fillRef>
+          <a:effectRef idx="0">
+            <a:schemeClr val="accent1"/>
+          </a:effectRef>
+          <a:fontRef idx="minor">
+            <a:schemeClr val="lt1"/>
+          </a:fontRef>
+        </p:style>
+        <p:txBody>
+          <a:bodyPr rtlCol="0" anchor="ctr"/>
+          <a:lstStyle/>
+          <a:p>
+            <a:pPr algn="ctr"/>
+            <a:endParaRPr lang="ko-KR" altLang="en-US" dirty="0"/>
+          </a:p>
+        </p:txBody>
+      </p:sp>
+      <p:sp>
+        <p:nvSpPr>
+          <p:cNvPr id="4" name="슬라이드 번호 개체 틀 3">
+            <a:extLst>
+              <a:ext uri="{FF2B5EF4-FFF2-40B4-BE49-F238E27FC236}">
+                <a16:creationId xmlns:a16="http://schemas.microsoft.com/office/drawing/2014/main" id="{1E091E23-1C23-DFF0-D321-72EC10004168}"/>
+              </a:ext>
+            </a:extLst>
+          </p:cNvPr>
+          <p:cNvSpPr>
+            <a:spLocks noGrp="1"/>
+          </p:cNvSpPr>
+          <p:nvPr>
+            <p:ph type="sldNum" sz="quarter" idx="12"/>
+          </p:nvPr>
+        </p:nvSpPr>
+        <p:spPr>
+          <a:xfrm>
+            <a:off x="10514011" y="6036261"/>
+            <a:ext cx="753545" cy="365125"/>
+          </a:xfrm>
+        </p:spPr>
+        <p:txBody>
+          <a:bodyPr/>
+          <a:lstStyle/>
+          <a:p>
+            <a:fld id="{D57F1E4F-1CFF-5643-939E-217C01CDF565}" type="slidenum">
+              <a:rPr lang="en-US" smtClean="0"/>
+              <a:pPr/>
+              <a:t>20</a:t>
+            </a:fld>
+            <a:endParaRPr lang="en-US" dirty="0"/>
+          </a:p>
+        </p:txBody>
+      </p:sp>
+      <p:sp>
+        <p:nvSpPr>
+          <p:cNvPr id="3" name="제목 1">
+            <a:extLst>
+              <a:ext uri="{FF2B5EF4-FFF2-40B4-BE49-F238E27FC236}">
+                <a16:creationId xmlns:a16="http://schemas.microsoft.com/office/drawing/2014/main" id="{D6805401-0AAA-7ABB-3967-3293E8B24D64}"/>
+              </a:ext>
+            </a:extLst>
+          </p:cNvPr>
+          <p:cNvSpPr txBox="1">
+            <a:spLocks/>
+          </p:cNvSpPr>
+          <p:nvPr/>
+        </p:nvSpPr>
+        <p:spPr>
+          <a:xfrm>
+            <a:off x="475645" y="481983"/>
+            <a:ext cx="10353762" cy="766439"/>
+          </a:xfrm>
+          <a:prstGeom prst="rect">
+            <a:avLst/>
+          </a:prstGeom>
+        </p:spPr>
+        <p:txBody>
+          <a:bodyPr vert="horz" lIns="91440" tIns="45720" rIns="91440" bIns="45720" rtlCol="0" anchor="ctr">
+            <a:normAutofit/>
+          </a:bodyPr>
+          <a:lstStyle>
+            <a:lvl1pPr algn="ctr" defTabSz="914400" rtl="0" eaLnBrk="1" latinLnBrk="1" hangingPunct="1">
+              <a:lnSpc>
+                <a:spcPct val="90000"/>
+              </a:lnSpc>
+              <a:spcBef>
+                <a:spcPct val="0"/>
+              </a:spcBef>
+              <a:buNone/>
+              <a:defRPr sz="3200" kern="1200" cap="all" baseline="0">
+                <a:solidFill>
+                  <a:schemeClr val="tx1"/>
+                </a:solidFill>
+                <a:effectLst/>
+                <a:latin typeface="Batang" panose="02030600000101010101" pitchFamily="18" charset="-127"/>
+                <a:ea typeface="Batang" panose="02030600000101010101" pitchFamily="18" charset="-127"/>
+                <a:cs typeface="+mj-cs"/>
+              </a:defRPr>
+            </a:lvl1pPr>
+          </a:lstStyle>
+          <a:p>
+            <a:pPr algn="l"/>
+            <a:r>
+              <a:rPr lang="en-US" altLang="ko-KR" sz="2800" cap="none" dirty="0">
+                <a:solidFill>
+                  <a:schemeClr val="bg2">
+                    <a:lumMod val="25000"/>
+                  </a:schemeClr>
+                </a:solidFill>
+                <a:latin typeface="D2Coding" panose="020B0609020101020101" pitchFamily="49" charset="-127"/>
+                <a:ea typeface="D2Coding" panose="020B0609020101020101" pitchFamily="49" charset="-127"/>
+                <a:cs typeface="Segoe UI Light" panose="020B0502040204020203" pitchFamily="34" charset="0"/>
+              </a:rPr>
+              <a:t>Contents</a:t>
+            </a:r>
+            <a:endParaRPr lang="ko-KR" altLang="en-US" sz="2800" cap="none" dirty="0">
+              <a:solidFill>
+                <a:schemeClr val="bg2">
+                  <a:lumMod val="25000"/>
+                </a:schemeClr>
+              </a:solidFill>
+              <a:latin typeface="D2Coding" panose="020B0609020101020101" pitchFamily="49" charset="-127"/>
+              <a:ea typeface="D2Coding" panose="020B0609020101020101" pitchFamily="49" charset="-127"/>
+              <a:cs typeface="Segoe UI Light" panose="020B0502040204020203" pitchFamily="34" charset="0"/>
+            </a:endParaRPr>
+          </a:p>
+        </p:txBody>
+      </p:sp>
+      <p:sp>
+        <p:nvSpPr>
+          <p:cNvPr id="5" name="TextBox 4">
+            <a:extLst>
+              <a:ext uri="{FF2B5EF4-FFF2-40B4-BE49-F238E27FC236}">
+                <a16:creationId xmlns:a16="http://schemas.microsoft.com/office/drawing/2014/main" id="{443615CE-087F-3EB0-FFF2-4A3AD887B7BE}"/>
+              </a:ext>
+            </a:extLst>
+          </p:cNvPr>
+          <p:cNvSpPr txBox="1"/>
+          <p:nvPr/>
+        </p:nvSpPr>
+        <p:spPr>
+          <a:xfrm>
+            <a:off x="1896858" y="1555154"/>
+            <a:ext cx="9370698" cy="4189993"/>
+          </a:xfrm>
+          <a:prstGeom prst="rect">
+            <a:avLst/>
+          </a:prstGeom>
+          <a:noFill/>
+        </p:spPr>
+        <p:txBody>
+          <a:bodyPr wrap="square">
+            <a:spAutoFit/>
+          </a:bodyPr>
+          <a:lstStyle/>
+          <a:p>
+            <a:pPr marL="457200" indent="-457200">
+              <a:lnSpc>
+                <a:spcPct val="150000"/>
+              </a:lnSpc>
+              <a:buAutoNum type="arabicPeriod"/>
+            </a:pPr>
+            <a:r>
+              <a:rPr lang="en-US" altLang="ko-KR" sz="2000" b="1" dirty="0">
+                <a:latin typeface="Yu Gothic UI Semilight" panose="020B0400000000000000" pitchFamily="34" charset="-128"/>
+                <a:ea typeface="Yu Gothic UI Semilight" panose="020B0400000000000000" pitchFamily="34" charset="-128"/>
+                <a:cs typeface="맑은 고딕 Semilight" panose="020B0502040204020203" pitchFamily="50" charset="-127"/>
+              </a:rPr>
+              <a:t>Problem Definition</a:t>
+            </a:r>
+          </a:p>
+          <a:p>
+            <a:pPr marL="457200" indent="-457200">
+              <a:lnSpc>
+                <a:spcPct val="150000"/>
+              </a:lnSpc>
+              <a:buAutoNum type="arabicPeriod"/>
+            </a:pPr>
+            <a:r>
+              <a:rPr lang="en-US" altLang="ko-KR" sz="2000" b="1" dirty="0">
+                <a:latin typeface="Yu Gothic UI Semilight" panose="020B0400000000000000" pitchFamily="34" charset="-128"/>
+                <a:ea typeface="Yu Gothic UI Semilight" panose="020B0400000000000000" pitchFamily="34" charset="-128"/>
+                <a:cs typeface="맑은 고딕 Semilight" panose="020B0502040204020203" pitchFamily="50" charset="-127"/>
+              </a:rPr>
+              <a:t>Data, algorithm and model</a:t>
+            </a:r>
+            <a:endParaRPr lang="en-US" altLang="ko-KR" sz="2000" b="1" i="0" dirty="0">
+              <a:effectLst/>
+              <a:latin typeface="Yu Gothic UI Semilight" panose="020B0400000000000000" pitchFamily="34" charset="-128"/>
+              <a:ea typeface="Yu Gothic UI Semilight" panose="020B0400000000000000" pitchFamily="34" charset="-128"/>
+              <a:cs typeface="맑은 고딕 Semilight" panose="020B0502040204020203" pitchFamily="50" charset="-127"/>
+            </a:endParaRPr>
+          </a:p>
+          <a:p>
+            <a:pPr marL="457200" indent="-457200" algn="l">
+              <a:lnSpc>
+                <a:spcPct val="150000"/>
+              </a:lnSpc>
+              <a:buAutoNum type="arabicPeriod"/>
+            </a:pPr>
+            <a:r>
+              <a:rPr lang="en-US" altLang="ko-KR" sz="2000" b="1" i="0" dirty="0">
+                <a:effectLst/>
+                <a:latin typeface="Yu Gothic UI Semilight" panose="020B0400000000000000" pitchFamily="34" charset="-128"/>
+                <a:ea typeface="Yu Gothic UI Semilight" panose="020B0400000000000000" pitchFamily="34" charset="-128"/>
+                <a:cs typeface="맑은 고딕 Semilight" panose="020B0502040204020203" pitchFamily="50" charset="-127"/>
+              </a:rPr>
+              <a:t>Extrapolation</a:t>
+            </a:r>
+          </a:p>
+          <a:p>
+            <a:pPr marL="457200" indent="-457200">
+              <a:lnSpc>
+                <a:spcPct val="150000"/>
+              </a:lnSpc>
+              <a:buAutoNum type="arabicPeriod"/>
+            </a:pPr>
+            <a:r>
+              <a:rPr lang="en-US" altLang="ko-KR" sz="2000" b="1" dirty="0">
+                <a:latin typeface="Yu Gothic UI Semilight" panose="020B0400000000000000" pitchFamily="34" charset="-128"/>
+                <a:ea typeface="Yu Gothic UI Semilight" panose="020B0400000000000000" pitchFamily="34" charset="-128"/>
+                <a:cs typeface="맑은 고딕 Semilight" panose="020B0502040204020203" pitchFamily="50" charset="-127"/>
+              </a:rPr>
+              <a:t>Logistic</a:t>
+            </a:r>
+            <a:r>
+              <a:rPr lang="ko-KR" altLang="en-US" sz="2000" b="1" dirty="0">
+                <a:latin typeface="Yu Gothic UI Semilight" panose="020B0400000000000000" pitchFamily="34" charset="-128"/>
+                <a:ea typeface="Yu Gothic UI Semilight" panose="020B0400000000000000" pitchFamily="34" charset="-128"/>
+                <a:cs typeface="맑은 고딕 Semilight" panose="020B0502040204020203" pitchFamily="50" charset="-127"/>
+              </a:rPr>
+              <a:t> </a:t>
+            </a:r>
+            <a:r>
+              <a:rPr lang="en-US" altLang="ko-KR" sz="2000" b="1" dirty="0">
+                <a:latin typeface="Yu Gothic UI Semilight" panose="020B0400000000000000" pitchFamily="34" charset="-128"/>
+                <a:ea typeface="Yu Gothic UI Semilight" panose="020B0400000000000000" pitchFamily="34" charset="-128"/>
+                <a:cs typeface="맑은 고딕 Semilight" panose="020B0502040204020203" pitchFamily="50" charset="-127"/>
+              </a:rPr>
+              <a:t>Regression</a:t>
+            </a:r>
+            <a:endParaRPr lang="en-US" altLang="ko-KR" sz="2000" b="1" i="0" dirty="0">
+              <a:effectLst/>
+              <a:latin typeface="Yu Gothic UI Semilight" panose="020B0400000000000000" pitchFamily="34" charset="-128"/>
+              <a:ea typeface="Yu Gothic UI Semilight" panose="020B0400000000000000" pitchFamily="34" charset="-128"/>
+              <a:cs typeface="맑은 고딕 Semilight" panose="020B0502040204020203" pitchFamily="50" charset="-127"/>
+            </a:endParaRPr>
+          </a:p>
+          <a:p>
+            <a:pPr marL="457200" indent="-457200" algn="l">
+              <a:lnSpc>
+                <a:spcPct val="150000"/>
+              </a:lnSpc>
+              <a:buAutoNum type="arabicPeriod"/>
+            </a:pPr>
+            <a:r>
+              <a:rPr lang="en-US" altLang="ko-KR" sz="2000" b="1" dirty="0">
+                <a:latin typeface="Yu Gothic UI Semilight" panose="020B0400000000000000" pitchFamily="34" charset="-128"/>
+                <a:ea typeface="Yu Gothic UI Semilight" panose="020B0400000000000000" pitchFamily="34" charset="-128"/>
+                <a:cs typeface="맑은 고딕 Semilight" panose="020B0502040204020203" pitchFamily="50" charset="-127"/>
+              </a:rPr>
+              <a:t>Ensemble Model</a:t>
+            </a:r>
+            <a:endParaRPr lang="en-US" altLang="ko-KR" sz="2000" b="1" i="0" dirty="0">
+              <a:effectLst/>
+              <a:latin typeface="Yu Gothic UI Semilight" panose="020B0400000000000000" pitchFamily="34" charset="-128"/>
+              <a:ea typeface="Yu Gothic UI Semilight" panose="020B0400000000000000" pitchFamily="34" charset="-128"/>
+              <a:cs typeface="맑은 고딕 Semilight" panose="020B0502040204020203" pitchFamily="50" charset="-127"/>
+            </a:endParaRPr>
+          </a:p>
+          <a:p>
+            <a:pPr marL="457200" indent="-457200" algn="l">
+              <a:lnSpc>
+                <a:spcPct val="150000"/>
+              </a:lnSpc>
+              <a:buAutoNum type="arabicPeriod"/>
+            </a:pPr>
+            <a:r>
+              <a:rPr lang="en-US" altLang="ko-KR" sz="2000" b="1" dirty="0">
+                <a:latin typeface="Yu Gothic UI Semilight" panose="020B0400000000000000" pitchFamily="34" charset="-128"/>
+                <a:ea typeface="Yu Gothic UI Semilight" panose="020B0400000000000000" pitchFamily="34" charset="-128"/>
+                <a:cs typeface="맑은 고딕 Semilight" panose="020B0502040204020203" pitchFamily="50" charset="-127"/>
+              </a:rPr>
+              <a:t>Calibration</a:t>
+            </a:r>
+          </a:p>
+          <a:p>
+            <a:pPr marL="457200" indent="-457200" algn="l">
+              <a:lnSpc>
+                <a:spcPct val="150000"/>
+              </a:lnSpc>
+              <a:buAutoNum type="arabicPeriod"/>
+            </a:pPr>
+            <a:r>
+              <a:rPr lang="en-US" altLang="ko-KR" sz="2000" b="1" i="0" dirty="0">
+                <a:effectLst/>
+                <a:latin typeface="Yu Gothic UI Semilight" panose="020B0400000000000000" pitchFamily="34" charset="-128"/>
+                <a:ea typeface="Yu Gothic UI Semilight" panose="020B0400000000000000" pitchFamily="34" charset="-128"/>
+                <a:cs typeface="맑은 고딕 Semilight" panose="020B0502040204020203" pitchFamily="50" charset="-127"/>
+              </a:rPr>
+              <a:t>Non-Parametric</a:t>
+            </a:r>
+            <a:r>
+              <a:rPr lang="en-US" altLang="ko-KR" sz="2000" b="1" dirty="0">
+                <a:latin typeface="Yu Gothic UI Semilight" panose="020B0400000000000000" pitchFamily="34" charset="-128"/>
+                <a:ea typeface="Yu Gothic UI Semilight" panose="020B0400000000000000" pitchFamily="34" charset="-128"/>
+                <a:cs typeface="맑은 고딕 Semilight" panose="020B0502040204020203" pitchFamily="50" charset="-127"/>
+              </a:rPr>
+              <a:t> vs Parametric</a:t>
+            </a:r>
+          </a:p>
+          <a:p>
+            <a:pPr marL="457200" indent="-457200" algn="l">
+              <a:lnSpc>
+                <a:spcPct val="150000"/>
+              </a:lnSpc>
+              <a:buAutoNum type="arabicPeriod"/>
+            </a:pPr>
+            <a:r>
+              <a:rPr lang="en-US" altLang="ko-KR" sz="2000" b="1" i="0" dirty="0">
+                <a:effectLst/>
+                <a:latin typeface="Yu Gothic UI Semilight" panose="020B0400000000000000" pitchFamily="34" charset="-128"/>
+                <a:ea typeface="Yu Gothic UI Semilight" panose="020B0400000000000000" pitchFamily="34" charset="-128"/>
+                <a:cs typeface="맑은 고딕 Semilight" panose="020B0502040204020203" pitchFamily="50" charset="-127"/>
+              </a:rPr>
+              <a:t>G</a:t>
+            </a:r>
+            <a:r>
+              <a:rPr lang="en-US" altLang="ko-KR" sz="2000" b="1" dirty="0">
+                <a:latin typeface="Yu Gothic UI Semilight" panose="020B0400000000000000" pitchFamily="34" charset="-128"/>
+                <a:ea typeface="Yu Gothic UI Semilight" panose="020B0400000000000000" pitchFamily="34" charset="-128"/>
+                <a:cs typeface="맑은 고딕 Semilight" panose="020B0502040204020203" pitchFamily="50" charset="-127"/>
+              </a:rPr>
+              <a:t>enerative vs Deterministic</a:t>
+            </a:r>
+          </a:p>
+          <a:p>
+            <a:pPr marL="457200" indent="-457200" algn="l">
+              <a:lnSpc>
+                <a:spcPct val="150000"/>
+              </a:lnSpc>
+              <a:buAutoNum type="arabicPeriod"/>
+            </a:pPr>
+            <a:r>
+              <a:rPr lang="en-US" altLang="ko-KR" sz="2000" b="1" i="0" dirty="0">
+                <a:effectLst/>
+                <a:latin typeface="Yu Gothic UI Semilight" panose="020B0400000000000000" pitchFamily="34" charset="-128"/>
+                <a:ea typeface="Yu Gothic UI Semilight" panose="020B0400000000000000" pitchFamily="34" charset="-128"/>
+                <a:cs typeface="맑은 고딕 Semilight" panose="020B0502040204020203" pitchFamily="50" charset="-127"/>
+              </a:rPr>
+              <a:t>Imbalance </a:t>
+            </a:r>
+            <a:r>
+              <a:rPr lang="en-US" altLang="ko-KR" sz="2000" b="1" dirty="0">
+                <a:latin typeface="Yu Gothic UI Semilight" panose="020B0400000000000000" pitchFamily="34" charset="-128"/>
+                <a:ea typeface="Yu Gothic UI Semilight" panose="020B0400000000000000" pitchFamily="34" charset="-128"/>
+                <a:cs typeface="맑은 고딕 Semilight" panose="020B0502040204020203" pitchFamily="50" charset="-127"/>
+              </a:rPr>
+              <a:t>D</a:t>
+            </a:r>
+            <a:r>
+              <a:rPr lang="en-US" altLang="ko-KR" sz="2000" b="1" i="0" dirty="0">
+                <a:effectLst/>
+                <a:latin typeface="Yu Gothic UI Semilight" panose="020B0400000000000000" pitchFamily="34" charset="-128"/>
+                <a:ea typeface="Yu Gothic UI Semilight" panose="020B0400000000000000" pitchFamily="34" charset="-128"/>
+                <a:cs typeface="맑은 고딕 Semilight" panose="020B0502040204020203" pitchFamily="50" charset="-127"/>
+              </a:rPr>
+              <a:t>ata</a:t>
+            </a:r>
+          </a:p>
+        </p:txBody>
+      </p:sp>
+    </p:spTree>
+    <p:extLst>
+      <p:ext uri="{BB962C8B-B14F-4D97-AF65-F5344CB8AC3E}">
+        <p14:creationId xmlns:p14="http://schemas.microsoft.com/office/powerpoint/2010/main" val="2291955670"/>
       </p:ext>
     </p:extLst>
   </p:cSld>

--- a/ML/ML_DL Algorithms.pptx
+++ b/ML/ML_DL Algorithms.pptx
@@ -282,7 +282,7 @@
                 <a:latin typeface="맑은 고딕" panose="020B0503020000020004" pitchFamily="50" charset="-127"/>
                 <a:ea typeface="맑은 고딕" panose="020B0503020000020004" pitchFamily="50" charset="-127"/>
               </a:rPr>
-              <a:t>2026-06-19</a:t>
+              <a:t>2026-06-21</a:t>
             </a:fld>
             <a:endParaRPr lang="ko-KR" altLang="en-US">
               <a:latin typeface="맑은 고딕" panose="020B0503020000020004" pitchFamily="50" charset="-127"/>
@@ -468,7 +468,7 @@
           <a:p>
             <a:fld id="{43E1C3DD-4A19-441D-907C-380838DB51C4}" type="datetime1">
               <a:rPr lang="ko-KR" altLang="en-US" noProof="0" smtClean="0"/>
-              <a:t>2026-06-19</a:t>
+              <a:t>2026-06-21</a:t>
             </a:fld>
             <a:endParaRPr lang="ko-KR" altLang="en-US" noProof="0"/>
           </a:p>
@@ -1316,7 +1316,7 @@
           <a:p>
             <a:fld id="{990475B5-67CA-4281-BDCA-DA943C3C8EB3}" type="datetime1">
               <a:rPr lang="ko-KR" altLang="en-US" noProof="0" smtClean="0"/>
-              <a:t>2026-06-19</a:t>
+              <a:t>2026-06-21</a:t>
             </a:fld>
             <a:endParaRPr lang="ko-KR" altLang="en-US" noProof="0"/>
           </a:p>
@@ -1970,7 +1970,7 @@
           <a:p>
             <a:fld id="{48A87A34-81AB-432B-8DAE-1953F412C126}" type="datetimeFigureOut">
               <a:rPr lang="en-US" smtClean="0"/>
-              <a:t>6/19/2026</a:t>
+              <a:t>6/21/2026</a:t>
             </a:fld>
             <a:endParaRPr lang="en-US" dirty="0"/>
           </a:p>
@@ -2266,7 +2266,7 @@
           <a:p>
             <a:fld id="{C655C81E-72E7-4D05-94B5-F45B321A525D}" type="datetime1">
               <a:rPr lang="ko-KR" altLang="en-US" noProof="0" smtClean="0"/>
-              <a:t>2026-06-19</a:t>
+              <a:t>2026-06-21</a:t>
             </a:fld>
             <a:endParaRPr lang="ko-KR" altLang="en-US" noProof="0" dirty="0">
               <a:latin typeface="맑은 고딕" panose="020B0503020000020004" pitchFamily="50" charset="-127"/>
@@ -4911,8 +4911,8 @@
           </p:txBody>
         </p:sp>
       </p:grpSp>
-      <mc:AlternateContent xmlns:mc="http://schemas.openxmlformats.org/markup-compatibility/2006">
-        <mc:Choice xmlns:a14="http://schemas.microsoft.com/office/drawing/2010/main" Requires="a14">
+      <mc:AlternateContent xmlns:mc="http://schemas.openxmlformats.org/markup-compatibility/2006" xmlns:a14="http://schemas.microsoft.com/office/drawing/2010/main">
+        <mc:Choice Requires="a14">
           <p:sp>
             <p:nvSpPr>
               <p:cNvPr id="11" name="TextBox 10">
@@ -4979,7 +4979,7 @@
             </p:txBody>
           </p:sp>
         </mc:Choice>
-        <mc:Fallback>
+        <mc:Fallback xmlns="">
           <p:sp>
             <p:nvSpPr>
               <p:cNvPr id="11" name="TextBox 10">
@@ -5024,8 +5024,8 @@
           </p:sp>
         </mc:Fallback>
       </mc:AlternateContent>
-      <mc:AlternateContent xmlns:mc="http://schemas.openxmlformats.org/markup-compatibility/2006">
-        <mc:Choice xmlns:a14="http://schemas.microsoft.com/office/drawing/2010/main" Requires="a14">
+      <mc:AlternateContent xmlns:mc="http://schemas.openxmlformats.org/markup-compatibility/2006" xmlns:a14="http://schemas.microsoft.com/office/drawing/2010/main">
+        <mc:Choice Requires="a14">
           <p:sp>
             <p:nvSpPr>
               <p:cNvPr id="12" name="TextBox 11">
@@ -5115,7 +5115,7 @@
             </p:txBody>
           </p:sp>
         </mc:Choice>
-        <mc:Fallback>
+        <mc:Fallback xmlns="">
           <p:sp>
             <p:nvSpPr>
               <p:cNvPr id="12" name="TextBox 11">
@@ -5160,8 +5160,8 @@
           </p:sp>
         </mc:Fallback>
       </mc:AlternateContent>
-      <mc:AlternateContent xmlns:mc="http://schemas.openxmlformats.org/markup-compatibility/2006">
-        <mc:Choice xmlns:a14="http://schemas.microsoft.com/office/drawing/2010/main" Requires="a14">
+      <mc:AlternateContent xmlns:mc="http://schemas.openxmlformats.org/markup-compatibility/2006" xmlns:a14="http://schemas.microsoft.com/office/drawing/2010/main">
+        <mc:Choice Requires="a14">
           <p:sp>
             <p:nvSpPr>
               <p:cNvPr id="13" name="TextBox 12">
@@ -5231,7 +5231,7 @@
             </p:txBody>
           </p:sp>
         </mc:Choice>
-        <mc:Fallback>
+        <mc:Fallback xmlns="">
           <p:sp>
             <p:nvSpPr>
               <p:cNvPr id="13" name="TextBox 12">
@@ -6237,8 +6237,8 @@
           </a:prstGeom>
         </p:spPr>
       </p:pic>
-      <mc:AlternateContent xmlns:mc="http://schemas.openxmlformats.org/markup-compatibility/2006">
-        <mc:Choice xmlns:a14="http://schemas.microsoft.com/office/drawing/2010/main" Requires="a14">
+      <mc:AlternateContent xmlns:mc="http://schemas.openxmlformats.org/markup-compatibility/2006" xmlns:a14="http://schemas.microsoft.com/office/drawing/2010/main">
+        <mc:Choice Requires="a14">
           <p:sp>
             <p:nvSpPr>
               <p:cNvPr id="16" name="TextBox 15">
@@ -6317,7 +6317,7 @@
             </p:txBody>
           </p:sp>
         </mc:Choice>
-        <mc:Fallback>
+        <mc:Fallback xmlns="">
           <p:sp>
             <p:nvSpPr>
               <p:cNvPr id="16" name="TextBox 15">
@@ -6362,8 +6362,8 @@
           </p:sp>
         </mc:Fallback>
       </mc:AlternateContent>
-      <mc:AlternateContent xmlns:mc="http://schemas.openxmlformats.org/markup-compatibility/2006">
-        <mc:Choice xmlns:a14="http://schemas.microsoft.com/office/drawing/2010/main" Requires="a14">
+      <mc:AlternateContent xmlns:mc="http://schemas.openxmlformats.org/markup-compatibility/2006" xmlns:a14="http://schemas.microsoft.com/office/drawing/2010/main">
+        <mc:Choice Requires="a14">
           <p:sp>
             <p:nvSpPr>
               <p:cNvPr id="17" name="TextBox 16">
@@ -6392,6 +6392,7 @@
               </a:bodyPr>
               <a:lstStyle/>
               <a:p>
+                <a:pPr/>
                 <a14:m>
                   <m:oMathPara xmlns:m="http://schemas.openxmlformats.org/officeDocument/2006/math">
                     <m:oMathParaPr>
@@ -6478,7 +6479,7 @@
             </p:txBody>
           </p:sp>
         </mc:Choice>
-        <mc:Fallback>
+        <mc:Fallback xmlns="">
           <p:sp>
             <p:nvSpPr>
               <p:cNvPr id="17" name="TextBox 16">
@@ -6875,8 +6876,8 @@
           </a:p>
         </p:txBody>
       </p:sp>
-      <mc:AlternateContent xmlns:mc="http://schemas.openxmlformats.org/markup-compatibility/2006">
-        <mc:Choice xmlns:a14="http://schemas.microsoft.com/office/drawing/2010/main" Requires="a14">
+      <mc:AlternateContent xmlns:mc="http://schemas.openxmlformats.org/markup-compatibility/2006" xmlns:a14="http://schemas.microsoft.com/office/drawing/2010/main">
+        <mc:Choice Requires="a14">
           <p:sp>
             <p:nvSpPr>
               <p:cNvPr id="16" name="TextBox 15">
@@ -6955,7 +6956,7 @@
             </p:txBody>
           </p:sp>
         </mc:Choice>
-        <mc:Fallback>
+        <mc:Fallback xmlns="">
           <p:sp>
             <p:nvSpPr>
               <p:cNvPr id="16" name="TextBox 15">
@@ -7000,8 +7001,8 @@
           </p:sp>
         </mc:Fallback>
       </mc:AlternateContent>
-      <mc:AlternateContent xmlns:mc="http://schemas.openxmlformats.org/markup-compatibility/2006">
-        <mc:Choice xmlns:a14="http://schemas.microsoft.com/office/drawing/2010/main" Requires="a14">
+      <mc:AlternateContent xmlns:mc="http://schemas.openxmlformats.org/markup-compatibility/2006" xmlns:a14="http://schemas.microsoft.com/office/drawing/2010/main">
+        <mc:Choice Requires="a14">
           <p:sp>
             <p:nvSpPr>
               <p:cNvPr id="6" name="TextBox 5">
@@ -7057,7 +7058,7 @@
             </p:txBody>
           </p:sp>
         </mc:Choice>
-        <mc:Fallback>
+        <mc:Fallback xmlns="">
           <p:sp>
             <p:nvSpPr>
               <p:cNvPr id="6" name="TextBox 5">
@@ -7102,8 +7103,8 @@
           </p:sp>
         </mc:Fallback>
       </mc:AlternateContent>
-      <mc:AlternateContent xmlns:mc="http://schemas.openxmlformats.org/markup-compatibility/2006">
-        <mc:Choice xmlns:a14="http://schemas.microsoft.com/office/drawing/2010/main" Requires="a14">
+      <mc:AlternateContent xmlns:mc="http://schemas.openxmlformats.org/markup-compatibility/2006" xmlns:a14="http://schemas.microsoft.com/office/drawing/2010/main">
+        <mc:Choice Requires="a14">
           <p:sp>
             <p:nvSpPr>
               <p:cNvPr id="9" name="TextBox 8">
@@ -7174,7 +7175,7 @@
             </p:txBody>
           </p:sp>
         </mc:Choice>
-        <mc:Fallback>
+        <mc:Fallback xmlns="">
           <p:sp>
             <p:nvSpPr>
               <p:cNvPr id="9" name="TextBox 8">
@@ -7219,8 +7220,8 @@
           </p:sp>
         </mc:Fallback>
       </mc:AlternateContent>
-      <mc:AlternateContent xmlns:mc="http://schemas.openxmlformats.org/markup-compatibility/2006">
-        <mc:Choice xmlns:a14="http://schemas.microsoft.com/office/drawing/2010/main" Requires="a14">
+      <mc:AlternateContent xmlns:mc="http://schemas.openxmlformats.org/markup-compatibility/2006" xmlns:a14="http://schemas.microsoft.com/office/drawing/2010/main">
+        <mc:Choice Requires="a14">
           <p:sp>
             <p:nvSpPr>
               <p:cNvPr id="10" name="TextBox 9">
@@ -7300,7 +7301,7 @@
             </p:txBody>
           </p:sp>
         </mc:Choice>
-        <mc:Fallback>
+        <mc:Fallback xmlns="">
           <p:sp>
             <p:nvSpPr>
               <p:cNvPr id="10" name="TextBox 9">
@@ -7345,8 +7346,8 @@
           </p:sp>
         </mc:Fallback>
       </mc:AlternateContent>
-      <mc:AlternateContent xmlns:mc="http://schemas.openxmlformats.org/markup-compatibility/2006">
-        <mc:Choice xmlns:a14="http://schemas.microsoft.com/office/drawing/2010/main" Requires="a14">
+      <mc:AlternateContent xmlns:mc="http://schemas.openxmlformats.org/markup-compatibility/2006" xmlns:a14="http://schemas.microsoft.com/office/drawing/2010/main">
+        <mc:Choice Requires="a14">
           <p:sp>
             <p:nvSpPr>
               <p:cNvPr id="13" name="TextBox 12">
@@ -7375,7 +7376,6 @@
               </a:bodyPr>
               <a:lstStyle/>
               <a:p>
-                <a:pPr/>
                 <a14:m>
                   <m:oMath xmlns:m="http://schemas.openxmlformats.org/officeDocument/2006/math">
                     <m:r>
@@ -7464,7 +7464,7 @@
             </p:txBody>
           </p:sp>
         </mc:Choice>
-        <mc:Fallback>
+        <mc:Fallback xmlns="">
           <p:sp>
             <p:nvSpPr>
               <p:cNvPr id="13" name="TextBox 12">
@@ -7509,8 +7509,8 @@
           </p:sp>
         </mc:Fallback>
       </mc:AlternateContent>
-      <mc:AlternateContent xmlns:mc="http://schemas.openxmlformats.org/markup-compatibility/2006">
-        <mc:Choice xmlns:a14="http://schemas.microsoft.com/office/drawing/2010/main" Requires="a14">
+      <mc:AlternateContent xmlns:mc="http://schemas.openxmlformats.org/markup-compatibility/2006" xmlns:a14="http://schemas.microsoft.com/office/drawing/2010/main">
+        <mc:Choice Requires="a14">
           <p:sp>
             <p:nvSpPr>
               <p:cNvPr id="18" name="TextBox 17">
@@ -7636,7 +7636,7 @@
             </p:txBody>
           </p:sp>
         </mc:Choice>
-        <mc:Fallback>
+        <mc:Fallback xmlns="">
           <p:sp>
             <p:nvSpPr>
               <p:cNvPr id="18" name="TextBox 17">
@@ -8465,7 +8465,21 @@
                 <a:latin typeface="D2Coding" panose="020B0609020101020101" pitchFamily="49" charset="-127"/>
                 <a:ea typeface="D2Coding" panose="020B0609020101020101" pitchFamily="49" charset="-127"/>
               </a:rPr>
-              <a:t>를 학습하고 새로운 데이터</a:t>
+              <a:t>의 </a:t>
+            </a:r>
+            <a:r>
+              <a:rPr lang="en-US" altLang="ko-KR" dirty="0">
+                <a:latin typeface="D2Coding" panose="020B0609020101020101" pitchFamily="49" charset="-127"/>
+                <a:ea typeface="D2Coding" panose="020B0609020101020101" pitchFamily="49" charset="-127"/>
+              </a:rPr>
+              <a:t>“BMI”</a:t>
+            </a:r>
+            <a:r>
+              <a:rPr lang="ko-KR" altLang="en-US" dirty="0">
+                <a:latin typeface="D2Coding" panose="020B0609020101020101" pitchFamily="49" charset="-127"/>
+                <a:ea typeface="D2Coding" panose="020B0609020101020101" pitchFamily="49" charset="-127"/>
+              </a:rPr>
+              <a:t>를 입력변수로 학습하고 새로운 데이터</a:t>
             </a:r>
             <a:r>
               <a:rPr lang="en-US" altLang="ko-KR" dirty="0">
@@ -10212,8 +10226,8 @@
           </a:extLst>
         </p:spPr>
       </p:pic>
-      <mc:AlternateContent xmlns:mc="http://schemas.openxmlformats.org/markup-compatibility/2006">
-        <mc:Choice xmlns:a14="http://schemas.microsoft.com/office/drawing/2010/main" Requires="a14">
+      <mc:AlternateContent xmlns:mc="http://schemas.openxmlformats.org/markup-compatibility/2006" xmlns:a14="http://schemas.microsoft.com/office/drawing/2010/main">
+        <mc:Choice Requires="a14">
           <p:sp>
             <p:nvSpPr>
               <p:cNvPr id="2" name="TextBox 1">
@@ -10247,6 +10261,7 @@
               </a:bodyPr>
               <a:lstStyle/>
               <a:p>
+                <a:pPr/>
                 <a14:m>
                   <m:oMathPara xmlns:m="http://schemas.openxmlformats.org/officeDocument/2006/math">
                     <m:oMathParaPr>
@@ -10335,7 +10350,7 @@
             </p:txBody>
           </p:sp>
         </mc:Choice>
-        <mc:Fallback>
+        <mc:Fallback xmlns="">
           <p:sp>
             <p:nvSpPr>
               <p:cNvPr id="2" name="TextBox 1">
@@ -11352,8 +11367,8 @@
           </a:graphicData>
         </a:graphic>
       </p:graphicFrame>
-      <mc:AlternateContent xmlns:mc="http://schemas.openxmlformats.org/markup-compatibility/2006">
-        <mc:Choice xmlns:a14="http://schemas.microsoft.com/office/drawing/2010/main" Requires="a14">
+      <mc:AlternateContent xmlns:mc="http://schemas.openxmlformats.org/markup-compatibility/2006" xmlns:a14="http://schemas.microsoft.com/office/drawing/2010/main">
+        <mc:Choice Requires="a14">
           <p:sp>
             <p:nvSpPr>
               <p:cNvPr id="6" name="TextBox 5">
@@ -11387,6 +11402,7 @@
               </a:bodyPr>
               <a:lstStyle/>
               <a:p>
+                <a:pPr/>
                 <a14:m>
                   <m:oMathPara xmlns:m="http://schemas.openxmlformats.org/officeDocument/2006/math">
                     <m:oMathParaPr>
@@ -11498,7 +11514,7 @@
             </p:txBody>
           </p:sp>
         </mc:Choice>
-        <mc:Fallback>
+        <mc:Fallback xmlns="">
           <p:sp>
             <p:nvSpPr>
               <p:cNvPr id="6" name="TextBox 5">
@@ -12375,7 +12391,7 @@
                 <a:ea typeface="Yu Gothic UI Semilight" panose="020B0400000000000000" pitchFamily="34" charset="-128"/>
                 <a:cs typeface="맑은 고딕 Semilight" panose="020B0502040204020203" pitchFamily="50" charset="-127"/>
               </a:rPr>
-              <a:t> vs Parametric</a:t>
+              <a:t> vs Parametric Model</a:t>
             </a:r>
           </a:p>
           <a:p>
@@ -12400,7 +12416,7 @@
                 <a:ea typeface="Yu Gothic UI Semilight" panose="020B0400000000000000" pitchFamily="34" charset="-128"/>
                 <a:cs typeface="맑은 고딕 Semilight" panose="020B0502040204020203" pitchFamily="50" charset="-127"/>
               </a:rPr>
-              <a:t>enerative vs Deterministic</a:t>
+              <a:t>enerative vs Deterministic Model</a:t>
             </a:r>
           </a:p>
           <a:p>
